--- a/docs/sales/kohlhammer-pim-kostenbetrachtung.pptx
+++ b/docs/sales/kohlhammer-pim-kostenbetrachtung.pptx
@@ -16,9 +16,11 @@
     <p:sldId id="264" r:id="rId10"/>
     <p:sldId id="265" r:id="rId11"/>
     <p:sldId id="266" r:id="rId12"/>
+    <p:sldId id="267" r:id="rId13"/>
+    <p:sldId id="268" r:id="rId14"/>
   </p:sldIdLst>
   <p:notesMasterIdLst>
-    <p:notesMasterId r:id="rId13"/>
+    <p:notesMasterId r:id="rId15"/>
   </p:notesMasterIdLst>
   <p:sldSz cx="12192000" cy="6858000"/>
   <p:notesSz cx="6858000" cy="12192000"/>
@@ -1056,7 +1058,7 @@
           <a:p>
             <a:r>
               <a:rPr lang="en-US" dirty="0"/>
-              <a:t>Zurückhaltend formulieren: eine Tendenz, keine Empfehlung um jeden Preis. Die Begründung folgt ausschließlich aus den zuvor gezeigten Kostentreibern und den Rahmenbedingungen bei Kohlhammer.</a:t>
+              <a:t>Ausgewogen darstellen: Das Migrationsrisiko bei anyPIM ist real, aber einmalig und durch Pilot und Parallelbetrieb begrenzbar. Die Risiken bei Pimcore – Lizenz und Release-Takt – wirken dauerhaft und liegen außerhalb des Einflusses von Kohlhammer.</a:t>
             </a:r>
             <a:endParaRPr lang="en-US" dirty="0"/>
           </a:p>
@@ -1144,7 +1146,7 @@
           <a:p>
             <a:r>
               <a:rPr lang="en-US" dirty="0"/>
-              <a:t>Die Vorlage macht beide Angebote vergleichbar. Gesamtkosten über fünf Jahre = Summe einmalig + 5 × Summe p. a.</a:t>
+              <a:t>Das Vorgehen ist für beide Optionen gleich. Der Proof of Concept adressiert die Punkte mit dem größten Kosten- und Risikoanteil.</a:t>
             </a:r>
             <a:endParaRPr lang="en-US" dirty="0"/>
           </a:p>
@@ -1168,6 +1170,182 @@
             <a:fld id="{F7021451-1387-4CA6-816F-3879F97B5CBC}" type="slidenum">
               <a:rPr lang="en-US"/>
               <a:t>11</a:t>
+            </a:fld>
+            <a:endParaRPr lang="en-US"/>
+          </a:p>
+        </p:txBody>
+      </p:sp>
+    </p:spTree>
+    <p:extLst>
+      <p:ext uri="{BB962C8B-B14F-4D97-AF65-F5344CB8AC3E}">
+        <p14:creationId xmlns:p14="http://schemas.microsoft.com/office/powerpoint/2010/main" val="1024086991"/>
+      </p:ext>
+    </p:extLst>
+  </p:cSld>
+  <p:clrMapOvr>
+    <a:masterClrMapping/>
+  </p:clrMapOvr>
+</p:notes>
+</file>
+
+<file path=ppt/notesSlides/notesSlide12.xml><?xml version="1.0" encoding="utf-8"?>
+<p:notes xmlns:a="http://schemas.openxmlformats.org/drawingml/2006/main" xmlns:r="http://schemas.openxmlformats.org/officeDocument/2006/relationships" xmlns:p="http://schemas.openxmlformats.org/presentationml/2006/main">
+  <p:cSld>
+    <p:spTree>
+      <p:nvGrpSpPr>
+        <p:cNvPr id="1" name=""/>
+        <p:cNvGrpSpPr/>
+        <p:nvPr/>
+      </p:nvGrpSpPr>
+      <p:grpSpPr>
+        <a:xfrm>
+          <a:off x="0" y="0"/>
+          <a:ext cx="0" cy="0"/>
+          <a:chOff x="0" y="0"/>
+          <a:chExt cx="0" cy="0"/>
+        </a:xfrm>
+      </p:grpSpPr>
+      <p:sp>
+        <p:nvSpPr>
+          <p:cNvPr id="2" name="Slide Image Placeholder 1"/>
+          <p:cNvSpPr>
+            <a:spLocks noGrp="1" noRot="1" noChangeAspect="1"/>
+          </p:cNvSpPr>
+          <p:nvPr>
+            <p:ph type="sldImg"/>
+          </p:nvPr>
+        </p:nvSpPr>
+        <p:spPr/>
+      </p:sp>
+      <p:sp>
+        <p:nvSpPr>
+          <p:cNvPr id="3" name="Notes Placeholder 2"/>
+          <p:cNvSpPr>
+            <a:spLocks noGrp="1"/>
+          </p:cNvSpPr>
+          <p:nvPr>
+            <p:ph type="body" idx="1"/>
+          </p:nvPr>
+        </p:nvSpPr>
+        <p:spPr/>
+        <p:txBody>
+          <a:bodyPr/>
+          <a:lstStyle/>
+          <a:p>
+            <a:r>
+              <a:rPr lang="en-US" dirty="0"/>
+              <a:t>Zurückhaltend formulieren: eine Tendenz, keine Empfehlung um jeden Preis. Die Begründung folgt ausschließlich aus den zuvor gezeigten Kostentreibern und den Rahmenbedingungen bei Kohlhammer.</a:t>
+            </a:r>
+            <a:endParaRPr lang="en-US" dirty="0"/>
+          </a:p>
+        </p:txBody>
+      </p:sp>
+      <p:sp>
+        <p:nvSpPr>
+          <p:cNvPr id="4" name="Slide Number Placeholder 3"/>
+          <p:cNvSpPr>
+            <a:spLocks noGrp="1"/>
+          </p:cNvSpPr>
+          <p:nvPr>
+            <p:ph type="sldNum" sz="quarter" idx="10"/>
+          </p:nvPr>
+        </p:nvSpPr>
+        <p:spPr/>
+        <p:txBody>
+          <a:bodyPr/>
+          <a:lstStyle/>
+          <a:p>
+            <a:fld id="{F7021451-1387-4CA6-816F-3879F97B5CBC}" type="slidenum">
+              <a:rPr lang="en-US"/>
+              <a:t>12</a:t>
+            </a:fld>
+            <a:endParaRPr lang="en-US"/>
+          </a:p>
+        </p:txBody>
+      </p:sp>
+    </p:spTree>
+    <p:extLst>
+      <p:ext uri="{BB962C8B-B14F-4D97-AF65-F5344CB8AC3E}">
+        <p14:creationId xmlns:p14="http://schemas.microsoft.com/office/powerpoint/2010/main" val="1024086991"/>
+      </p:ext>
+    </p:extLst>
+  </p:cSld>
+  <p:clrMapOvr>
+    <a:masterClrMapping/>
+  </p:clrMapOvr>
+</p:notes>
+</file>
+
+<file path=ppt/notesSlides/notesSlide13.xml><?xml version="1.0" encoding="utf-8"?>
+<p:notes xmlns:a="http://schemas.openxmlformats.org/drawingml/2006/main" xmlns:r="http://schemas.openxmlformats.org/officeDocument/2006/relationships" xmlns:p="http://schemas.openxmlformats.org/presentationml/2006/main">
+  <p:cSld>
+    <p:spTree>
+      <p:nvGrpSpPr>
+        <p:cNvPr id="1" name=""/>
+        <p:cNvGrpSpPr/>
+        <p:nvPr/>
+      </p:nvGrpSpPr>
+      <p:grpSpPr>
+        <a:xfrm>
+          <a:off x="0" y="0"/>
+          <a:ext cx="0" cy="0"/>
+          <a:chOff x="0" y="0"/>
+          <a:chExt cx="0" cy="0"/>
+        </a:xfrm>
+      </p:grpSpPr>
+      <p:sp>
+        <p:nvSpPr>
+          <p:cNvPr id="2" name="Slide Image Placeholder 1"/>
+          <p:cNvSpPr>
+            <a:spLocks noGrp="1" noRot="1" noChangeAspect="1"/>
+          </p:cNvSpPr>
+          <p:nvPr>
+            <p:ph type="sldImg"/>
+          </p:nvPr>
+        </p:nvSpPr>
+        <p:spPr/>
+      </p:sp>
+      <p:sp>
+        <p:nvSpPr>
+          <p:cNvPr id="3" name="Notes Placeholder 2"/>
+          <p:cNvSpPr>
+            <a:spLocks noGrp="1"/>
+          </p:cNvSpPr>
+          <p:nvPr>
+            <p:ph type="body" idx="1"/>
+          </p:nvPr>
+        </p:nvSpPr>
+        <p:spPr/>
+        <p:txBody>
+          <a:bodyPr/>
+          <a:lstStyle/>
+          <a:p>
+            <a:r>
+              <a:rPr lang="en-US" dirty="0"/>
+              <a:t>Die Vorlage macht beide Angebote vergleichbar. Gesamtkosten über fünf Jahre = Summe einmalig + 5 × Summe p. a.</a:t>
+            </a:r>
+            <a:endParaRPr lang="en-US" dirty="0"/>
+          </a:p>
+        </p:txBody>
+      </p:sp>
+      <p:sp>
+        <p:nvSpPr>
+          <p:cNvPr id="4" name="Slide Number Placeholder 3"/>
+          <p:cNvSpPr>
+            <a:spLocks noGrp="1"/>
+          </p:cNvSpPr>
+          <p:nvPr>
+            <p:ph type="sldNum" sz="quarter" idx="10"/>
+          </p:nvPr>
+        </p:nvSpPr>
+        <p:spPr/>
+        <p:txBody>
+          <a:bodyPr/>
+          <a:lstStyle/>
+          <a:p>
+            <a:fld id="{F7021451-1387-4CA6-816F-3879F97B5CBC}" type="slidenum">
+              <a:rPr lang="en-US"/>
+              <a:t>13</a:t>
             </a:fld>
             <a:endParaRPr lang="en-US"/>
           </a:p>
@@ -1320,7 +1498,7 @@
           <a:p>
             <a:r>
               <a:rPr lang="en-US" dirty="0"/>
-              <a:t>Der Rahmen ist bewusst symmetrisch. Wichtig: Die Funktionsliste ist der gemeinsame Maßstab. Die dritte Spalte erinnert daran, dass nicht alles in Euro messbar ist, aber in die Entscheidung gehört.</a:t>
+              <a:t>Neutral und anerkennend: Pimcore ist eine breite Plattform. Die Highlights beschreiben den Funktionsumfang der aktuellen Version; einzelne Funktionen sind je nach Edition lizenzpflichtig.</a:t>
             </a:r>
             <a:endParaRPr lang="en-US" dirty="0"/>
           </a:p>
@@ -1408,7 +1586,7 @@
           <a:p>
             <a:r>
               <a:rPr lang="en-US" dirty="0"/>
-              <a:t>Bei den einmaligen Kosten gibt es keinen klaren Sieger. Der wesentliche Posten in beiden Fällen ist die Funktionsliste: Bei Pimcore als Portierung, bei anyPIM als Neubau im Produktstandard.</a:t>
+              <a:t>Neutral beschrieben, gleiche Struktur wie bei Pimcore. Einige Funktionen (z. B. PDF-Vorlagen, Connectoren, SSO) sind lizenzpflichtige Enterprise-Module.</a:t>
             </a:r>
             <a:endParaRPr lang="en-US" dirty="0"/>
           </a:p>
@@ -1496,7 +1674,7 @@
           <a:p>
             <a:r>
               <a:rPr lang="en-US" dirty="0"/>
-              <a:t>Hier liegt der Kern der Kostenfrage. Die Lizenzposition hängt von den konkreten Angeboten ab; die Tendenz ergibt sich aus dem Modell (Edition vs. Module nach Nutzung). Release-Pflege und Pflege der Eigenentwicklungen sind bei Pimcore wiederkehrend, bei anyPIM Teil des Produkts. Pimcore profitiert von einem großen Dienstleistermarkt.</a:t>
+              <a:t>Der Rahmen ist bewusst symmetrisch. Wichtig: Die Funktionsliste ist der gemeinsame Maßstab. Die dritte Spalte erinnert daran, dass nicht alles in Euro messbar ist, aber in die Entscheidung gehört.</a:t>
             </a:r>
             <a:endParaRPr lang="en-US" dirty="0"/>
           </a:p>
@@ -1584,7 +1762,7 @@
           <a:p>
             <a:r>
               <a:rPr lang="en-US" dirty="0"/>
-              <a:t>Die Werte sind illustrativ und bilden nur die Logik ab: ähnlicher Startpunkt, unterschiedliche Steigung. Wo sich die Linien tatsächlich schneiden, ergibt erst die TCO-Rechnung mit echten Angeboten (Anhang).</a:t>
+              <a:t>Bei den einmaligen Kosten gibt es keinen klaren Sieger. Der wesentliche Posten in beiden Fällen ist die Funktionsliste: Bei Pimcore als Portierung, bei anyPIM als Neubau im Produktstandard.</a:t>
             </a:r>
             <a:endParaRPr lang="en-US" dirty="0"/>
           </a:p>
@@ -1672,7 +1850,7 @@
           <a:p>
             <a:r>
               <a:rPr lang="en-US" dirty="0"/>
-              <a:t>Neutral formuliert: Beide Spalten sind fachlich korrekt. Die untere Zeile gibt die heute bekannten Rahmenbedingungen bei Kohlhammer wieder – das Publikum ordnet sie selbst zu.</a:t>
+              <a:t>Hier liegt der Kern der Kostenfrage. Die Lizenzposition hängt von den konkreten Angeboten ab; die Tendenz ergibt sich aus dem Modell (Edition vs. Module nach Nutzung). Release-Pflege und Pflege der Eigenentwicklungen sind bei Pimcore wiederkehrend, bei anyPIM Teil des Produkts. Pimcore profitiert von einem großen Dienstleistermarkt.</a:t>
             </a:r>
             <a:endParaRPr lang="en-US" dirty="0"/>
           </a:p>
@@ -1760,7 +1938,7 @@
           <a:p>
             <a:r>
               <a:rPr lang="en-US" dirty="0"/>
-              <a:t>Ausgewogen darstellen: Das Migrationsrisiko bei anyPIM ist real, aber einmalig und durch Pilot und Parallelbetrieb begrenzbar. Die Risiken bei Pimcore – Lizenz und Release-Takt – wirken dauerhaft und liegen außerhalb des Einflusses von Kohlhammer.</a:t>
+              <a:t>Die Werte sind illustrativ und bilden nur die Logik ab: ähnlicher Startpunkt, unterschiedliche Steigung. Wo sich die Linien tatsächlich schneiden, ergibt erst die TCO-Rechnung mit echten Angeboten (Anhang).</a:t>
             </a:r>
             <a:endParaRPr lang="en-US" dirty="0"/>
           </a:p>
@@ -1848,7 +2026,7 @@
           <a:p>
             <a:r>
               <a:rPr lang="en-US" dirty="0"/>
-              <a:t>Das Vorgehen ist für beide Optionen gleich. Der Proof of Concept adressiert die Punkte mit dem größten Kosten- und Risikoanteil.</a:t>
+              <a:t>Neutral formuliert: Beide Spalten sind fachlich korrekt. Die untere Zeile gibt die heute bekannten Rahmenbedingungen bei Kohlhammer wieder – das Publikum ordnet sie selbst zu.</a:t>
             </a:r>
             <a:endParaRPr lang="en-US" dirty="0"/>
           </a:p>
@@ -2520,6 +2698,2408 @@
                 <a:ea typeface="Arial" pitchFamily="34" charset="-122"/>
                 <a:cs typeface="Arial" pitchFamily="34" charset="-120"/>
               </a:rPr>
+              <a:t>RISIKEN MIT KOSTENWIRKUNG</a:t>
+            </a:r>
+            <a:endParaRPr lang="en-US" sz="3000" dirty="0"/>
+          </a:p>
+        </p:txBody>
+      </p:sp>
+      <p:sp>
+        <p:nvSpPr>
+          <p:cNvPr id="3" name="Text 1"/>
+          <p:cNvSpPr txBox="1"/>
+          <p:nvPr/>
+        </p:nvSpPr>
+        <p:spPr>
+          <a:xfrm>
+            <a:off x="548640" y="1033272"/>
+            <a:ext cx="11094415" cy="365760"/>
+          </a:xfrm>
+          <a:prstGeom prst="rect">
+            <a:avLst/>
+          </a:prstGeom>
+          <a:noFill/>
+          <a:ln/>
+        </p:spPr>
+        <p:txBody>
+          <a:bodyPr wrap="square" lIns="0" tIns="0" rIns="0" bIns="0" rtlCol="0" anchor="t"/>
+          <a:lstStyle/>
+          <a:p>
+            <a:pPr indent="0" marL="0">
+              <a:buNone/>
+            </a:pPr>
+            <a:r>
+              <a:rPr lang="en-US" sz="1400" dirty="0">
+                <a:solidFill>
+                  <a:srgbClr val="4B5563"/>
+                </a:solidFill>
+                <a:latin typeface="Arial" pitchFamily="34" charset="0"/>
+                <a:ea typeface="Arial" pitchFamily="34" charset="-122"/>
+                <a:cs typeface="Arial" pitchFamily="34" charset="-120"/>
+              </a:rPr>
+              <a:t>Beide Optionen haben Risiken – entscheidend ist, wie gut sie sich begrenzen lassen.</a:t>
+            </a:r>
+            <a:endParaRPr lang="en-US" sz="1400" dirty="0"/>
+          </a:p>
+        </p:txBody>
+      </p:sp>
+      <p:sp>
+        <p:nvSpPr>
+          <p:cNvPr id="4" name="Text 2"/>
+          <p:cNvSpPr txBox="1"/>
+          <p:nvPr/>
+        </p:nvSpPr>
+        <p:spPr>
+          <a:xfrm>
+            <a:off x="548640" y="6400800"/>
+            <a:ext cx="7315200" cy="228600"/>
+          </a:xfrm>
+          <a:prstGeom prst="rect">
+            <a:avLst/>
+          </a:prstGeom>
+          <a:noFill/>
+          <a:ln/>
+        </p:spPr>
+        <p:txBody>
+          <a:bodyPr wrap="square" lIns="0" tIns="0" rIns="0" bIns="0" rtlCol="0" anchor="t"/>
+          <a:lstStyle/>
+          <a:p>
+            <a:pPr indent="0" marL="0">
+              <a:buNone/>
+            </a:pPr>
+            <a:r>
+              <a:rPr lang="en-US" sz="900" dirty="0">
+                <a:solidFill>
+                  <a:srgbClr val="4B5563"/>
+                </a:solidFill>
+                <a:latin typeface="Arial" pitchFamily="34" charset="0"/>
+                <a:ea typeface="Arial" pitchFamily="34" charset="-122"/>
+                <a:cs typeface="Arial" pitchFamily="34" charset="-120"/>
+              </a:rPr>
+              <a:t>PIM-Kostenbetrachtung Kohlhammer  ·  Entscheidungsgrundlage  ·  September 2026</a:t>
+            </a:r>
+            <a:endParaRPr lang="en-US" sz="900" dirty="0"/>
+          </a:p>
+        </p:txBody>
+      </p:sp>
+      <p:sp>
+        <p:nvSpPr>
+          <p:cNvPr id="5" name="Text 3"/>
+          <p:cNvSpPr txBox="1"/>
+          <p:nvPr/>
+        </p:nvSpPr>
+        <p:spPr>
+          <a:xfrm>
+            <a:off x="10728655" y="6400800"/>
+            <a:ext cx="914400" cy="228600"/>
+          </a:xfrm>
+          <a:prstGeom prst="rect">
+            <a:avLst/>
+          </a:prstGeom>
+          <a:noFill/>
+          <a:ln/>
+        </p:spPr>
+        <p:txBody>
+          <a:bodyPr wrap="square" lIns="0" tIns="0" rIns="0" bIns="0" rtlCol="0" anchor="t"/>
+          <a:lstStyle/>
+          <a:p>
+            <a:pPr algn="r" indent="0" marL="0">
+              <a:buNone/>
+            </a:pPr>
+            <a:r>
+              <a:rPr lang="en-US" sz="900" dirty="0">
+                <a:solidFill>
+                  <a:srgbClr val="4B5563"/>
+                </a:solidFill>
+                <a:latin typeface="Arial" pitchFamily="34" charset="0"/>
+                <a:ea typeface="Arial" pitchFamily="34" charset="-122"/>
+                <a:cs typeface="Arial" pitchFamily="34" charset="-120"/>
+              </a:rPr>
+              <a:t>10</a:t>
+            </a:r>
+            <a:endParaRPr lang="en-US" sz="900" dirty="0"/>
+          </a:p>
+        </p:txBody>
+      </p:sp>
+      <p:graphicFrame>
+        <p:nvGraphicFramePr>
+          <p:cNvPr id="11" name="Table 0"/>
+          <p:cNvGraphicFramePr>
+            <a:graphicFrameLocks noGrp="1"/>
+          </p:cNvGraphicFramePr>
+          <p:nvPr>
+            <p:extLst>
+              <p:ext uri="{D42A27DB-BD31-4B8C-83A1-F6EECF244321}">
+                <p14:modId xmlns:p14="http://schemas.microsoft.com/office/powerpoint/2010/main" val="1579011935"/>
+              </p:ext>
+            </p:extLst>
+          </p:nvPr>
+        </p:nvGraphicFramePr>
+        <p:xfrm>
+          <a:off x="548640" y="1600200"/>
+          <a:ext cx="11094415" cy="914400"/>
+        </p:xfrm>
+        <a:graphic>
+          <a:graphicData uri="http://schemas.openxmlformats.org/drawingml/2006/table">
+            <a:tbl>
+              <a:tblPr/>
+              <a:tblGrid>
+                <a:gridCol w="2286000"/>
+                <a:gridCol w="4389120"/>
+                <a:gridCol w="4416552"/>
+              </a:tblGrid>
+              <a:tr h="384048">
+                <a:tc>
+                  <a:txBody>
+                    <a:bodyPr/>
+                    <a:lstStyle/>
+                    <a:p>
+                      <a:pPr indent="0" marL="0">
+                        <a:buNone/>
+                      </a:pPr>
+                      <a:r>
+                        <a:rPr lang="en-US" sz="1250" dirty="0">
+                          <a:solidFill>
+                            <a:srgbClr val="FFFFFF"/>
+                          </a:solidFill>
+                          <a:latin typeface="Arial" pitchFamily="34" charset="0"/>
+                          <a:ea typeface="Arial" pitchFamily="34" charset="-122"/>
+                          <a:cs typeface="Arial" pitchFamily="34" charset="-120"/>
+                        </a:rPr>
+                        <a:t>Risiko</a:t>
+                      </a:r>
+                      <a:endParaRPr lang="en-US" sz="1250" dirty="0">
+                        <a:latin typeface="Arial" charset="0"/>
+                        <a:ea typeface="Arial" charset="0"/>
+                        <a:cs typeface="Arial" charset="0"/>
+                      </a:endParaRPr>
+                    </a:p>
+                  </a:txBody>
+                  <a:tcPr marL="109728" marR="109728" marT="64008" marB="64008" anchor="ctr">
+                    <a:lnL w="9525" cap="flat" cmpd="sng" algn="ctr">
+                      <a:solidFill>
+                        <a:srgbClr val="D6DDE3"/>
+                      </a:solidFill>
+                      <a:prstDash val="solid"/>
+                      <a:round/>
+                      <a:headEnd type="none" w="med" len="med"/>
+                      <a:tailEnd type="none" w="med" len="med"/>
+                    </a:lnL>
+                    <a:lnR w="9525" cap="flat" cmpd="sng" algn="ctr">
+                      <a:solidFill>
+                        <a:srgbClr val="D6DDE3"/>
+                      </a:solidFill>
+                      <a:prstDash val="solid"/>
+                      <a:round/>
+                      <a:headEnd type="none" w="med" len="med"/>
+                      <a:tailEnd type="none" w="med" len="med"/>
+                    </a:lnR>
+                    <a:lnT w="9525" cap="flat" cmpd="sng" algn="ctr">
+                      <a:solidFill>
+                        <a:srgbClr val="D6DDE3"/>
+                      </a:solidFill>
+                      <a:prstDash val="solid"/>
+                      <a:round/>
+                      <a:headEnd type="none" w="med" len="med"/>
+                      <a:tailEnd type="none" w="med" len="med"/>
+                    </a:lnT>
+                    <a:lnB w="9525" cap="flat" cmpd="sng" algn="ctr">
+                      <a:solidFill>
+                        <a:srgbClr val="D6DDE3"/>
+                      </a:solidFill>
+                      <a:prstDash val="solid"/>
+                      <a:round/>
+                      <a:headEnd type="none" w="med" len="med"/>
+                      <a:tailEnd type="none" w="med" len="med"/>
+                    </a:lnB>
+                    <a:solidFill>
+                      <a:srgbClr val="000E2F"/>
+                    </a:solidFill>
+                  </a:tcPr>
+                </a:tc>
+                <a:tc>
+                  <a:txBody>
+                    <a:bodyPr/>
+                    <a:lstStyle/>
+                    <a:p>
+                      <a:pPr indent="0" marL="0">
+                        <a:buNone/>
+                      </a:pPr>
+                      <a:r>
+                        <a:rPr lang="en-US" sz="1250" dirty="0">
+                          <a:solidFill>
+                            <a:srgbClr val="FFFFFF"/>
+                          </a:solidFill>
+                          <a:latin typeface="Arial" pitchFamily="34" charset="0"/>
+                          <a:ea typeface="Arial" pitchFamily="34" charset="-122"/>
+                          <a:cs typeface="Arial" pitchFamily="34" charset="-120"/>
+                        </a:rPr>
+                        <a:t>Pimcore-Upgrade</a:t>
+                      </a:r>
+                      <a:endParaRPr lang="en-US" sz="1250" dirty="0">
+                        <a:latin typeface="Arial" charset="0"/>
+                        <a:ea typeface="Arial" charset="0"/>
+                        <a:cs typeface="Arial" charset="0"/>
+                      </a:endParaRPr>
+                    </a:p>
+                  </a:txBody>
+                  <a:tcPr marL="109728" marR="109728" marT="64008" marB="64008" anchor="ctr">
+                    <a:lnL w="9525" cap="flat" cmpd="sng" algn="ctr">
+                      <a:solidFill>
+                        <a:srgbClr val="D6DDE3"/>
+                      </a:solidFill>
+                      <a:prstDash val="solid"/>
+                      <a:round/>
+                      <a:headEnd type="none" w="med" len="med"/>
+                      <a:tailEnd type="none" w="med" len="med"/>
+                    </a:lnL>
+                    <a:lnR w="9525" cap="flat" cmpd="sng" algn="ctr">
+                      <a:solidFill>
+                        <a:srgbClr val="D6DDE3"/>
+                      </a:solidFill>
+                      <a:prstDash val="solid"/>
+                      <a:round/>
+                      <a:headEnd type="none" w="med" len="med"/>
+                      <a:tailEnd type="none" w="med" len="med"/>
+                    </a:lnR>
+                    <a:lnT w="9525" cap="flat" cmpd="sng" algn="ctr">
+                      <a:solidFill>
+                        <a:srgbClr val="D6DDE3"/>
+                      </a:solidFill>
+                      <a:prstDash val="solid"/>
+                      <a:round/>
+                      <a:headEnd type="none" w="med" len="med"/>
+                      <a:tailEnd type="none" w="med" len="med"/>
+                    </a:lnT>
+                    <a:lnB w="9525" cap="flat" cmpd="sng" algn="ctr">
+                      <a:solidFill>
+                        <a:srgbClr val="D6DDE3"/>
+                      </a:solidFill>
+                      <a:prstDash val="solid"/>
+                      <a:round/>
+                      <a:headEnd type="none" w="med" len="med"/>
+                      <a:tailEnd type="none" w="med" len="med"/>
+                    </a:lnB>
+                    <a:solidFill>
+                      <a:srgbClr val="000E2F"/>
+                    </a:solidFill>
+                  </a:tcPr>
+                </a:tc>
+                <a:tc>
+                  <a:txBody>
+                    <a:bodyPr/>
+                    <a:lstStyle/>
+                    <a:p>
+                      <a:pPr indent="0" marL="0">
+                        <a:buNone/>
+                      </a:pPr>
+                      <a:r>
+                        <a:rPr lang="en-US" sz="1250" dirty="0">
+                          <a:solidFill>
+                            <a:srgbClr val="FFFFFF"/>
+                          </a:solidFill>
+                          <a:latin typeface="Arial" pitchFamily="34" charset="0"/>
+                          <a:ea typeface="Arial" pitchFamily="34" charset="-122"/>
+                          <a:cs typeface="Arial" pitchFamily="34" charset="-120"/>
+                        </a:rPr>
+                        <a:t>anyPIM</a:t>
+                      </a:r>
+                      <a:endParaRPr lang="en-US" sz="1250" dirty="0">
+                        <a:latin typeface="Arial" charset="0"/>
+                        <a:ea typeface="Arial" charset="0"/>
+                        <a:cs typeface="Arial" charset="0"/>
+                      </a:endParaRPr>
+                    </a:p>
+                  </a:txBody>
+                  <a:tcPr marL="109728" marR="109728" marT="64008" marB="64008" anchor="ctr">
+                    <a:lnL w="9525" cap="flat" cmpd="sng" algn="ctr">
+                      <a:solidFill>
+                        <a:srgbClr val="D6DDE3"/>
+                      </a:solidFill>
+                      <a:prstDash val="solid"/>
+                      <a:round/>
+                      <a:headEnd type="none" w="med" len="med"/>
+                      <a:tailEnd type="none" w="med" len="med"/>
+                    </a:lnL>
+                    <a:lnR w="9525" cap="flat" cmpd="sng" algn="ctr">
+                      <a:solidFill>
+                        <a:srgbClr val="D6DDE3"/>
+                      </a:solidFill>
+                      <a:prstDash val="solid"/>
+                      <a:round/>
+                      <a:headEnd type="none" w="med" len="med"/>
+                      <a:tailEnd type="none" w="med" len="med"/>
+                    </a:lnR>
+                    <a:lnT w="9525" cap="flat" cmpd="sng" algn="ctr">
+                      <a:solidFill>
+                        <a:srgbClr val="D6DDE3"/>
+                      </a:solidFill>
+                      <a:prstDash val="solid"/>
+                      <a:round/>
+                      <a:headEnd type="none" w="med" len="med"/>
+                      <a:tailEnd type="none" w="med" len="med"/>
+                    </a:lnT>
+                    <a:lnB w="9525" cap="flat" cmpd="sng" algn="ctr">
+                      <a:solidFill>
+                        <a:srgbClr val="D6DDE3"/>
+                      </a:solidFill>
+                      <a:prstDash val="solid"/>
+                      <a:round/>
+                      <a:headEnd type="none" w="med" len="med"/>
+                      <a:tailEnd type="none" w="med" len="med"/>
+                    </a:lnB>
+                    <a:solidFill>
+                      <a:srgbClr val="000E2F"/>
+                    </a:solidFill>
+                  </a:tcPr>
+                </a:tc>
+              </a:tr>
+              <a:tr h="658368">
+                <a:tc>
+                  <a:txBody>
+                    <a:bodyPr/>
+                    <a:lstStyle/>
+                    <a:p>
+                      <a:pPr indent="0" marL="0">
+                        <a:buNone/>
+                      </a:pPr>
+                      <a:r>
+                        <a:rPr lang="en-US" sz="1250" b="1" dirty="0">
+                          <a:solidFill>
+                            <a:srgbClr val="16181D"/>
+                          </a:solidFill>
+                          <a:latin typeface="Arial" pitchFamily="34" charset="0"/>
+                          <a:ea typeface="Arial" pitchFamily="34" charset="-122"/>
+                          <a:cs typeface="Arial" pitchFamily="34" charset="-120"/>
+                        </a:rPr>
+                        <a:t>Lizenzmodell</a:t>
+                      </a:r>
+                      <a:endParaRPr lang="en-US" sz="1250" dirty="0">
+                        <a:latin typeface="Arial" charset="0"/>
+                        <a:ea typeface="Arial" charset="0"/>
+                        <a:cs typeface="Arial" charset="0"/>
+                      </a:endParaRPr>
+                    </a:p>
+                  </a:txBody>
+                  <a:tcPr marL="109728" marR="109728" marT="64008" marB="64008" anchor="ctr">
+                    <a:lnL w="9525" cap="flat" cmpd="sng" algn="ctr">
+                      <a:solidFill>
+                        <a:srgbClr val="D6DDE3"/>
+                      </a:solidFill>
+                      <a:prstDash val="solid"/>
+                      <a:round/>
+                      <a:headEnd type="none" w="med" len="med"/>
+                      <a:tailEnd type="none" w="med" len="med"/>
+                    </a:lnL>
+                    <a:lnR w="9525" cap="flat" cmpd="sng" algn="ctr">
+                      <a:solidFill>
+                        <a:srgbClr val="D6DDE3"/>
+                      </a:solidFill>
+                      <a:prstDash val="solid"/>
+                      <a:round/>
+                      <a:headEnd type="none" w="med" len="med"/>
+                      <a:tailEnd type="none" w="med" len="med"/>
+                    </a:lnR>
+                    <a:lnT w="9525" cap="flat" cmpd="sng" algn="ctr">
+                      <a:solidFill>
+                        <a:srgbClr val="D6DDE3"/>
+                      </a:solidFill>
+                      <a:prstDash val="solid"/>
+                      <a:round/>
+                      <a:headEnd type="none" w="med" len="med"/>
+                      <a:tailEnd type="none" w="med" len="med"/>
+                    </a:lnT>
+                    <a:lnB w="9525" cap="flat" cmpd="sng" algn="ctr">
+                      <a:solidFill>
+                        <a:srgbClr val="D6DDE3"/>
+                      </a:solidFill>
+                      <a:prstDash val="solid"/>
+                      <a:round/>
+                      <a:headEnd type="none" w="med" len="med"/>
+                      <a:tailEnd type="none" w="med" len="med"/>
+                    </a:lnB>
+                    <a:solidFill>
+                      <a:srgbClr val="FFFFFF"/>
+                    </a:solidFill>
+                  </a:tcPr>
+                </a:tc>
+                <a:tc>
+                  <a:txBody>
+                    <a:bodyPr/>
+                    <a:lstStyle/>
+                    <a:p>
+                      <a:pPr indent="0" marL="0">
+                        <a:buNone/>
+                      </a:pPr>
+                      <a:r>
+                        <a:rPr lang="en-US" sz="1250" dirty="0">
+                          <a:solidFill>
+                            <a:srgbClr val="16181D"/>
+                          </a:solidFill>
+                          <a:latin typeface="Arial" pitchFamily="34" charset="0"/>
+                          <a:ea typeface="Arial" pitchFamily="34" charset="-122"/>
+                          <a:cs typeface="Arial" pitchFamily="34" charset="-120"/>
+                        </a:rPr>
+                        <a:t>Lizenzbedingungen liegen beim Hersteller; 2025 bereits einmal grundlegend geändert</a:t>
+                      </a:r>
+                      <a:endParaRPr lang="en-US" sz="1250" dirty="0">
+                        <a:latin typeface="Arial" charset="0"/>
+                        <a:ea typeface="Arial" charset="0"/>
+                        <a:cs typeface="Arial" charset="0"/>
+                      </a:endParaRPr>
+                    </a:p>
+                  </a:txBody>
+                  <a:tcPr marL="109728" marR="109728" marT="64008" marB="64008" anchor="ctr">
+                    <a:lnL w="9525" cap="flat" cmpd="sng" algn="ctr">
+                      <a:solidFill>
+                        <a:srgbClr val="D6DDE3"/>
+                      </a:solidFill>
+                      <a:prstDash val="solid"/>
+                      <a:round/>
+                      <a:headEnd type="none" w="med" len="med"/>
+                      <a:tailEnd type="none" w="med" len="med"/>
+                    </a:lnL>
+                    <a:lnR w="9525" cap="flat" cmpd="sng" algn="ctr">
+                      <a:solidFill>
+                        <a:srgbClr val="D6DDE3"/>
+                      </a:solidFill>
+                      <a:prstDash val="solid"/>
+                      <a:round/>
+                      <a:headEnd type="none" w="med" len="med"/>
+                      <a:tailEnd type="none" w="med" len="med"/>
+                    </a:lnR>
+                    <a:lnT w="9525" cap="flat" cmpd="sng" algn="ctr">
+                      <a:solidFill>
+                        <a:srgbClr val="D6DDE3"/>
+                      </a:solidFill>
+                      <a:prstDash val="solid"/>
+                      <a:round/>
+                      <a:headEnd type="none" w="med" len="med"/>
+                      <a:tailEnd type="none" w="med" len="med"/>
+                    </a:lnT>
+                    <a:lnB w="9525" cap="flat" cmpd="sng" algn="ctr">
+                      <a:solidFill>
+                        <a:srgbClr val="D6DDE3"/>
+                      </a:solidFill>
+                      <a:prstDash val="solid"/>
+                      <a:round/>
+                      <a:headEnd type="none" w="med" len="med"/>
+                      <a:tailEnd type="none" w="med" len="med"/>
+                    </a:lnB>
+                    <a:solidFill>
+                      <a:srgbClr val="FFFFFF"/>
+                    </a:solidFill>
+                  </a:tcPr>
+                </a:tc>
+                <a:tc>
+                  <a:txBody>
+                    <a:bodyPr/>
+                    <a:lstStyle/>
+                    <a:p>
+                      <a:pPr indent="0" marL="0">
+                        <a:buNone/>
+                      </a:pPr>
+                      <a:r>
+                        <a:rPr lang="en-US" sz="1250" dirty="0">
+                          <a:solidFill>
+                            <a:srgbClr val="16181D"/>
+                          </a:solidFill>
+                          <a:latin typeface="Arial" pitchFamily="34" charset="0"/>
+                          <a:ea typeface="Arial" pitchFamily="34" charset="-122"/>
+                          <a:cs typeface="Arial" pitchFamily="34" charset="-120"/>
+                        </a:rPr>
+                        <a:t>GPL-Kern; nur genutzte Module lizenziert</a:t>
+                      </a:r>
+                      <a:endParaRPr lang="en-US" sz="1250" dirty="0">
+                        <a:latin typeface="Arial" charset="0"/>
+                        <a:ea typeface="Arial" charset="0"/>
+                        <a:cs typeface="Arial" charset="0"/>
+                      </a:endParaRPr>
+                    </a:p>
+                  </a:txBody>
+                  <a:tcPr marL="109728" marR="109728" marT="64008" marB="64008" anchor="ctr">
+                    <a:lnL w="9525" cap="flat" cmpd="sng" algn="ctr">
+                      <a:solidFill>
+                        <a:srgbClr val="D6DDE3"/>
+                      </a:solidFill>
+                      <a:prstDash val="solid"/>
+                      <a:round/>
+                      <a:headEnd type="none" w="med" len="med"/>
+                      <a:tailEnd type="none" w="med" len="med"/>
+                    </a:lnL>
+                    <a:lnR w="9525" cap="flat" cmpd="sng" algn="ctr">
+                      <a:solidFill>
+                        <a:srgbClr val="D6DDE3"/>
+                      </a:solidFill>
+                      <a:prstDash val="solid"/>
+                      <a:round/>
+                      <a:headEnd type="none" w="med" len="med"/>
+                      <a:tailEnd type="none" w="med" len="med"/>
+                    </a:lnR>
+                    <a:lnT w="9525" cap="flat" cmpd="sng" algn="ctr">
+                      <a:solidFill>
+                        <a:srgbClr val="D6DDE3"/>
+                      </a:solidFill>
+                      <a:prstDash val="solid"/>
+                      <a:round/>
+                      <a:headEnd type="none" w="med" len="med"/>
+                      <a:tailEnd type="none" w="med" len="med"/>
+                    </a:lnT>
+                    <a:lnB w="9525" cap="flat" cmpd="sng" algn="ctr">
+                      <a:solidFill>
+                        <a:srgbClr val="D6DDE3"/>
+                      </a:solidFill>
+                      <a:prstDash val="solid"/>
+                      <a:round/>
+                      <a:headEnd type="none" w="med" len="med"/>
+                      <a:tailEnd type="none" w="med" len="med"/>
+                    </a:lnB>
+                    <a:solidFill>
+                      <a:srgbClr val="FFFFFF"/>
+                    </a:solidFill>
+                  </a:tcPr>
+                </a:tc>
+              </a:tr>
+              <a:tr h="658368">
+                <a:tc>
+                  <a:txBody>
+                    <a:bodyPr/>
+                    <a:lstStyle/>
+                    <a:p>
+                      <a:pPr indent="0" marL="0">
+                        <a:buNone/>
+                      </a:pPr>
+                      <a:r>
+                        <a:rPr lang="en-US" sz="1250" b="1" dirty="0">
+                          <a:solidFill>
+                            <a:srgbClr val="16181D"/>
+                          </a:solidFill>
+                          <a:latin typeface="Arial" pitchFamily="34" charset="0"/>
+                          <a:ea typeface="Arial" pitchFamily="34" charset="-122"/>
+                          <a:cs typeface="Arial" pitchFamily="34" charset="-120"/>
+                        </a:rPr>
+                        <a:t>Release-Takt</a:t>
+                      </a:r>
+                      <a:endParaRPr lang="en-US" sz="1250" dirty="0">
+                        <a:latin typeface="Arial" charset="0"/>
+                        <a:ea typeface="Arial" charset="0"/>
+                        <a:cs typeface="Arial" charset="0"/>
+                      </a:endParaRPr>
+                    </a:p>
+                  </a:txBody>
+                  <a:tcPr marL="109728" marR="109728" marT="64008" marB="64008" anchor="ctr">
+                    <a:lnL w="9525" cap="flat" cmpd="sng" algn="ctr">
+                      <a:solidFill>
+                        <a:srgbClr val="D6DDE3"/>
+                      </a:solidFill>
+                      <a:prstDash val="solid"/>
+                      <a:round/>
+                      <a:headEnd type="none" w="med" len="med"/>
+                      <a:tailEnd type="none" w="med" len="med"/>
+                    </a:lnL>
+                    <a:lnR w="9525" cap="flat" cmpd="sng" algn="ctr">
+                      <a:solidFill>
+                        <a:srgbClr val="D6DDE3"/>
+                      </a:solidFill>
+                      <a:prstDash val="solid"/>
+                      <a:round/>
+                      <a:headEnd type="none" w="med" len="med"/>
+                      <a:tailEnd type="none" w="med" len="med"/>
+                    </a:lnR>
+                    <a:lnT w="9525" cap="flat" cmpd="sng" algn="ctr">
+                      <a:solidFill>
+                        <a:srgbClr val="D6DDE3"/>
+                      </a:solidFill>
+                      <a:prstDash val="solid"/>
+                      <a:round/>
+                      <a:headEnd type="none" w="med" len="med"/>
+                      <a:tailEnd type="none" w="med" len="med"/>
+                    </a:lnT>
+                    <a:lnB w="9525" cap="flat" cmpd="sng" algn="ctr">
+                      <a:solidFill>
+                        <a:srgbClr val="D6DDE3"/>
+                      </a:solidFill>
+                      <a:prstDash val="solid"/>
+                      <a:round/>
+                      <a:headEnd type="none" w="med" len="med"/>
+                      <a:tailEnd type="none" w="med" len="med"/>
+                    </a:lnB>
+                    <a:solidFill>
+                      <a:srgbClr val="F7F9FA"/>
+                    </a:solidFill>
+                  </a:tcPr>
+                </a:tc>
+                <a:tc>
+                  <a:txBody>
+                    <a:bodyPr/>
+                    <a:lstStyle/>
+                    <a:p>
+                      <a:pPr indent="0" marL="0">
+                        <a:buNone/>
+                      </a:pPr>
+                      <a:r>
+                        <a:rPr lang="en-US" sz="1250" dirty="0">
+                          <a:solidFill>
+                            <a:srgbClr val="16181D"/>
+                          </a:solidFill>
+                          <a:latin typeface="Arial" pitchFamily="34" charset="0"/>
+                          <a:ea typeface="Arial" pitchFamily="34" charset="-122"/>
+                          <a:cs typeface="Arial" pitchFamily="34" charset="-120"/>
+                        </a:rPr>
+                        <a:t>Vom Hersteller vorgegeben; größere Umbauten erfordern Anpassungen</a:t>
+                      </a:r>
+                      <a:endParaRPr lang="en-US" sz="1250" dirty="0">
+                        <a:latin typeface="Arial" charset="0"/>
+                        <a:ea typeface="Arial" charset="0"/>
+                        <a:cs typeface="Arial" charset="0"/>
+                      </a:endParaRPr>
+                    </a:p>
+                  </a:txBody>
+                  <a:tcPr marL="109728" marR="109728" marT="64008" marB="64008" anchor="ctr">
+                    <a:lnL w="9525" cap="flat" cmpd="sng" algn="ctr">
+                      <a:solidFill>
+                        <a:srgbClr val="D6DDE3"/>
+                      </a:solidFill>
+                      <a:prstDash val="solid"/>
+                      <a:round/>
+                      <a:headEnd type="none" w="med" len="med"/>
+                      <a:tailEnd type="none" w="med" len="med"/>
+                    </a:lnL>
+                    <a:lnR w="9525" cap="flat" cmpd="sng" algn="ctr">
+                      <a:solidFill>
+                        <a:srgbClr val="D6DDE3"/>
+                      </a:solidFill>
+                      <a:prstDash val="solid"/>
+                      <a:round/>
+                      <a:headEnd type="none" w="med" len="med"/>
+                      <a:tailEnd type="none" w="med" len="med"/>
+                    </a:lnR>
+                    <a:lnT w="9525" cap="flat" cmpd="sng" algn="ctr">
+                      <a:solidFill>
+                        <a:srgbClr val="D6DDE3"/>
+                      </a:solidFill>
+                      <a:prstDash val="solid"/>
+                      <a:round/>
+                      <a:headEnd type="none" w="med" len="med"/>
+                      <a:tailEnd type="none" w="med" len="med"/>
+                    </a:lnT>
+                    <a:lnB w="9525" cap="flat" cmpd="sng" algn="ctr">
+                      <a:solidFill>
+                        <a:srgbClr val="D6DDE3"/>
+                      </a:solidFill>
+                      <a:prstDash val="solid"/>
+                      <a:round/>
+                      <a:headEnd type="none" w="med" len="med"/>
+                      <a:tailEnd type="none" w="med" len="med"/>
+                    </a:lnB>
+                    <a:solidFill>
+                      <a:srgbClr val="F7F9FA"/>
+                    </a:solidFill>
+                  </a:tcPr>
+                </a:tc>
+                <a:tc>
+                  <a:txBody>
+                    <a:bodyPr/>
+                    <a:lstStyle/>
+                    <a:p>
+                      <a:pPr indent="0" marL="0">
+                        <a:buNone/>
+                      </a:pPr>
+                      <a:r>
+                        <a:rPr lang="en-US" sz="1250" dirty="0">
+                          <a:solidFill>
+                            <a:srgbClr val="16181D"/>
+                          </a:solidFill>
+                          <a:latin typeface="Arial" pitchFamily="34" charset="0"/>
+                          <a:ea typeface="Arial" pitchFamily="34" charset="-122"/>
+                          <a:cs typeface="Arial" pitchFamily="34" charset="-120"/>
+                        </a:rPr>
+                        <a:t>Updates im eigenen Takt</a:t>
+                      </a:r>
+                      <a:endParaRPr lang="en-US" sz="1250" dirty="0">
+                        <a:latin typeface="Arial" charset="0"/>
+                        <a:ea typeface="Arial" charset="0"/>
+                        <a:cs typeface="Arial" charset="0"/>
+                      </a:endParaRPr>
+                    </a:p>
+                  </a:txBody>
+                  <a:tcPr marL="109728" marR="109728" marT="64008" marB="64008" anchor="ctr">
+                    <a:lnL w="9525" cap="flat" cmpd="sng" algn="ctr">
+                      <a:solidFill>
+                        <a:srgbClr val="D6DDE3"/>
+                      </a:solidFill>
+                      <a:prstDash val="solid"/>
+                      <a:round/>
+                      <a:headEnd type="none" w="med" len="med"/>
+                      <a:tailEnd type="none" w="med" len="med"/>
+                    </a:lnL>
+                    <a:lnR w="9525" cap="flat" cmpd="sng" algn="ctr">
+                      <a:solidFill>
+                        <a:srgbClr val="D6DDE3"/>
+                      </a:solidFill>
+                      <a:prstDash val="solid"/>
+                      <a:round/>
+                      <a:headEnd type="none" w="med" len="med"/>
+                      <a:tailEnd type="none" w="med" len="med"/>
+                    </a:lnR>
+                    <a:lnT w="9525" cap="flat" cmpd="sng" algn="ctr">
+                      <a:solidFill>
+                        <a:srgbClr val="D6DDE3"/>
+                      </a:solidFill>
+                      <a:prstDash val="solid"/>
+                      <a:round/>
+                      <a:headEnd type="none" w="med" len="med"/>
+                      <a:tailEnd type="none" w="med" len="med"/>
+                    </a:lnT>
+                    <a:lnB w="9525" cap="flat" cmpd="sng" algn="ctr">
+                      <a:solidFill>
+                        <a:srgbClr val="D6DDE3"/>
+                      </a:solidFill>
+                      <a:prstDash val="solid"/>
+                      <a:round/>
+                      <a:headEnd type="none" w="med" len="med"/>
+                      <a:tailEnd type="none" w="med" len="med"/>
+                    </a:lnB>
+                    <a:solidFill>
+                      <a:srgbClr val="F7F9FA"/>
+                    </a:solidFill>
+                  </a:tcPr>
+                </a:tc>
+              </a:tr>
+              <a:tr h="658368">
+                <a:tc>
+                  <a:txBody>
+                    <a:bodyPr/>
+                    <a:lstStyle/>
+                    <a:p>
+                      <a:pPr indent="0" marL="0">
+                        <a:buNone/>
+                      </a:pPr>
+                      <a:r>
+                        <a:rPr lang="en-US" sz="1250" b="1" dirty="0">
+                          <a:solidFill>
+                            <a:srgbClr val="16181D"/>
+                          </a:solidFill>
+                          <a:latin typeface="Arial" pitchFamily="34" charset="0"/>
+                          <a:ea typeface="Arial" pitchFamily="34" charset="-122"/>
+                          <a:cs typeface="Arial" pitchFamily="34" charset="-120"/>
+                        </a:rPr>
+                        <a:t>Datenmigration</a:t>
+                      </a:r>
+                      <a:endParaRPr lang="en-US" sz="1250" dirty="0">
+                        <a:latin typeface="Arial" charset="0"/>
+                        <a:ea typeface="Arial" charset="0"/>
+                        <a:cs typeface="Arial" charset="0"/>
+                      </a:endParaRPr>
+                    </a:p>
+                  </a:txBody>
+                  <a:tcPr marL="109728" marR="109728" marT="64008" marB="64008" anchor="ctr">
+                    <a:lnL w="9525" cap="flat" cmpd="sng" algn="ctr">
+                      <a:solidFill>
+                        <a:srgbClr val="D6DDE3"/>
+                      </a:solidFill>
+                      <a:prstDash val="solid"/>
+                      <a:round/>
+                      <a:headEnd type="none" w="med" len="med"/>
+                      <a:tailEnd type="none" w="med" len="med"/>
+                    </a:lnL>
+                    <a:lnR w="9525" cap="flat" cmpd="sng" algn="ctr">
+                      <a:solidFill>
+                        <a:srgbClr val="D6DDE3"/>
+                      </a:solidFill>
+                      <a:prstDash val="solid"/>
+                      <a:round/>
+                      <a:headEnd type="none" w="med" len="med"/>
+                      <a:tailEnd type="none" w="med" len="med"/>
+                    </a:lnR>
+                    <a:lnT w="9525" cap="flat" cmpd="sng" algn="ctr">
+                      <a:solidFill>
+                        <a:srgbClr val="D6DDE3"/>
+                      </a:solidFill>
+                      <a:prstDash val="solid"/>
+                      <a:round/>
+                      <a:headEnd type="none" w="med" len="med"/>
+                      <a:tailEnd type="none" w="med" len="med"/>
+                    </a:lnT>
+                    <a:lnB w="9525" cap="flat" cmpd="sng" algn="ctr">
+                      <a:solidFill>
+                        <a:srgbClr val="D6DDE3"/>
+                      </a:solidFill>
+                      <a:prstDash val="solid"/>
+                      <a:round/>
+                      <a:headEnd type="none" w="med" len="med"/>
+                      <a:tailEnd type="none" w="med" len="med"/>
+                    </a:lnB>
+                    <a:solidFill>
+                      <a:srgbClr val="FFFFFF"/>
+                    </a:solidFill>
+                  </a:tcPr>
+                </a:tc>
+                <a:tc>
+                  <a:txBody>
+                    <a:bodyPr/>
+                    <a:lstStyle/>
+                    <a:p>
+                      <a:pPr indent="0" marL="0">
+                        <a:buNone/>
+                      </a:pPr>
+                      <a:r>
+                        <a:rPr lang="en-US" sz="1250" dirty="0">
+                          <a:solidFill>
+                            <a:srgbClr val="16181D"/>
+                          </a:solidFill>
+                          <a:latin typeface="Arial" pitchFamily="34" charset="0"/>
+                          <a:ea typeface="Arial" pitchFamily="34" charset="-122"/>
+                          <a:cs typeface="Arial" pitchFamily="34" charset="-120"/>
+                        </a:rPr>
+                        <a:t>Entfällt weitgehend</a:t>
+                      </a:r>
+                      <a:endParaRPr lang="en-US" sz="1250" dirty="0">
+                        <a:latin typeface="Arial" charset="0"/>
+                        <a:ea typeface="Arial" charset="0"/>
+                        <a:cs typeface="Arial" charset="0"/>
+                      </a:endParaRPr>
+                    </a:p>
+                  </a:txBody>
+                  <a:tcPr marL="109728" marR="109728" marT="64008" marB="64008" anchor="ctr">
+                    <a:lnL w="9525" cap="flat" cmpd="sng" algn="ctr">
+                      <a:solidFill>
+                        <a:srgbClr val="D6DDE3"/>
+                      </a:solidFill>
+                      <a:prstDash val="solid"/>
+                      <a:round/>
+                      <a:headEnd type="none" w="med" len="med"/>
+                      <a:tailEnd type="none" w="med" len="med"/>
+                    </a:lnL>
+                    <a:lnR w="9525" cap="flat" cmpd="sng" algn="ctr">
+                      <a:solidFill>
+                        <a:srgbClr val="D6DDE3"/>
+                      </a:solidFill>
+                      <a:prstDash val="solid"/>
+                      <a:round/>
+                      <a:headEnd type="none" w="med" len="med"/>
+                      <a:tailEnd type="none" w="med" len="med"/>
+                    </a:lnR>
+                    <a:lnT w="9525" cap="flat" cmpd="sng" algn="ctr">
+                      <a:solidFill>
+                        <a:srgbClr val="D6DDE3"/>
+                      </a:solidFill>
+                      <a:prstDash val="solid"/>
+                      <a:round/>
+                      <a:headEnd type="none" w="med" len="med"/>
+                      <a:tailEnd type="none" w="med" len="med"/>
+                    </a:lnT>
+                    <a:lnB w="9525" cap="flat" cmpd="sng" algn="ctr">
+                      <a:solidFill>
+                        <a:srgbClr val="D6DDE3"/>
+                      </a:solidFill>
+                      <a:prstDash val="solid"/>
+                      <a:round/>
+                      <a:headEnd type="none" w="med" len="med"/>
+                      <a:tailEnd type="none" w="med" len="med"/>
+                    </a:lnB>
+                    <a:solidFill>
+                      <a:srgbClr val="FFFFFF"/>
+                    </a:solidFill>
+                  </a:tcPr>
+                </a:tc>
+                <a:tc>
+                  <a:txBody>
+                    <a:bodyPr/>
+                    <a:lstStyle/>
+                    <a:p>
+                      <a:pPr indent="0" marL="0">
+                        <a:buNone/>
+                      </a:pPr>
+                      <a:r>
+                        <a:rPr lang="en-US" sz="1250" dirty="0">
+                          <a:solidFill>
+                            <a:srgbClr val="16181D"/>
+                          </a:solidFill>
+                          <a:latin typeface="Arial" pitchFamily="34" charset="0"/>
+                          <a:ea typeface="Arial" pitchFamily="34" charset="-122"/>
+                          <a:cs typeface="Arial" pitchFamily="34" charset="-120"/>
+                        </a:rPr>
+                        <a:t>Einmaliges Risiko – begrenzt durch Pilot und Parallelbetrieb</a:t>
+                      </a:r>
+                      <a:endParaRPr lang="en-US" sz="1250" dirty="0">
+                        <a:latin typeface="Arial" charset="0"/>
+                        <a:ea typeface="Arial" charset="0"/>
+                        <a:cs typeface="Arial" charset="0"/>
+                      </a:endParaRPr>
+                    </a:p>
+                  </a:txBody>
+                  <a:tcPr marL="109728" marR="109728" marT="64008" marB="64008" anchor="ctr">
+                    <a:lnL w="9525" cap="flat" cmpd="sng" algn="ctr">
+                      <a:solidFill>
+                        <a:srgbClr val="D6DDE3"/>
+                      </a:solidFill>
+                      <a:prstDash val="solid"/>
+                      <a:round/>
+                      <a:headEnd type="none" w="med" len="med"/>
+                      <a:tailEnd type="none" w="med" len="med"/>
+                    </a:lnL>
+                    <a:lnR w="9525" cap="flat" cmpd="sng" algn="ctr">
+                      <a:solidFill>
+                        <a:srgbClr val="D6DDE3"/>
+                      </a:solidFill>
+                      <a:prstDash val="solid"/>
+                      <a:round/>
+                      <a:headEnd type="none" w="med" len="med"/>
+                      <a:tailEnd type="none" w="med" len="med"/>
+                    </a:lnR>
+                    <a:lnT w="9525" cap="flat" cmpd="sng" algn="ctr">
+                      <a:solidFill>
+                        <a:srgbClr val="D6DDE3"/>
+                      </a:solidFill>
+                      <a:prstDash val="solid"/>
+                      <a:round/>
+                      <a:headEnd type="none" w="med" len="med"/>
+                      <a:tailEnd type="none" w="med" len="med"/>
+                    </a:lnT>
+                    <a:lnB w="9525" cap="flat" cmpd="sng" algn="ctr">
+                      <a:solidFill>
+                        <a:srgbClr val="D6DDE3"/>
+                      </a:solidFill>
+                      <a:prstDash val="solid"/>
+                      <a:round/>
+                      <a:headEnd type="none" w="med" len="med"/>
+                      <a:tailEnd type="none" w="med" len="med"/>
+                    </a:lnB>
+                    <a:solidFill>
+                      <a:srgbClr val="FFFFFF"/>
+                    </a:solidFill>
+                  </a:tcPr>
+                </a:tc>
+              </a:tr>
+              <a:tr h="658368">
+                <a:tc>
+                  <a:txBody>
+                    <a:bodyPr/>
+                    <a:lstStyle/>
+                    <a:p>
+                      <a:pPr indent="0" marL="0">
+                        <a:buNone/>
+                      </a:pPr>
+                      <a:r>
+                        <a:rPr lang="en-US" sz="1250" b="1" dirty="0">
+                          <a:solidFill>
+                            <a:srgbClr val="16181D"/>
+                          </a:solidFill>
+                          <a:latin typeface="Arial" pitchFamily="34" charset="0"/>
+                          <a:ea typeface="Arial" pitchFamily="34" charset="-122"/>
+                          <a:cs typeface="Arial" pitchFamily="34" charset="-120"/>
+                        </a:rPr>
+                        <a:t>Ökosystem</a:t>
+                      </a:r>
+                      <a:endParaRPr lang="en-US" sz="1250" dirty="0">
+                        <a:latin typeface="Arial" charset="0"/>
+                        <a:ea typeface="Arial" charset="0"/>
+                        <a:cs typeface="Arial" charset="0"/>
+                      </a:endParaRPr>
+                    </a:p>
+                  </a:txBody>
+                  <a:tcPr marL="109728" marR="109728" marT="64008" marB="64008" anchor="ctr">
+                    <a:lnL w="9525" cap="flat" cmpd="sng" algn="ctr">
+                      <a:solidFill>
+                        <a:srgbClr val="D6DDE3"/>
+                      </a:solidFill>
+                      <a:prstDash val="solid"/>
+                      <a:round/>
+                      <a:headEnd type="none" w="med" len="med"/>
+                      <a:tailEnd type="none" w="med" len="med"/>
+                    </a:lnL>
+                    <a:lnR w="9525" cap="flat" cmpd="sng" algn="ctr">
+                      <a:solidFill>
+                        <a:srgbClr val="D6DDE3"/>
+                      </a:solidFill>
+                      <a:prstDash val="solid"/>
+                      <a:round/>
+                      <a:headEnd type="none" w="med" len="med"/>
+                      <a:tailEnd type="none" w="med" len="med"/>
+                    </a:lnR>
+                    <a:lnT w="9525" cap="flat" cmpd="sng" algn="ctr">
+                      <a:solidFill>
+                        <a:srgbClr val="D6DDE3"/>
+                      </a:solidFill>
+                      <a:prstDash val="solid"/>
+                      <a:round/>
+                      <a:headEnd type="none" w="med" len="med"/>
+                      <a:tailEnd type="none" w="med" len="med"/>
+                    </a:lnT>
+                    <a:lnB w="9525" cap="flat" cmpd="sng" algn="ctr">
+                      <a:solidFill>
+                        <a:srgbClr val="D6DDE3"/>
+                      </a:solidFill>
+                      <a:prstDash val="solid"/>
+                      <a:round/>
+                      <a:headEnd type="none" w="med" len="med"/>
+                      <a:tailEnd type="none" w="med" len="med"/>
+                    </a:lnB>
+                    <a:solidFill>
+                      <a:srgbClr val="F7F9FA"/>
+                    </a:solidFill>
+                  </a:tcPr>
+                </a:tc>
+                <a:tc>
+                  <a:txBody>
+                    <a:bodyPr/>
+                    <a:lstStyle/>
+                    <a:p>
+                      <a:pPr indent="0" marL="0">
+                        <a:buNone/>
+                      </a:pPr>
+                      <a:r>
+                        <a:rPr lang="en-US" sz="1250" dirty="0">
+                          <a:solidFill>
+                            <a:srgbClr val="16181D"/>
+                          </a:solidFill>
+                          <a:latin typeface="Arial" pitchFamily="34" charset="0"/>
+                          <a:ea typeface="Arial" pitchFamily="34" charset="-122"/>
+                          <a:cs typeface="Arial" pitchFamily="34" charset="-120"/>
+                        </a:rPr>
+                        <a:t>Groß: viele Partner und Erweiterungen</a:t>
+                      </a:r>
+                      <a:endParaRPr lang="en-US" sz="1250" dirty="0">
+                        <a:latin typeface="Arial" charset="0"/>
+                        <a:ea typeface="Arial" charset="0"/>
+                        <a:cs typeface="Arial" charset="0"/>
+                      </a:endParaRPr>
+                    </a:p>
+                  </a:txBody>
+                  <a:tcPr marL="109728" marR="109728" marT="64008" marB="64008" anchor="ctr">
+                    <a:lnL w="9525" cap="flat" cmpd="sng" algn="ctr">
+                      <a:solidFill>
+                        <a:srgbClr val="D6DDE3"/>
+                      </a:solidFill>
+                      <a:prstDash val="solid"/>
+                      <a:round/>
+                      <a:headEnd type="none" w="med" len="med"/>
+                      <a:tailEnd type="none" w="med" len="med"/>
+                    </a:lnL>
+                    <a:lnR w="9525" cap="flat" cmpd="sng" algn="ctr">
+                      <a:solidFill>
+                        <a:srgbClr val="D6DDE3"/>
+                      </a:solidFill>
+                      <a:prstDash val="solid"/>
+                      <a:round/>
+                      <a:headEnd type="none" w="med" len="med"/>
+                      <a:tailEnd type="none" w="med" len="med"/>
+                    </a:lnR>
+                    <a:lnT w="9525" cap="flat" cmpd="sng" algn="ctr">
+                      <a:solidFill>
+                        <a:srgbClr val="D6DDE3"/>
+                      </a:solidFill>
+                      <a:prstDash val="solid"/>
+                      <a:round/>
+                      <a:headEnd type="none" w="med" len="med"/>
+                      <a:tailEnd type="none" w="med" len="med"/>
+                    </a:lnT>
+                    <a:lnB w="9525" cap="flat" cmpd="sng" algn="ctr">
+                      <a:solidFill>
+                        <a:srgbClr val="D6DDE3"/>
+                      </a:solidFill>
+                      <a:prstDash val="solid"/>
+                      <a:round/>
+                      <a:headEnd type="none" w="med" len="med"/>
+                      <a:tailEnd type="none" w="med" len="med"/>
+                    </a:lnB>
+                    <a:solidFill>
+                      <a:srgbClr val="F7F9FA"/>
+                    </a:solidFill>
+                  </a:tcPr>
+                </a:tc>
+                <a:tc>
+                  <a:txBody>
+                    <a:bodyPr/>
+                    <a:lstStyle/>
+                    <a:p>
+                      <a:pPr indent="0" marL="0">
+                        <a:buNone/>
+                      </a:pPr>
+                      <a:r>
+                        <a:rPr lang="en-US" sz="1250" dirty="0">
+                          <a:solidFill>
+                            <a:srgbClr val="16181D"/>
+                          </a:solidFill>
+                          <a:latin typeface="Arial" pitchFamily="34" charset="0"/>
+                          <a:ea typeface="Arial" pitchFamily="34" charset="-122"/>
+                          <a:cs typeface="Arial" pitchFamily="34" charset="-120"/>
+                        </a:rPr>
+                        <a:t>Kleiner – begrenzt durch offenen Code, Dokumentation und KI-gestützte Entwicklung</a:t>
+                      </a:r>
+                      <a:endParaRPr lang="en-US" sz="1250" dirty="0">
+                        <a:latin typeface="Arial" charset="0"/>
+                        <a:ea typeface="Arial" charset="0"/>
+                        <a:cs typeface="Arial" charset="0"/>
+                      </a:endParaRPr>
+                    </a:p>
+                  </a:txBody>
+                  <a:tcPr marL="109728" marR="109728" marT="64008" marB="64008" anchor="ctr">
+                    <a:lnL w="9525" cap="flat" cmpd="sng" algn="ctr">
+                      <a:solidFill>
+                        <a:srgbClr val="D6DDE3"/>
+                      </a:solidFill>
+                      <a:prstDash val="solid"/>
+                      <a:round/>
+                      <a:headEnd type="none" w="med" len="med"/>
+                      <a:tailEnd type="none" w="med" len="med"/>
+                    </a:lnL>
+                    <a:lnR w="9525" cap="flat" cmpd="sng" algn="ctr">
+                      <a:solidFill>
+                        <a:srgbClr val="D6DDE3"/>
+                      </a:solidFill>
+                      <a:prstDash val="solid"/>
+                      <a:round/>
+                      <a:headEnd type="none" w="med" len="med"/>
+                      <a:tailEnd type="none" w="med" len="med"/>
+                    </a:lnR>
+                    <a:lnT w="9525" cap="flat" cmpd="sng" algn="ctr">
+                      <a:solidFill>
+                        <a:srgbClr val="D6DDE3"/>
+                      </a:solidFill>
+                      <a:prstDash val="solid"/>
+                      <a:round/>
+                      <a:headEnd type="none" w="med" len="med"/>
+                      <a:tailEnd type="none" w="med" len="med"/>
+                    </a:lnT>
+                    <a:lnB w="9525" cap="flat" cmpd="sng" algn="ctr">
+                      <a:solidFill>
+                        <a:srgbClr val="D6DDE3"/>
+                      </a:solidFill>
+                      <a:prstDash val="solid"/>
+                      <a:round/>
+                      <a:headEnd type="none" w="med" len="med"/>
+                      <a:tailEnd type="none" w="med" len="med"/>
+                    </a:lnB>
+                    <a:solidFill>
+                      <a:srgbClr val="F7F9FA"/>
+                    </a:solidFill>
+                  </a:tcPr>
+                </a:tc>
+              </a:tr>
+              <a:tr h="658368">
+                <a:tc>
+                  <a:txBody>
+                    <a:bodyPr/>
+                    <a:lstStyle/>
+                    <a:p>
+                      <a:pPr indent="0" marL="0">
+                        <a:buNone/>
+                      </a:pPr>
+                      <a:r>
+                        <a:rPr lang="en-US" sz="1250" b="1" dirty="0">
+                          <a:solidFill>
+                            <a:srgbClr val="16181D"/>
+                          </a:solidFill>
+                          <a:latin typeface="Arial" pitchFamily="34" charset="0"/>
+                          <a:ea typeface="Arial" pitchFamily="34" charset="-122"/>
+                          <a:cs typeface="Arial" pitchFamily="34" charset="-120"/>
+                        </a:rPr>
+                        <a:t>Know-how-Abhängigkeit</a:t>
+                      </a:r>
+                      <a:endParaRPr lang="en-US" sz="1250" dirty="0">
+                        <a:latin typeface="Arial" charset="0"/>
+                        <a:ea typeface="Arial" charset="0"/>
+                        <a:cs typeface="Arial" charset="0"/>
+                      </a:endParaRPr>
+                    </a:p>
+                  </a:txBody>
+                  <a:tcPr marL="109728" marR="109728" marT="64008" marB="64008" anchor="ctr">
+                    <a:lnL w="9525" cap="flat" cmpd="sng" algn="ctr">
+                      <a:solidFill>
+                        <a:srgbClr val="D6DDE3"/>
+                      </a:solidFill>
+                      <a:prstDash val="solid"/>
+                      <a:round/>
+                      <a:headEnd type="none" w="med" len="med"/>
+                      <a:tailEnd type="none" w="med" len="med"/>
+                    </a:lnL>
+                    <a:lnR w="9525" cap="flat" cmpd="sng" algn="ctr">
+                      <a:solidFill>
+                        <a:srgbClr val="D6DDE3"/>
+                      </a:solidFill>
+                      <a:prstDash val="solid"/>
+                      <a:round/>
+                      <a:headEnd type="none" w="med" len="med"/>
+                      <a:tailEnd type="none" w="med" len="med"/>
+                    </a:lnR>
+                    <a:lnT w="9525" cap="flat" cmpd="sng" algn="ctr">
+                      <a:solidFill>
+                        <a:srgbClr val="D6DDE3"/>
+                      </a:solidFill>
+                      <a:prstDash val="solid"/>
+                      <a:round/>
+                      <a:headEnd type="none" w="med" len="med"/>
+                      <a:tailEnd type="none" w="med" len="med"/>
+                    </a:lnT>
+                    <a:lnB w="9525" cap="flat" cmpd="sng" algn="ctr">
+                      <a:solidFill>
+                        <a:srgbClr val="D6DDE3"/>
+                      </a:solidFill>
+                      <a:prstDash val="solid"/>
+                      <a:round/>
+                      <a:headEnd type="none" w="med" len="med"/>
+                      <a:tailEnd type="none" w="med" len="med"/>
+                    </a:lnB>
+                    <a:solidFill>
+                      <a:srgbClr val="FFFFFF"/>
+                    </a:solidFill>
+                  </a:tcPr>
+                </a:tc>
+                <a:tc>
+                  <a:txBody>
+                    <a:bodyPr/>
+                    <a:lstStyle/>
+                    <a:p>
+                      <a:pPr indent="0" marL="0">
+                        <a:buNone/>
+                      </a:pPr>
+                      <a:r>
+                        <a:rPr lang="en-US" sz="1250" dirty="0">
+                          <a:solidFill>
+                            <a:srgbClr val="16181D"/>
+                          </a:solidFill>
+                          <a:latin typeface="Arial" pitchFamily="34" charset="0"/>
+                          <a:ea typeface="Arial" pitchFamily="34" charset="-122"/>
+                          <a:cs typeface="Arial" pitchFamily="34" charset="-120"/>
+                        </a:rPr>
+                        <a:t>Eigenentwicklungen erfordern Spezialwissen</a:t>
+                      </a:r>
+                      <a:endParaRPr lang="en-US" sz="1250" dirty="0">
+                        <a:latin typeface="Arial" charset="0"/>
+                        <a:ea typeface="Arial" charset="0"/>
+                        <a:cs typeface="Arial" charset="0"/>
+                      </a:endParaRPr>
+                    </a:p>
+                  </a:txBody>
+                  <a:tcPr marL="109728" marR="109728" marT="64008" marB="64008" anchor="ctr">
+                    <a:lnL w="9525" cap="flat" cmpd="sng" algn="ctr">
+                      <a:solidFill>
+                        <a:srgbClr val="D6DDE3"/>
+                      </a:solidFill>
+                      <a:prstDash val="solid"/>
+                      <a:round/>
+                      <a:headEnd type="none" w="med" len="med"/>
+                      <a:tailEnd type="none" w="med" len="med"/>
+                    </a:lnL>
+                    <a:lnR w="9525" cap="flat" cmpd="sng" algn="ctr">
+                      <a:solidFill>
+                        <a:srgbClr val="D6DDE3"/>
+                      </a:solidFill>
+                      <a:prstDash val="solid"/>
+                      <a:round/>
+                      <a:headEnd type="none" w="med" len="med"/>
+                      <a:tailEnd type="none" w="med" len="med"/>
+                    </a:lnR>
+                    <a:lnT w="9525" cap="flat" cmpd="sng" algn="ctr">
+                      <a:solidFill>
+                        <a:srgbClr val="D6DDE3"/>
+                      </a:solidFill>
+                      <a:prstDash val="solid"/>
+                      <a:round/>
+                      <a:headEnd type="none" w="med" len="med"/>
+                      <a:tailEnd type="none" w="med" len="med"/>
+                    </a:lnT>
+                    <a:lnB w="9525" cap="flat" cmpd="sng" algn="ctr">
+                      <a:solidFill>
+                        <a:srgbClr val="D6DDE3"/>
+                      </a:solidFill>
+                      <a:prstDash val="solid"/>
+                      <a:round/>
+                      <a:headEnd type="none" w="med" len="med"/>
+                      <a:tailEnd type="none" w="med" len="med"/>
+                    </a:lnB>
+                    <a:solidFill>
+                      <a:srgbClr val="FFFFFF"/>
+                    </a:solidFill>
+                  </a:tcPr>
+                </a:tc>
+                <a:tc>
+                  <a:txBody>
+                    <a:bodyPr/>
+                    <a:lstStyle/>
+                    <a:p>
+                      <a:pPr indent="0" marL="0">
+                        <a:buNone/>
+                      </a:pPr>
+                      <a:r>
+                        <a:rPr lang="en-US" sz="1250" dirty="0">
+                          <a:solidFill>
+                            <a:srgbClr val="16181D"/>
+                          </a:solidFill>
+                          <a:latin typeface="Arial" pitchFamily="34" charset="0"/>
+                          <a:ea typeface="Arial" pitchFamily="34" charset="-122"/>
+                          <a:cs typeface="Arial" pitchFamily="34" charset="-120"/>
+                        </a:rPr>
+                        <a:t>Wissen im Repository dokumentiert, nicht an Personen gebunden</a:t>
+                      </a:r>
+                      <a:endParaRPr lang="en-US" sz="1250" dirty="0">
+                        <a:latin typeface="Arial" charset="0"/>
+                        <a:ea typeface="Arial" charset="0"/>
+                        <a:cs typeface="Arial" charset="0"/>
+                      </a:endParaRPr>
+                    </a:p>
+                  </a:txBody>
+                  <a:tcPr marL="109728" marR="109728" marT="64008" marB="64008" anchor="ctr">
+                    <a:lnL w="9525" cap="flat" cmpd="sng" algn="ctr">
+                      <a:solidFill>
+                        <a:srgbClr val="D6DDE3"/>
+                      </a:solidFill>
+                      <a:prstDash val="solid"/>
+                      <a:round/>
+                      <a:headEnd type="none" w="med" len="med"/>
+                      <a:tailEnd type="none" w="med" len="med"/>
+                    </a:lnL>
+                    <a:lnR w="9525" cap="flat" cmpd="sng" algn="ctr">
+                      <a:solidFill>
+                        <a:srgbClr val="D6DDE3"/>
+                      </a:solidFill>
+                      <a:prstDash val="solid"/>
+                      <a:round/>
+                      <a:headEnd type="none" w="med" len="med"/>
+                      <a:tailEnd type="none" w="med" len="med"/>
+                    </a:lnR>
+                    <a:lnT w="9525" cap="flat" cmpd="sng" algn="ctr">
+                      <a:solidFill>
+                        <a:srgbClr val="D6DDE3"/>
+                      </a:solidFill>
+                      <a:prstDash val="solid"/>
+                      <a:round/>
+                      <a:headEnd type="none" w="med" len="med"/>
+                      <a:tailEnd type="none" w="med" len="med"/>
+                    </a:lnT>
+                    <a:lnB w="9525" cap="flat" cmpd="sng" algn="ctr">
+                      <a:solidFill>
+                        <a:srgbClr val="D6DDE3"/>
+                      </a:solidFill>
+                      <a:prstDash val="solid"/>
+                      <a:round/>
+                      <a:headEnd type="none" w="med" len="med"/>
+                      <a:tailEnd type="none" w="med" len="med"/>
+                    </a:lnB>
+                    <a:solidFill>
+                      <a:srgbClr val="FFFFFF"/>
+                    </a:solidFill>
+                  </a:tcPr>
+                </a:tc>
+              </a:tr>
+            </a:tbl>
+          </a:graphicData>
+        </a:graphic>
+      </p:graphicFrame>
+      <p:sp>
+        <p:nvSpPr>
+          <p:cNvPr id="7" name="Shape 4"/>
+          <p:cNvSpPr/>
+          <p:nvPr/>
+        </p:nvSpPr>
+        <p:spPr>
+          <a:xfrm>
+            <a:off x="548640" y="5440680"/>
+            <a:ext cx="11094415" cy="685800"/>
+          </a:xfrm>
+          <a:prstGeom prst="rect">
+            <a:avLst/>
+          </a:prstGeom>
+          <a:solidFill>
+            <a:srgbClr val="E4F3F1"/>
+          </a:solidFill>
+          <a:ln w="12700">
+            <a:solidFill>
+              <a:srgbClr val="E4F3F1"/>
+            </a:solidFill>
+            <a:prstDash val="solid"/>
+          </a:ln>
+        </p:spPr>
+      </p:sp>
+      <p:sp>
+        <p:nvSpPr>
+          <p:cNvPr id="8" name="Text 5"/>
+          <p:cNvSpPr txBox="1"/>
+          <p:nvPr/>
+        </p:nvSpPr>
+        <p:spPr>
+          <a:xfrm>
+            <a:off x="822960" y="5440680"/>
+            <a:ext cx="10545775" cy="685800"/>
+          </a:xfrm>
+          <a:prstGeom prst="rect">
+            <a:avLst/>
+          </a:prstGeom>
+          <a:noFill/>
+          <a:ln/>
+        </p:spPr>
+        <p:txBody>
+          <a:bodyPr wrap="square" lIns="0" tIns="0" rIns="0" bIns="0" rtlCol="0" anchor="ctr"/>
+          <a:lstStyle/>
+          <a:p>
+            <a:pPr indent="0" marL="0">
+              <a:buNone/>
+            </a:pPr>
+            <a:r>
+              <a:rPr lang="en-US" sz="1400" b="1" dirty="0">
+                <a:solidFill>
+                  <a:srgbClr val="000E2F"/>
+                </a:solidFill>
+                <a:latin typeface="Arial" pitchFamily="34" charset="0"/>
+                <a:ea typeface="Arial" pitchFamily="34" charset="-122"/>
+                <a:cs typeface="Arial" pitchFamily="34" charset="-120"/>
+              </a:rPr>
+              <a:t>Einordnung: </a:t>
+            </a:r>
+            <a:pPr indent="0" marL="0">
+              <a:buNone/>
+            </a:pPr>
+            <a:r>
+              <a:rPr lang="en-US" sz="1400" dirty="0">
+                <a:solidFill>
+                  <a:srgbClr val="000E2F"/>
+                </a:solidFill>
+                <a:latin typeface="Arial" pitchFamily="34" charset="0"/>
+                <a:ea typeface="Arial" pitchFamily="34" charset="-122"/>
+                <a:cs typeface="Arial" pitchFamily="34" charset="-120"/>
+              </a:rPr>
+              <a:t>Pimcore trägt das geringere Umstiegsrisiko, anyPIM das geringere laufende Risiko. Beides lässt sich mit einem Pilot vorab prüfen.</a:t>
+            </a:r>
+            <a:endParaRPr lang="en-US" sz="1400" dirty="0"/>
+          </a:p>
+        </p:txBody>
+      </p:sp>
+    </p:spTree>
+  </p:cSld>
+  <p:clrMapOvr>
+    <a:masterClrMapping/>
+  </p:clrMapOvr>
+</p:sld>
+</file>
+
+<file path=ppt/slides/slide11.xml><?xml version="1.0" encoding="utf-8"?>
+<p:sld xmlns:a="http://schemas.openxmlformats.org/drawingml/2006/main" xmlns:r="http://schemas.openxmlformats.org/officeDocument/2006/relationships" xmlns:p="http://schemas.openxmlformats.org/presentationml/2006/main">
+  <p:cSld name="Slide 11">
+    <p:bg>
+      <p:bgPr>
+        <a:solidFill>
+          <a:srgbClr val="FFFFFF"/>
+        </a:solidFill>
+      </p:bgPr>
+    </p:bg>
+    <p:spTree>
+      <p:nvGrpSpPr>
+        <p:cNvPr id="1" name=""/>
+        <p:cNvGrpSpPr/>
+        <p:nvPr/>
+      </p:nvGrpSpPr>
+      <p:grpSpPr>
+        <a:xfrm>
+          <a:off x="0" y="0"/>
+          <a:ext cx="0" cy="0"/>
+          <a:chOff x="0" y="0"/>
+          <a:chExt cx="0" cy="0"/>
+        </a:xfrm>
+      </p:grpSpPr>
+      <p:sp>
+        <p:nvSpPr>
+          <p:cNvPr id="2" name="Text 0"/>
+          <p:cNvSpPr txBox="1"/>
+          <p:nvPr/>
+        </p:nvSpPr>
+        <p:spPr>
+          <a:xfrm>
+            <a:off x="548640" y="411480"/>
+            <a:ext cx="11094415" cy="594360"/>
+          </a:xfrm>
+          <a:prstGeom prst="rect">
+            <a:avLst/>
+          </a:prstGeom>
+          <a:noFill/>
+          <a:ln/>
+        </p:spPr>
+        <p:txBody>
+          <a:bodyPr wrap="square" lIns="0" tIns="0" rIns="0" bIns="0" rtlCol="0" anchor="b"/>
+          <a:lstStyle/>
+          <a:p>
+            <a:pPr indent="0" marL="0">
+              <a:buNone/>
+            </a:pPr>
+            <a:r>
+              <a:rPr lang="en-US" sz="3000" dirty="0">
+                <a:solidFill>
+                  <a:srgbClr val="16181D"/>
+                </a:solidFill>
+                <a:latin typeface="Arial" pitchFamily="34" charset="0"/>
+                <a:ea typeface="Arial" pitchFamily="34" charset="-122"/>
+                <a:cs typeface="Arial" pitchFamily="34" charset="-120"/>
+              </a:rPr>
+              <a:t>VORGEHEN ZUR ENTSCHEIDUNG</a:t>
+            </a:r>
+            <a:endParaRPr lang="en-US" sz="3000" dirty="0"/>
+          </a:p>
+        </p:txBody>
+      </p:sp>
+      <p:sp>
+        <p:nvSpPr>
+          <p:cNvPr id="3" name="Text 1"/>
+          <p:cNvSpPr txBox="1"/>
+          <p:nvPr/>
+        </p:nvSpPr>
+        <p:spPr>
+          <a:xfrm>
+            <a:off x="548640" y="1033272"/>
+            <a:ext cx="11094415" cy="365760"/>
+          </a:xfrm>
+          <a:prstGeom prst="rect">
+            <a:avLst/>
+          </a:prstGeom>
+          <a:noFill/>
+          <a:ln/>
+        </p:spPr>
+        <p:txBody>
+          <a:bodyPr wrap="square" lIns="0" tIns="0" rIns="0" bIns="0" rtlCol="0" anchor="t"/>
+          <a:lstStyle/>
+          <a:p>
+            <a:pPr indent="0" marL="0">
+              <a:buNone/>
+            </a:pPr>
+            <a:r>
+              <a:rPr lang="en-US" sz="1400" dirty="0">
+                <a:solidFill>
+                  <a:srgbClr val="4B5563"/>
+                </a:solidFill>
+                <a:latin typeface="Arial" pitchFamily="34" charset="0"/>
+                <a:ea typeface="Arial" pitchFamily="34" charset="-122"/>
+                <a:cs typeface="Arial" pitchFamily="34" charset="-120"/>
+              </a:rPr>
+              <a:t>In vier Schritten zu einer belastbaren Entscheidung – für beide Optionen auf derselben Grundlage.</a:t>
+            </a:r>
+            <a:endParaRPr lang="en-US" sz="1400" dirty="0"/>
+          </a:p>
+        </p:txBody>
+      </p:sp>
+      <p:sp>
+        <p:nvSpPr>
+          <p:cNvPr id="4" name="Text 2"/>
+          <p:cNvSpPr txBox="1"/>
+          <p:nvPr/>
+        </p:nvSpPr>
+        <p:spPr>
+          <a:xfrm>
+            <a:off x="548640" y="6400800"/>
+            <a:ext cx="7315200" cy="228600"/>
+          </a:xfrm>
+          <a:prstGeom prst="rect">
+            <a:avLst/>
+          </a:prstGeom>
+          <a:noFill/>
+          <a:ln/>
+        </p:spPr>
+        <p:txBody>
+          <a:bodyPr wrap="square" lIns="0" tIns="0" rIns="0" bIns="0" rtlCol="0" anchor="t"/>
+          <a:lstStyle/>
+          <a:p>
+            <a:pPr indent="0" marL="0">
+              <a:buNone/>
+            </a:pPr>
+            <a:r>
+              <a:rPr lang="en-US" sz="900" dirty="0">
+                <a:solidFill>
+                  <a:srgbClr val="4B5563"/>
+                </a:solidFill>
+                <a:latin typeface="Arial" pitchFamily="34" charset="0"/>
+                <a:ea typeface="Arial" pitchFamily="34" charset="-122"/>
+                <a:cs typeface="Arial" pitchFamily="34" charset="-120"/>
+              </a:rPr>
+              <a:t>PIM-Kostenbetrachtung Kohlhammer  ·  Entscheidungsgrundlage  ·  September 2026</a:t>
+            </a:r>
+            <a:endParaRPr lang="en-US" sz="900" dirty="0"/>
+          </a:p>
+        </p:txBody>
+      </p:sp>
+      <p:sp>
+        <p:nvSpPr>
+          <p:cNvPr id="5" name="Text 3"/>
+          <p:cNvSpPr txBox="1"/>
+          <p:nvPr/>
+        </p:nvSpPr>
+        <p:spPr>
+          <a:xfrm>
+            <a:off x="10728655" y="6400800"/>
+            <a:ext cx="914400" cy="228600"/>
+          </a:xfrm>
+          <a:prstGeom prst="rect">
+            <a:avLst/>
+          </a:prstGeom>
+          <a:noFill/>
+          <a:ln/>
+        </p:spPr>
+        <p:txBody>
+          <a:bodyPr wrap="square" lIns="0" tIns="0" rIns="0" bIns="0" rtlCol="0" anchor="t"/>
+          <a:lstStyle/>
+          <a:p>
+            <a:pPr algn="r" indent="0" marL="0">
+              <a:buNone/>
+            </a:pPr>
+            <a:r>
+              <a:rPr lang="en-US" sz="900" dirty="0">
+                <a:solidFill>
+                  <a:srgbClr val="4B5563"/>
+                </a:solidFill>
+                <a:latin typeface="Arial" pitchFamily="34" charset="0"/>
+                <a:ea typeface="Arial" pitchFamily="34" charset="-122"/>
+                <a:cs typeface="Arial" pitchFamily="34" charset="-120"/>
+              </a:rPr>
+              <a:t>11</a:t>
+            </a:r>
+            <a:endParaRPr lang="en-US" sz="900" dirty="0"/>
+          </a:p>
+        </p:txBody>
+      </p:sp>
+      <p:sp>
+        <p:nvSpPr>
+          <p:cNvPr id="6" name="Shape 4"/>
+          <p:cNvSpPr/>
+          <p:nvPr/>
+        </p:nvSpPr>
+        <p:spPr>
+          <a:xfrm>
+            <a:off x="640080" y="2011680"/>
+            <a:ext cx="10911535" cy="0"/>
+          </a:xfrm>
+          <a:prstGeom prst="line">
+            <a:avLst/>
+          </a:prstGeom>
+          <a:noFill/>
+          <a:ln w="19050">
+            <a:solidFill>
+              <a:srgbClr val="1B2D5C"/>
+            </a:solidFill>
+            <a:prstDash val="solid"/>
+          </a:ln>
+        </p:spPr>
+      </p:sp>
+      <p:sp>
+        <p:nvSpPr>
+          <p:cNvPr id="7" name="Shape 5"/>
+          <p:cNvSpPr/>
+          <p:nvPr/>
+        </p:nvSpPr>
+        <p:spPr>
+          <a:xfrm>
+            <a:off x="548640" y="1874520"/>
+            <a:ext cx="274320" cy="274320"/>
+          </a:xfrm>
+          <a:prstGeom prst="rect">
+            <a:avLst/>
+          </a:prstGeom>
+          <a:solidFill>
+            <a:srgbClr val="000E2F"/>
+          </a:solidFill>
+          <a:ln w="12700">
+            <a:solidFill>
+              <a:srgbClr val="000E2F"/>
+            </a:solidFill>
+            <a:prstDash val="solid"/>
+          </a:ln>
+        </p:spPr>
+      </p:sp>
+      <p:sp>
+        <p:nvSpPr>
+          <p:cNvPr id="8" name="Text 6"/>
+          <p:cNvSpPr txBox="1"/>
+          <p:nvPr/>
+        </p:nvSpPr>
+        <p:spPr>
+          <a:xfrm>
+            <a:off x="548640" y="2377440"/>
+            <a:ext cx="2567864" cy="731520"/>
+          </a:xfrm>
+          <a:prstGeom prst="rect">
+            <a:avLst/>
+          </a:prstGeom>
+          <a:noFill/>
+          <a:ln/>
+        </p:spPr>
+        <p:txBody>
+          <a:bodyPr wrap="square" lIns="0" tIns="0" rIns="0" bIns="0" rtlCol="0" anchor="t"/>
+          <a:lstStyle/>
+          <a:p>
+            <a:pPr indent="0" marL="0">
+              <a:buNone/>
+            </a:pPr>
+            <a:r>
+              <a:rPr lang="en-US" sz="4000" dirty="0">
+                <a:solidFill>
+                  <a:srgbClr val="1B2D5C"/>
+                </a:solidFill>
+                <a:latin typeface="Arial" pitchFamily="34" charset="0"/>
+                <a:ea typeface="Arial" pitchFamily="34" charset="-122"/>
+                <a:cs typeface="Arial" pitchFamily="34" charset="-120"/>
+              </a:rPr>
+              <a:t>01</a:t>
+            </a:r>
+            <a:endParaRPr lang="en-US" sz="4000" dirty="0"/>
+          </a:p>
+        </p:txBody>
+      </p:sp>
+      <p:sp>
+        <p:nvSpPr>
+          <p:cNvPr id="9" name="Text 7"/>
+          <p:cNvSpPr txBox="1"/>
+          <p:nvPr/>
+        </p:nvSpPr>
+        <p:spPr>
+          <a:xfrm>
+            <a:off x="548640" y="3200400"/>
+            <a:ext cx="2567864" cy="685800"/>
+          </a:xfrm>
+          <a:prstGeom prst="rect">
+            <a:avLst/>
+          </a:prstGeom>
+          <a:noFill/>
+          <a:ln/>
+        </p:spPr>
+        <p:txBody>
+          <a:bodyPr wrap="square" lIns="0" tIns="0" rIns="0" bIns="0" rtlCol="0" anchor="t"/>
+          <a:lstStyle/>
+          <a:p>
+            <a:pPr indent="0" marL="0">
+              <a:buNone/>
+            </a:pPr>
+            <a:r>
+              <a:rPr lang="en-US" sz="1700" b="1" dirty="0">
+                <a:solidFill>
+                  <a:srgbClr val="16181D"/>
+                </a:solidFill>
+                <a:latin typeface="Arial" pitchFamily="34" charset="0"/>
+                <a:ea typeface="Arial" pitchFamily="34" charset="-122"/>
+                <a:cs typeface="Arial" pitchFamily="34" charset="-120"/>
+              </a:rPr>
+              <a:t>Funktionsliste bewerten</a:t>
+            </a:r>
+            <a:endParaRPr lang="en-US" sz="1700" dirty="0"/>
+          </a:p>
+        </p:txBody>
+      </p:sp>
+      <p:sp>
+        <p:nvSpPr>
+          <p:cNvPr id="10" name="Text 8"/>
+          <p:cNvSpPr txBox="1"/>
+          <p:nvPr/>
+        </p:nvSpPr>
+        <p:spPr>
+          <a:xfrm>
+            <a:off x="548640" y="3931920"/>
+            <a:ext cx="2567864" cy="1463040"/>
+          </a:xfrm>
+          <a:prstGeom prst="rect">
+            <a:avLst/>
+          </a:prstGeom>
+          <a:noFill/>
+          <a:ln/>
+        </p:spPr>
+        <p:txBody>
+          <a:bodyPr wrap="square" lIns="0" tIns="0" rIns="0" bIns="0" rtlCol="0" anchor="t"/>
+          <a:lstStyle/>
+          <a:p>
+            <a:pPr indent="0" marL="0">
+              <a:lnSpc>
+                <a:spcPct val="112000"/>
+              </a:lnSpc>
+              <a:buNone/>
+            </a:pPr>
+            <a:r>
+              <a:rPr lang="en-US" sz="1400" dirty="0">
+                <a:solidFill>
+                  <a:srgbClr val="16181D"/>
+                </a:solidFill>
+                <a:latin typeface="Arial" pitchFamily="34" charset="0"/>
+                <a:ea typeface="Arial" pitchFamily="34" charset="-122"/>
+                <a:cs typeface="Arial" pitchFamily="34" charset="-120"/>
+              </a:rPr>
+              <a:t>Aufwand je Punkt der Kohlhammer-Liste – für beide Optionen.</a:t>
+            </a:r>
+            <a:endParaRPr lang="en-US" sz="1400" dirty="0"/>
+          </a:p>
+        </p:txBody>
+      </p:sp>
+      <p:sp>
+        <p:nvSpPr>
+          <p:cNvPr id="11" name="Shape 9"/>
+          <p:cNvSpPr/>
+          <p:nvPr/>
+        </p:nvSpPr>
+        <p:spPr>
+          <a:xfrm>
+            <a:off x="3390824" y="1874520"/>
+            <a:ext cx="274320" cy="274320"/>
+          </a:xfrm>
+          <a:prstGeom prst="rect">
+            <a:avLst/>
+          </a:prstGeom>
+          <a:solidFill>
+            <a:srgbClr val="000E2F"/>
+          </a:solidFill>
+          <a:ln w="12700">
+            <a:solidFill>
+              <a:srgbClr val="000E2F"/>
+            </a:solidFill>
+            <a:prstDash val="solid"/>
+          </a:ln>
+        </p:spPr>
+      </p:sp>
+      <p:sp>
+        <p:nvSpPr>
+          <p:cNvPr id="12" name="Text 10"/>
+          <p:cNvSpPr txBox="1"/>
+          <p:nvPr/>
+        </p:nvSpPr>
+        <p:spPr>
+          <a:xfrm>
+            <a:off x="3390824" y="2377440"/>
+            <a:ext cx="2567864" cy="731520"/>
+          </a:xfrm>
+          <a:prstGeom prst="rect">
+            <a:avLst/>
+          </a:prstGeom>
+          <a:noFill/>
+          <a:ln/>
+        </p:spPr>
+        <p:txBody>
+          <a:bodyPr wrap="square" lIns="0" tIns="0" rIns="0" bIns="0" rtlCol="0" anchor="t"/>
+          <a:lstStyle/>
+          <a:p>
+            <a:pPr indent="0" marL="0">
+              <a:buNone/>
+            </a:pPr>
+            <a:r>
+              <a:rPr lang="en-US" sz="4000" dirty="0">
+                <a:solidFill>
+                  <a:srgbClr val="1B2D5C"/>
+                </a:solidFill>
+                <a:latin typeface="Arial" pitchFamily="34" charset="0"/>
+                <a:ea typeface="Arial" pitchFamily="34" charset="-122"/>
+                <a:cs typeface="Arial" pitchFamily="34" charset="-120"/>
+              </a:rPr>
+              <a:t>02</a:t>
+            </a:r>
+            <a:endParaRPr lang="en-US" sz="4000" dirty="0"/>
+          </a:p>
+        </p:txBody>
+      </p:sp>
+      <p:sp>
+        <p:nvSpPr>
+          <p:cNvPr id="13" name="Text 11"/>
+          <p:cNvSpPr txBox="1"/>
+          <p:nvPr/>
+        </p:nvSpPr>
+        <p:spPr>
+          <a:xfrm>
+            <a:off x="3390824" y="3200400"/>
+            <a:ext cx="2567864" cy="685800"/>
+          </a:xfrm>
+          <a:prstGeom prst="rect">
+            <a:avLst/>
+          </a:prstGeom>
+          <a:noFill/>
+          <a:ln/>
+        </p:spPr>
+        <p:txBody>
+          <a:bodyPr wrap="square" lIns="0" tIns="0" rIns="0" bIns="0" rtlCol="0" anchor="t"/>
+          <a:lstStyle/>
+          <a:p>
+            <a:pPr indent="0" marL="0">
+              <a:buNone/>
+            </a:pPr>
+            <a:r>
+              <a:rPr lang="en-US" sz="1700" b="1" dirty="0">
+                <a:solidFill>
+                  <a:srgbClr val="16181D"/>
+                </a:solidFill>
+                <a:latin typeface="Arial" pitchFamily="34" charset="0"/>
+                <a:ea typeface="Arial" pitchFamily="34" charset="-122"/>
+                <a:cs typeface="Arial" pitchFamily="34" charset="-120"/>
+              </a:rPr>
+              <a:t>Angebote vergleichbar machen</a:t>
+            </a:r>
+            <a:endParaRPr lang="en-US" sz="1700" dirty="0"/>
+          </a:p>
+        </p:txBody>
+      </p:sp>
+      <p:sp>
+        <p:nvSpPr>
+          <p:cNvPr id="14" name="Text 12"/>
+          <p:cNvSpPr txBox="1"/>
+          <p:nvPr/>
+        </p:nvSpPr>
+        <p:spPr>
+          <a:xfrm>
+            <a:off x="3390824" y="3931920"/>
+            <a:ext cx="2567864" cy="1463040"/>
+          </a:xfrm>
+          <a:prstGeom prst="rect">
+            <a:avLst/>
+          </a:prstGeom>
+          <a:noFill/>
+          <a:ln/>
+        </p:spPr>
+        <p:txBody>
+          <a:bodyPr wrap="square" lIns="0" tIns="0" rIns="0" bIns="0" rtlCol="0" anchor="t"/>
+          <a:lstStyle/>
+          <a:p>
+            <a:pPr indent="0" marL="0">
+              <a:lnSpc>
+                <a:spcPct val="112000"/>
+              </a:lnSpc>
+              <a:buNone/>
+            </a:pPr>
+            <a:r>
+              <a:rPr lang="en-US" sz="1400" dirty="0">
+                <a:solidFill>
+                  <a:srgbClr val="16181D"/>
+                </a:solidFill>
+                <a:latin typeface="Arial" pitchFamily="34" charset="0"/>
+                <a:ea typeface="Arial" pitchFamily="34" charset="-122"/>
+                <a:cs typeface="Arial" pitchFamily="34" charset="-120"/>
+              </a:rPr>
+              <a:t>Fünf-Jahres-Kosten mit identischen Annahmen; Vorlage im Anhang.</a:t>
+            </a:r>
+            <a:endParaRPr lang="en-US" sz="1400" dirty="0"/>
+          </a:p>
+        </p:txBody>
+      </p:sp>
+      <p:sp>
+        <p:nvSpPr>
+          <p:cNvPr id="15" name="Shape 13"/>
+          <p:cNvSpPr/>
+          <p:nvPr/>
+        </p:nvSpPr>
+        <p:spPr>
+          <a:xfrm>
+            <a:off x="6233008" y="1874520"/>
+            <a:ext cx="274320" cy="274320"/>
+          </a:xfrm>
+          <a:prstGeom prst="rect">
+            <a:avLst/>
+          </a:prstGeom>
+          <a:solidFill>
+            <a:srgbClr val="000E2F"/>
+          </a:solidFill>
+          <a:ln w="12700">
+            <a:solidFill>
+              <a:srgbClr val="000E2F"/>
+            </a:solidFill>
+            <a:prstDash val="solid"/>
+          </a:ln>
+        </p:spPr>
+      </p:sp>
+      <p:sp>
+        <p:nvSpPr>
+          <p:cNvPr id="16" name="Text 14"/>
+          <p:cNvSpPr txBox="1"/>
+          <p:nvPr/>
+        </p:nvSpPr>
+        <p:spPr>
+          <a:xfrm>
+            <a:off x="6233008" y="2377440"/>
+            <a:ext cx="2567864" cy="731520"/>
+          </a:xfrm>
+          <a:prstGeom prst="rect">
+            <a:avLst/>
+          </a:prstGeom>
+          <a:noFill/>
+          <a:ln/>
+        </p:spPr>
+        <p:txBody>
+          <a:bodyPr wrap="square" lIns="0" tIns="0" rIns="0" bIns="0" rtlCol="0" anchor="t"/>
+          <a:lstStyle/>
+          <a:p>
+            <a:pPr indent="0" marL="0">
+              <a:buNone/>
+            </a:pPr>
+            <a:r>
+              <a:rPr lang="en-US" sz="4000" dirty="0">
+                <a:solidFill>
+                  <a:srgbClr val="1B2D5C"/>
+                </a:solidFill>
+                <a:latin typeface="Arial" pitchFamily="34" charset="0"/>
+                <a:ea typeface="Arial" pitchFamily="34" charset="-122"/>
+                <a:cs typeface="Arial" pitchFamily="34" charset="-120"/>
+              </a:rPr>
+              <a:t>03</a:t>
+            </a:r>
+            <a:endParaRPr lang="en-US" sz="4000" dirty="0"/>
+          </a:p>
+        </p:txBody>
+      </p:sp>
+      <p:sp>
+        <p:nvSpPr>
+          <p:cNvPr id="17" name="Text 15"/>
+          <p:cNvSpPr txBox="1"/>
+          <p:nvPr/>
+        </p:nvSpPr>
+        <p:spPr>
+          <a:xfrm>
+            <a:off x="6233008" y="3200400"/>
+            <a:ext cx="2567864" cy="685800"/>
+          </a:xfrm>
+          <a:prstGeom prst="rect">
+            <a:avLst/>
+          </a:prstGeom>
+          <a:noFill/>
+          <a:ln/>
+        </p:spPr>
+        <p:txBody>
+          <a:bodyPr wrap="square" lIns="0" tIns="0" rIns="0" bIns="0" rtlCol="0" anchor="t"/>
+          <a:lstStyle/>
+          <a:p>
+            <a:pPr indent="0" marL="0">
+              <a:buNone/>
+            </a:pPr>
+            <a:r>
+              <a:rPr lang="en-US" sz="1700" b="1" dirty="0">
+                <a:solidFill>
+                  <a:srgbClr val="16181D"/>
+                </a:solidFill>
+                <a:latin typeface="Arial" pitchFamily="34" charset="0"/>
+                <a:ea typeface="Arial" pitchFamily="34" charset="-122"/>
+                <a:cs typeface="Arial" pitchFamily="34" charset="-120"/>
+              </a:rPr>
+              <a:t>Kritische Punkte prüfen</a:t>
+            </a:r>
+            <a:endParaRPr lang="en-US" sz="1700" dirty="0"/>
+          </a:p>
+        </p:txBody>
+      </p:sp>
+      <p:sp>
+        <p:nvSpPr>
+          <p:cNvPr id="18" name="Text 16"/>
+          <p:cNvSpPr txBox="1"/>
+          <p:nvPr/>
+        </p:nvSpPr>
+        <p:spPr>
+          <a:xfrm>
+            <a:off x="6233008" y="3931920"/>
+            <a:ext cx="2567864" cy="1463040"/>
+          </a:xfrm>
+          <a:prstGeom prst="rect">
+            <a:avLst/>
+          </a:prstGeom>
+          <a:noFill/>
+          <a:ln/>
+        </p:spPr>
+        <p:txBody>
+          <a:bodyPr wrap="square" lIns="0" tIns="0" rIns="0" bIns="0" rtlCol="0" anchor="t"/>
+          <a:lstStyle/>
+          <a:p>
+            <a:pPr indent="0" marL="0">
+              <a:lnSpc>
+                <a:spcPct val="112000"/>
+              </a:lnSpc>
+              <a:buNone/>
+            </a:pPr>
+            <a:r>
+              <a:rPr lang="en-US" sz="1400" dirty="0">
+                <a:solidFill>
+                  <a:srgbClr val="16181D"/>
+                </a:solidFill>
+                <a:latin typeface="Arial" pitchFamily="34" charset="0"/>
+                <a:ea typeface="Arial" pitchFamily="34" charset="-122"/>
+                <a:cs typeface="Arial" pitchFamily="34" charset="-120"/>
+              </a:rPr>
+              <a:t>Proof of Concept, z. B. EasyCatalog-Export und Datenübernahme.</a:t>
+            </a:r>
+            <a:endParaRPr lang="en-US" sz="1400" dirty="0"/>
+          </a:p>
+        </p:txBody>
+      </p:sp>
+      <p:sp>
+        <p:nvSpPr>
+          <p:cNvPr id="19" name="Shape 17"/>
+          <p:cNvSpPr/>
+          <p:nvPr/>
+        </p:nvSpPr>
+        <p:spPr>
+          <a:xfrm>
+            <a:off x="9075191" y="1874520"/>
+            <a:ext cx="274320" cy="274320"/>
+          </a:xfrm>
+          <a:prstGeom prst="rect">
+            <a:avLst/>
+          </a:prstGeom>
+          <a:solidFill>
+            <a:srgbClr val="E2211C"/>
+          </a:solidFill>
+          <a:ln w="12700">
+            <a:solidFill>
+              <a:srgbClr val="E2211C"/>
+            </a:solidFill>
+            <a:prstDash val="solid"/>
+          </a:ln>
+        </p:spPr>
+      </p:sp>
+      <p:sp>
+        <p:nvSpPr>
+          <p:cNvPr id="20" name="Text 18"/>
+          <p:cNvSpPr txBox="1"/>
+          <p:nvPr/>
+        </p:nvSpPr>
+        <p:spPr>
+          <a:xfrm>
+            <a:off x="9075191" y="2377440"/>
+            <a:ext cx="2567864" cy="731520"/>
+          </a:xfrm>
+          <a:prstGeom prst="rect">
+            <a:avLst/>
+          </a:prstGeom>
+          <a:noFill/>
+          <a:ln/>
+        </p:spPr>
+        <p:txBody>
+          <a:bodyPr wrap="square" lIns="0" tIns="0" rIns="0" bIns="0" rtlCol="0" anchor="t"/>
+          <a:lstStyle/>
+          <a:p>
+            <a:pPr indent="0" marL="0">
+              <a:buNone/>
+            </a:pPr>
+            <a:r>
+              <a:rPr lang="en-US" sz="4000" dirty="0">
+                <a:solidFill>
+                  <a:srgbClr val="1B2D5C"/>
+                </a:solidFill>
+                <a:latin typeface="Arial" pitchFamily="34" charset="0"/>
+                <a:ea typeface="Arial" pitchFamily="34" charset="-122"/>
+                <a:cs typeface="Arial" pitchFamily="34" charset="-120"/>
+              </a:rPr>
+              <a:t>04</a:t>
+            </a:r>
+            <a:endParaRPr lang="en-US" sz="4000" dirty="0"/>
+          </a:p>
+        </p:txBody>
+      </p:sp>
+      <p:sp>
+        <p:nvSpPr>
+          <p:cNvPr id="21" name="Text 19"/>
+          <p:cNvSpPr txBox="1"/>
+          <p:nvPr/>
+        </p:nvSpPr>
+        <p:spPr>
+          <a:xfrm>
+            <a:off x="9075191" y="3200400"/>
+            <a:ext cx="2567864" cy="685800"/>
+          </a:xfrm>
+          <a:prstGeom prst="rect">
+            <a:avLst/>
+          </a:prstGeom>
+          <a:noFill/>
+          <a:ln/>
+        </p:spPr>
+        <p:txBody>
+          <a:bodyPr wrap="square" lIns="0" tIns="0" rIns="0" bIns="0" rtlCol="0" anchor="t"/>
+          <a:lstStyle/>
+          <a:p>
+            <a:pPr indent="0" marL="0">
+              <a:buNone/>
+            </a:pPr>
+            <a:r>
+              <a:rPr lang="en-US" sz="1700" b="1" dirty="0">
+                <a:solidFill>
+                  <a:srgbClr val="16181D"/>
+                </a:solidFill>
+                <a:latin typeface="Arial" pitchFamily="34" charset="0"/>
+                <a:ea typeface="Arial" pitchFamily="34" charset="-122"/>
+                <a:cs typeface="Arial" pitchFamily="34" charset="-120"/>
+              </a:rPr>
+              <a:t>Entscheiden</a:t>
+            </a:r>
+            <a:endParaRPr lang="en-US" sz="1700" dirty="0"/>
+          </a:p>
+        </p:txBody>
+      </p:sp>
+      <p:sp>
+        <p:nvSpPr>
+          <p:cNvPr id="22" name="Text 20"/>
+          <p:cNvSpPr txBox="1"/>
+          <p:nvPr/>
+        </p:nvSpPr>
+        <p:spPr>
+          <a:xfrm>
+            <a:off x="9075191" y="3931920"/>
+            <a:ext cx="2567864" cy="1463040"/>
+          </a:xfrm>
+          <a:prstGeom prst="rect">
+            <a:avLst/>
+          </a:prstGeom>
+          <a:noFill/>
+          <a:ln/>
+        </p:spPr>
+        <p:txBody>
+          <a:bodyPr wrap="square" lIns="0" tIns="0" rIns="0" bIns="0" rtlCol="0" anchor="t"/>
+          <a:lstStyle/>
+          <a:p>
+            <a:pPr indent="0" marL="0">
+              <a:lnSpc>
+                <a:spcPct val="112000"/>
+              </a:lnSpc>
+              <a:buNone/>
+            </a:pPr>
+            <a:r>
+              <a:rPr lang="en-US" sz="1400" dirty="0">
+                <a:solidFill>
+                  <a:srgbClr val="16181D"/>
+                </a:solidFill>
+                <a:latin typeface="Arial" pitchFamily="34" charset="0"/>
+                <a:ea typeface="Arial" pitchFamily="34" charset="-122"/>
+                <a:cs typeface="Arial" pitchFamily="34" charset="-120"/>
+              </a:rPr>
+              <a:t>Im Lenkungskreis, auf Basis von Zahlen und Pilot-Ergebnis.</a:t>
+            </a:r>
+            <a:endParaRPr lang="en-US" sz="1400" dirty="0"/>
+          </a:p>
+        </p:txBody>
+      </p:sp>
+      <p:sp>
+        <p:nvSpPr>
+          <p:cNvPr id="23" name="Shape 21"/>
+          <p:cNvSpPr/>
+          <p:nvPr/>
+        </p:nvSpPr>
+        <p:spPr>
+          <a:xfrm>
+            <a:off x="548640" y="5440680"/>
+            <a:ext cx="11094415" cy="685800"/>
+          </a:xfrm>
+          <a:prstGeom prst="rect">
+            <a:avLst/>
+          </a:prstGeom>
+          <a:solidFill>
+            <a:srgbClr val="E4F3F1"/>
+          </a:solidFill>
+          <a:ln w="12700">
+            <a:solidFill>
+              <a:srgbClr val="E4F3F1"/>
+            </a:solidFill>
+            <a:prstDash val="solid"/>
+          </a:ln>
+        </p:spPr>
+      </p:sp>
+      <p:sp>
+        <p:nvSpPr>
+          <p:cNvPr id="24" name="Text 22"/>
+          <p:cNvSpPr txBox="1"/>
+          <p:nvPr/>
+        </p:nvSpPr>
+        <p:spPr>
+          <a:xfrm>
+            <a:off x="822960" y="5440680"/>
+            <a:ext cx="10545775" cy="685800"/>
+          </a:xfrm>
+          <a:prstGeom prst="rect">
+            <a:avLst/>
+          </a:prstGeom>
+          <a:noFill/>
+          <a:ln/>
+        </p:spPr>
+        <p:txBody>
+          <a:bodyPr wrap="square" lIns="0" tIns="0" rIns="0" bIns="0" rtlCol="0" anchor="ctr"/>
+          <a:lstStyle/>
+          <a:p>
+            <a:pPr indent="0" marL="0">
+              <a:buNone/>
+            </a:pPr>
+            <a:r>
+              <a:rPr lang="en-US" sz="1400" b="1" dirty="0">
+                <a:solidFill>
+                  <a:srgbClr val="000E2F"/>
+                </a:solidFill>
+                <a:latin typeface="Arial" pitchFamily="34" charset="0"/>
+                <a:ea typeface="Arial" pitchFamily="34" charset="-122"/>
+                <a:cs typeface="Arial" pitchFamily="34" charset="-120"/>
+              </a:rPr>
+              <a:t>Einordnung: </a:t>
+            </a:r>
+            <a:pPr indent="0" marL="0">
+              <a:buNone/>
+            </a:pPr>
+            <a:r>
+              <a:rPr lang="en-US" sz="1400" dirty="0">
+                <a:solidFill>
+                  <a:srgbClr val="000E2F"/>
+                </a:solidFill>
+                <a:latin typeface="Arial" pitchFamily="34" charset="0"/>
+                <a:ea typeface="Arial" pitchFamily="34" charset="-122"/>
+                <a:cs typeface="Arial" pitchFamily="34" charset="-120"/>
+              </a:rPr>
+              <a:t>Am Ende steht eine Entscheidung auf Basis von Zahlen und Pilot-Ergebnissen – nicht von Einschätzungen.</a:t>
+            </a:r>
+            <a:endParaRPr lang="en-US" sz="1400" dirty="0"/>
+          </a:p>
+        </p:txBody>
+      </p:sp>
+    </p:spTree>
+  </p:cSld>
+  <p:clrMapOvr>
+    <a:masterClrMapping/>
+  </p:clrMapOvr>
+</p:sld>
+</file>
+
+<file path=ppt/slides/slide12.xml><?xml version="1.0" encoding="utf-8"?>
+<p:sld xmlns:a="http://schemas.openxmlformats.org/drawingml/2006/main" xmlns:r="http://schemas.openxmlformats.org/officeDocument/2006/relationships" xmlns:p="http://schemas.openxmlformats.org/presentationml/2006/main">
+  <p:cSld name="Slide 12">
+    <p:bg>
+      <p:bgPr>
+        <a:solidFill>
+          <a:srgbClr val="FFFFFF"/>
+        </a:solidFill>
+      </p:bgPr>
+    </p:bg>
+    <p:spTree>
+      <p:nvGrpSpPr>
+        <p:cNvPr id="1" name=""/>
+        <p:cNvGrpSpPr/>
+        <p:nvPr/>
+      </p:nvGrpSpPr>
+      <p:grpSpPr>
+        <a:xfrm>
+          <a:off x="0" y="0"/>
+          <a:ext cx="0" cy="0"/>
+          <a:chOff x="0" y="0"/>
+          <a:chExt cx="0" cy="0"/>
+        </a:xfrm>
+      </p:grpSpPr>
+      <p:sp>
+        <p:nvSpPr>
+          <p:cNvPr id="2" name="Text 0"/>
+          <p:cNvSpPr txBox="1"/>
+          <p:nvPr/>
+        </p:nvSpPr>
+        <p:spPr>
+          <a:xfrm>
+            <a:off x="548640" y="411480"/>
+            <a:ext cx="11094415" cy="594360"/>
+          </a:xfrm>
+          <a:prstGeom prst="rect">
+            <a:avLst/>
+          </a:prstGeom>
+          <a:noFill/>
+          <a:ln/>
+        </p:spPr>
+        <p:txBody>
+          <a:bodyPr wrap="square" lIns="0" tIns="0" rIns="0" bIns="0" rtlCol="0" anchor="b"/>
+          <a:lstStyle/>
+          <a:p>
+            <a:pPr indent="0" marL="0">
+              <a:buNone/>
+            </a:pPr>
+            <a:r>
+              <a:rPr lang="en-US" sz="3000" dirty="0">
+                <a:solidFill>
+                  <a:srgbClr val="16181D"/>
+                </a:solidFill>
+                <a:latin typeface="Arial" pitchFamily="34" charset="0"/>
+                <a:ea typeface="Arial" pitchFamily="34" charset="-122"/>
+                <a:cs typeface="Arial" pitchFamily="34" charset="-120"/>
+              </a:rPr>
               <a:t>UNSERE EINSCHÄTZUNG</a:t>
             </a:r>
             <a:endParaRPr lang="en-US" sz="3000" dirty="0"/>
@@ -2637,7 +5217,7 @@
                 <a:ea typeface="Arial" pitchFamily="34" charset="-122"/>
                 <a:cs typeface="Arial" pitchFamily="34" charset="-120"/>
               </a:rPr>
-              <a:t>10</a:t>
+              <a:t>12</a:t>
             </a:r>
             <a:endParaRPr lang="en-US" sz="900" dirty="0"/>
           </a:p>
@@ -2875,9 +5455,9 @@
 </p:sld>
 </file>
 
-<file path=ppt/slides/slide11.xml><?xml version="1.0" encoding="utf-8"?>
+<file path=ppt/slides/slide13.xml><?xml version="1.0" encoding="utf-8"?>
 <p:sld xmlns:a="http://schemas.openxmlformats.org/drawingml/2006/main" xmlns:r="http://schemas.openxmlformats.org/officeDocument/2006/relationships" xmlns:p="http://schemas.openxmlformats.org/presentationml/2006/main">
-  <p:cSld name="Slide 11">
+  <p:cSld name="Slide 13">
     <p:bg>
       <p:bgPr>
         <a:solidFill>
@@ -3049,7 +5629,7 @@
                 <a:ea typeface="Arial" pitchFamily="34" charset="-122"/>
                 <a:cs typeface="Arial" pitchFamily="34" charset="-120"/>
               </a:rPr>
-              <a:t>11</a:t>
+              <a:t>13</a:t>
             </a:r>
             <a:endParaRPr lang="en-US" sz="900" dirty="0"/>
           </a:p>
@@ -3057,7 +5637,7 @@
       </p:sp>
       <p:graphicFrame>
         <p:nvGraphicFramePr>
-          <p:cNvPr id="12" name="Table 0"/>
+          <p:cNvPr id="14" name="Table 0"/>
           <p:cNvGraphicFramePr>
             <a:graphicFrameLocks noGrp="1"/>
           </p:cNvGraphicFramePr>
@@ -8271,6 +10851,2110 @@
                 <a:ea typeface="Arial" pitchFamily="34" charset="-122"/>
                 <a:cs typeface="Arial" pitchFamily="34" charset="-120"/>
               </a:rPr>
+              <a:t>OPTION A: PIMCORE – HIGHLIGHTS</a:t>
+            </a:r>
+            <a:endParaRPr lang="en-US" sz="3000" dirty="0"/>
+          </a:p>
+        </p:txBody>
+      </p:sp>
+      <p:sp>
+        <p:nvSpPr>
+          <p:cNvPr id="3" name="Text 1"/>
+          <p:cNvSpPr txBox="1"/>
+          <p:nvPr/>
+        </p:nvSpPr>
+        <p:spPr>
+          <a:xfrm>
+            <a:off x="548640" y="1033272"/>
+            <a:ext cx="11094415" cy="365760"/>
+          </a:xfrm>
+          <a:prstGeom prst="rect">
+            <a:avLst/>
+          </a:prstGeom>
+          <a:noFill/>
+          <a:ln/>
+        </p:spPr>
+        <p:txBody>
+          <a:bodyPr wrap="square" lIns="0" tIns="0" rIns="0" bIns="0" rtlCol="0" anchor="t"/>
+          <a:lstStyle/>
+          <a:p>
+            <a:pPr indent="0" marL="0">
+              <a:buNone/>
+            </a:pPr>
+            <a:r>
+              <a:rPr lang="en-US" sz="1400" dirty="0">
+                <a:solidFill>
+                  <a:srgbClr val="4B5563"/>
+                </a:solidFill>
+                <a:latin typeface="Arial" pitchFamily="34" charset="0"/>
+                <a:ea typeface="Arial" pitchFamily="34" charset="-122"/>
+                <a:cs typeface="Arial" pitchFamily="34" charset="-120"/>
+              </a:rPr>
+              <a:t>Eine etablierte Open-Core-Plattform für Daten, Assets und Inhalte.</a:t>
+            </a:r>
+            <a:endParaRPr lang="en-US" sz="1400" dirty="0"/>
+          </a:p>
+        </p:txBody>
+      </p:sp>
+      <p:sp>
+        <p:nvSpPr>
+          <p:cNvPr id="4" name="Text 2"/>
+          <p:cNvSpPr txBox="1"/>
+          <p:nvPr/>
+        </p:nvSpPr>
+        <p:spPr>
+          <a:xfrm>
+            <a:off x="548640" y="6400800"/>
+            <a:ext cx="7315200" cy="228600"/>
+          </a:xfrm>
+          <a:prstGeom prst="rect">
+            <a:avLst/>
+          </a:prstGeom>
+          <a:noFill/>
+          <a:ln/>
+        </p:spPr>
+        <p:txBody>
+          <a:bodyPr wrap="square" lIns="0" tIns="0" rIns="0" bIns="0" rtlCol="0" anchor="t"/>
+          <a:lstStyle/>
+          <a:p>
+            <a:pPr indent="0" marL="0">
+              <a:buNone/>
+            </a:pPr>
+            <a:r>
+              <a:rPr lang="en-US" sz="900" dirty="0">
+                <a:solidFill>
+                  <a:srgbClr val="4B5563"/>
+                </a:solidFill>
+                <a:latin typeface="Arial" pitchFamily="34" charset="0"/>
+                <a:ea typeface="Arial" pitchFamily="34" charset="-122"/>
+                <a:cs typeface="Arial" pitchFamily="34" charset="-120"/>
+              </a:rPr>
+              <a:t>PIM-Kostenbetrachtung Kohlhammer  ·  Entscheidungsgrundlage  ·  September 2026</a:t>
+            </a:r>
+            <a:endParaRPr lang="en-US" sz="900" dirty="0"/>
+          </a:p>
+        </p:txBody>
+      </p:sp>
+      <p:sp>
+        <p:nvSpPr>
+          <p:cNvPr id="5" name="Text 3"/>
+          <p:cNvSpPr txBox="1"/>
+          <p:nvPr/>
+        </p:nvSpPr>
+        <p:spPr>
+          <a:xfrm>
+            <a:off x="10728655" y="6400800"/>
+            <a:ext cx="914400" cy="228600"/>
+          </a:xfrm>
+          <a:prstGeom prst="rect">
+            <a:avLst/>
+          </a:prstGeom>
+          <a:noFill/>
+          <a:ln/>
+        </p:spPr>
+        <p:txBody>
+          <a:bodyPr wrap="square" lIns="0" tIns="0" rIns="0" bIns="0" rtlCol="0" anchor="t"/>
+          <a:lstStyle/>
+          <a:p>
+            <a:pPr algn="r" indent="0" marL="0">
+              <a:buNone/>
+            </a:pPr>
+            <a:r>
+              <a:rPr lang="en-US" sz="900" dirty="0">
+                <a:solidFill>
+                  <a:srgbClr val="4B5563"/>
+                </a:solidFill>
+                <a:latin typeface="Arial" pitchFamily="34" charset="0"/>
+                <a:ea typeface="Arial" pitchFamily="34" charset="-122"/>
+                <a:cs typeface="Arial" pitchFamily="34" charset="-120"/>
+              </a:rPr>
+              <a:t>3</a:t>
+            </a:r>
+            <a:endParaRPr lang="en-US" sz="900" dirty="0"/>
+          </a:p>
+        </p:txBody>
+      </p:sp>
+      <p:sp>
+        <p:nvSpPr>
+          <p:cNvPr id="6" name="Shape 4"/>
+          <p:cNvSpPr/>
+          <p:nvPr/>
+        </p:nvSpPr>
+        <p:spPr>
+          <a:xfrm>
+            <a:off x="548640" y="1645920"/>
+            <a:ext cx="3520440" cy="1600200"/>
+          </a:xfrm>
+          <a:prstGeom prst="rect">
+            <a:avLst/>
+          </a:prstGeom>
+          <a:solidFill>
+            <a:srgbClr val="FFFFFF"/>
+          </a:solidFill>
+          <a:ln w="12700">
+            <a:solidFill>
+              <a:srgbClr val="D6DDE3"/>
+            </a:solidFill>
+            <a:prstDash val="solid"/>
+          </a:ln>
+        </p:spPr>
+      </p:sp>
+      <p:sp>
+        <p:nvSpPr>
+          <p:cNvPr id="7" name="Shape 5"/>
+          <p:cNvSpPr/>
+          <p:nvPr/>
+        </p:nvSpPr>
+        <p:spPr>
+          <a:xfrm>
+            <a:off x="777240" y="1901952"/>
+            <a:ext cx="182880" cy="182880"/>
+          </a:xfrm>
+          <a:prstGeom prst="rect">
+            <a:avLst/>
+          </a:prstGeom>
+          <a:solidFill>
+            <a:srgbClr val="2F4A9E"/>
+          </a:solidFill>
+          <a:ln w="12700">
+            <a:solidFill>
+              <a:srgbClr val="2F4A9E"/>
+            </a:solidFill>
+            <a:prstDash val="solid"/>
+          </a:ln>
+        </p:spPr>
+      </p:sp>
+      <p:sp>
+        <p:nvSpPr>
+          <p:cNvPr id="8" name="Text 6"/>
+          <p:cNvSpPr txBox="1"/>
+          <p:nvPr/>
+        </p:nvSpPr>
+        <p:spPr>
+          <a:xfrm>
+            <a:off x="1097280" y="1828800"/>
+            <a:ext cx="2788920" cy="365760"/>
+          </a:xfrm>
+          <a:prstGeom prst="rect">
+            <a:avLst/>
+          </a:prstGeom>
+          <a:noFill/>
+          <a:ln/>
+        </p:spPr>
+        <p:txBody>
+          <a:bodyPr wrap="square" lIns="0" tIns="0" rIns="0" bIns="0" rtlCol="0" anchor="t"/>
+          <a:lstStyle/>
+          <a:p>
+            <a:pPr indent="0" marL="0">
+              <a:buNone/>
+            </a:pPr>
+            <a:r>
+              <a:rPr lang="en-US" sz="1600" b="1" dirty="0">
+                <a:solidFill>
+                  <a:srgbClr val="16181D"/>
+                </a:solidFill>
+                <a:latin typeface="Arial" pitchFamily="34" charset="0"/>
+                <a:ea typeface="Arial" pitchFamily="34" charset="-122"/>
+                <a:cs typeface="Arial" pitchFamily="34" charset="-120"/>
+              </a:rPr>
+              <a:t>Flexible Datenmodellierung</a:t>
+            </a:r>
+            <a:endParaRPr lang="en-US" sz="1600" dirty="0"/>
+          </a:p>
+        </p:txBody>
+      </p:sp>
+      <p:sp>
+        <p:nvSpPr>
+          <p:cNvPr id="9" name="Text 7"/>
+          <p:cNvSpPr txBox="1"/>
+          <p:nvPr/>
+        </p:nvSpPr>
+        <p:spPr>
+          <a:xfrm>
+            <a:off x="777240" y="2286000"/>
+            <a:ext cx="3063240" cy="868680"/>
+          </a:xfrm>
+          <a:prstGeom prst="rect">
+            <a:avLst/>
+          </a:prstGeom>
+          <a:noFill/>
+          <a:ln/>
+        </p:spPr>
+        <p:txBody>
+          <a:bodyPr wrap="square" lIns="0" tIns="0" rIns="0" bIns="0" rtlCol="0" anchor="t"/>
+          <a:lstStyle/>
+          <a:p>
+            <a:pPr indent="0" marL="0">
+              <a:lnSpc>
+                <a:spcPct val="110000"/>
+              </a:lnSpc>
+              <a:buNone/>
+            </a:pPr>
+            <a:r>
+              <a:rPr lang="en-US" sz="1250" dirty="0">
+                <a:solidFill>
+                  <a:srgbClr val="2C333B"/>
+                </a:solidFill>
+                <a:latin typeface="Arial" pitchFamily="34" charset="0"/>
+                <a:ea typeface="Arial" pitchFamily="34" charset="-122"/>
+                <a:cs typeface="Arial" pitchFamily="34" charset="-120"/>
+              </a:rPr>
+              <a:t>Klassen-Editor für beliebige Datenobjekte, ergänzt um Objekt-Bricks, Field-Collections und Classification Store.</a:t>
+            </a:r>
+            <a:endParaRPr lang="en-US" sz="1250" dirty="0"/>
+          </a:p>
+        </p:txBody>
+      </p:sp>
+      <p:sp>
+        <p:nvSpPr>
+          <p:cNvPr id="10" name="Shape 8"/>
+          <p:cNvSpPr/>
+          <p:nvPr/>
+        </p:nvSpPr>
+        <p:spPr>
+          <a:xfrm>
+            <a:off x="4335628" y="1645920"/>
+            <a:ext cx="3520440" cy="1600200"/>
+          </a:xfrm>
+          <a:prstGeom prst="rect">
+            <a:avLst/>
+          </a:prstGeom>
+          <a:solidFill>
+            <a:srgbClr val="FFFFFF"/>
+          </a:solidFill>
+          <a:ln w="12700">
+            <a:solidFill>
+              <a:srgbClr val="D6DDE3"/>
+            </a:solidFill>
+            <a:prstDash val="solid"/>
+          </a:ln>
+        </p:spPr>
+      </p:sp>
+      <p:sp>
+        <p:nvSpPr>
+          <p:cNvPr id="11" name="Shape 9"/>
+          <p:cNvSpPr/>
+          <p:nvPr/>
+        </p:nvSpPr>
+        <p:spPr>
+          <a:xfrm>
+            <a:off x="4564228" y="1901952"/>
+            <a:ext cx="182880" cy="182880"/>
+          </a:xfrm>
+          <a:prstGeom prst="rect">
+            <a:avLst/>
+          </a:prstGeom>
+          <a:solidFill>
+            <a:srgbClr val="2F4A9E"/>
+          </a:solidFill>
+          <a:ln w="12700">
+            <a:solidFill>
+              <a:srgbClr val="2F4A9E"/>
+            </a:solidFill>
+            <a:prstDash val="solid"/>
+          </a:ln>
+        </p:spPr>
+      </p:sp>
+      <p:sp>
+        <p:nvSpPr>
+          <p:cNvPr id="12" name="Text 10"/>
+          <p:cNvSpPr txBox="1"/>
+          <p:nvPr/>
+        </p:nvSpPr>
+        <p:spPr>
+          <a:xfrm>
+            <a:off x="4884268" y="1828800"/>
+            <a:ext cx="2788920" cy="365760"/>
+          </a:xfrm>
+          <a:prstGeom prst="rect">
+            <a:avLst/>
+          </a:prstGeom>
+          <a:noFill/>
+          <a:ln/>
+        </p:spPr>
+        <p:txBody>
+          <a:bodyPr wrap="square" lIns="0" tIns="0" rIns="0" bIns="0" rtlCol="0" anchor="t"/>
+          <a:lstStyle/>
+          <a:p>
+            <a:pPr indent="0" marL="0">
+              <a:buNone/>
+            </a:pPr>
+            <a:r>
+              <a:rPr lang="en-US" sz="1600" b="1" dirty="0">
+                <a:solidFill>
+                  <a:srgbClr val="16181D"/>
+                </a:solidFill>
+                <a:latin typeface="Arial" pitchFamily="34" charset="0"/>
+                <a:ea typeface="Arial" pitchFamily="34" charset="-122"/>
+                <a:cs typeface="Arial" pitchFamily="34" charset="-120"/>
+              </a:rPr>
+              <a:t>PIM und MDM</a:t>
+            </a:r>
+            <a:endParaRPr lang="en-US" sz="1600" dirty="0"/>
+          </a:p>
+        </p:txBody>
+      </p:sp>
+      <p:sp>
+        <p:nvSpPr>
+          <p:cNvPr id="13" name="Text 11"/>
+          <p:cNvSpPr txBox="1"/>
+          <p:nvPr/>
+        </p:nvSpPr>
+        <p:spPr>
+          <a:xfrm>
+            <a:off x="4564228" y="2286000"/>
+            <a:ext cx="3063240" cy="868680"/>
+          </a:xfrm>
+          <a:prstGeom prst="rect">
+            <a:avLst/>
+          </a:prstGeom>
+          <a:noFill/>
+          <a:ln/>
+        </p:spPr>
+        <p:txBody>
+          <a:bodyPr wrap="square" lIns="0" tIns="0" rIns="0" bIns="0" rtlCol="0" anchor="t"/>
+          <a:lstStyle/>
+          <a:p>
+            <a:pPr indent="0" marL="0">
+              <a:lnSpc>
+                <a:spcPct val="110000"/>
+              </a:lnSpc>
+              <a:buNone/>
+            </a:pPr>
+            <a:r>
+              <a:rPr lang="en-US" sz="1250" dirty="0">
+                <a:solidFill>
+                  <a:srgbClr val="2C333B"/>
+                </a:solidFill>
+                <a:latin typeface="Arial" pitchFamily="34" charset="0"/>
+                <a:ea typeface="Arial" pitchFamily="34" charset="-122"/>
+                <a:cs typeface="Arial" pitchFamily="34" charset="-120"/>
+              </a:rPr>
+              <a:t>Produktdaten und weitere Stammdaten wie Autoren oder Lieferanten in einem System – mit Vererbung, Varianten und Versionierung.</a:t>
+            </a:r>
+            <a:endParaRPr lang="en-US" sz="1250" dirty="0"/>
+          </a:p>
+        </p:txBody>
+      </p:sp>
+      <p:sp>
+        <p:nvSpPr>
+          <p:cNvPr id="14" name="Shape 12"/>
+          <p:cNvSpPr/>
+          <p:nvPr/>
+        </p:nvSpPr>
+        <p:spPr>
+          <a:xfrm>
+            <a:off x="8122615" y="1645920"/>
+            <a:ext cx="3520440" cy="1600200"/>
+          </a:xfrm>
+          <a:prstGeom prst="rect">
+            <a:avLst/>
+          </a:prstGeom>
+          <a:solidFill>
+            <a:srgbClr val="FFFFFF"/>
+          </a:solidFill>
+          <a:ln w="12700">
+            <a:solidFill>
+              <a:srgbClr val="D6DDE3"/>
+            </a:solidFill>
+            <a:prstDash val="solid"/>
+          </a:ln>
+        </p:spPr>
+      </p:sp>
+      <p:sp>
+        <p:nvSpPr>
+          <p:cNvPr id="15" name="Shape 13"/>
+          <p:cNvSpPr/>
+          <p:nvPr/>
+        </p:nvSpPr>
+        <p:spPr>
+          <a:xfrm>
+            <a:off x="8351215" y="1901952"/>
+            <a:ext cx="182880" cy="182880"/>
+          </a:xfrm>
+          <a:prstGeom prst="rect">
+            <a:avLst/>
+          </a:prstGeom>
+          <a:solidFill>
+            <a:srgbClr val="2F4A9E"/>
+          </a:solidFill>
+          <a:ln w="12700">
+            <a:solidFill>
+              <a:srgbClr val="2F4A9E"/>
+            </a:solidFill>
+            <a:prstDash val="solid"/>
+          </a:ln>
+        </p:spPr>
+      </p:sp>
+      <p:sp>
+        <p:nvSpPr>
+          <p:cNvPr id="16" name="Text 14"/>
+          <p:cNvSpPr txBox="1"/>
+          <p:nvPr/>
+        </p:nvSpPr>
+        <p:spPr>
+          <a:xfrm>
+            <a:off x="8671255" y="1828800"/>
+            <a:ext cx="2788920" cy="365760"/>
+          </a:xfrm>
+          <a:prstGeom prst="rect">
+            <a:avLst/>
+          </a:prstGeom>
+          <a:noFill/>
+          <a:ln/>
+        </p:spPr>
+        <p:txBody>
+          <a:bodyPr wrap="square" lIns="0" tIns="0" rIns="0" bIns="0" rtlCol="0" anchor="t"/>
+          <a:lstStyle/>
+          <a:p>
+            <a:pPr indent="0" marL="0">
+              <a:buNone/>
+            </a:pPr>
+            <a:r>
+              <a:rPr lang="en-US" sz="1600" b="1" dirty="0">
+                <a:solidFill>
+                  <a:srgbClr val="16181D"/>
+                </a:solidFill>
+                <a:latin typeface="Arial" pitchFamily="34" charset="0"/>
+                <a:ea typeface="Arial" pitchFamily="34" charset="-122"/>
+                <a:cs typeface="Arial" pitchFamily="34" charset="-120"/>
+              </a:rPr>
+              <a:t>Digital Asset Management</a:t>
+            </a:r>
+            <a:endParaRPr lang="en-US" sz="1600" dirty="0"/>
+          </a:p>
+        </p:txBody>
+      </p:sp>
+      <p:sp>
+        <p:nvSpPr>
+          <p:cNvPr id="17" name="Text 15"/>
+          <p:cNvSpPr txBox="1"/>
+          <p:nvPr/>
+        </p:nvSpPr>
+        <p:spPr>
+          <a:xfrm>
+            <a:off x="8351215" y="2286000"/>
+            <a:ext cx="3063240" cy="868680"/>
+          </a:xfrm>
+          <a:prstGeom prst="rect">
+            <a:avLst/>
+          </a:prstGeom>
+          <a:noFill/>
+          <a:ln/>
+        </p:spPr>
+        <p:txBody>
+          <a:bodyPr wrap="square" lIns="0" tIns="0" rIns="0" bIns="0" rtlCol="0" anchor="t"/>
+          <a:lstStyle/>
+          <a:p>
+            <a:pPr indent="0" marL="0">
+              <a:lnSpc>
+                <a:spcPct val="110000"/>
+              </a:lnSpc>
+              <a:buNone/>
+            </a:pPr>
+            <a:r>
+              <a:rPr lang="en-US" sz="1250" dirty="0">
+                <a:solidFill>
+                  <a:srgbClr val="2C333B"/>
+                </a:solidFill>
+                <a:latin typeface="Arial" pitchFamily="34" charset="0"/>
+                <a:ea typeface="Arial" pitchFamily="34" charset="-122"/>
+                <a:cs typeface="Arial" pitchFamily="34" charset="-120"/>
+              </a:rPr>
+              <a:t>Vollwertiges DAM mit Metadaten, automatischen Bildvarianten und Versionierung.</a:t>
+            </a:r>
+            <a:endParaRPr lang="en-US" sz="1250" dirty="0"/>
+          </a:p>
+        </p:txBody>
+      </p:sp>
+      <p:sp>
+        <p:nvSpPr>
+          <p:cNvPr id="18" name="Shape 16"/>
+          <p:cNvSpPr/>
+          <p:nvPr/>
+        </p:nvSpPr>
+        <p:spPr>
+          <a:xfrm>
+            <a:off x="548640" y="3429000"/>
+            <a:ext cx="3520440" cy="1600200"/>
+          </a:xfrm>
+          <a:prstGeom prst="rect">
+            <a:avLst/>
+          </a:prstGeom>
+          <a:solidFill>
+            <a:srgbClr val="FFFFFF"/>
+          </a:solidFill>
+          <a:ln w="12700">
+            <a:solidFill>
+              <a:srgbClr val="D6DDE3"/>
+            </a:solidFill>
+            <a:prstDash val="solid"/>
+          </a:ln>
+        </p:spPr>
+      </p:sp>
+      <p:sp>
+        <p:nvSpPr>
+          <p:cNvPr id="19" name="Shape 17"/>
+          <p:cNvSpPr/>
+          <p:nvPr/>
+        </p:nvSpPr>
+        <p:spPr>
+          <a:xfrm>
+            <a:off x="777240" y="3685032"/>
+            <a:ext cx="182880" cy="182880"/>
+          </a:xfrm>
+          <a:prstGeom prst="rect">
+            <a:avLst/>
+          </a:prstGeom>
+          <a:solidFill>
+            <a:srgbClr val="2F4A9E"/>
+          </a:solidFill>
+          <a:ln w="12700">
+            <a:solidFill>
+              <a:srgbClr val="2F4A9E"/>
+            </a:solidFill>
+            <a:prstDash val="solid"/>
+          </a:ln>
+        </p:spPr>
+      </p:sp>
+      <p:sp>
+        <p:nvSpPr>
+          <p:cNvPr id="20" name="Text 18"/>
+          <p:cNvSpPr txBox="1"/>
+          <p:nvPr/>
+        </p:nvSpPr>
+        <p:spPr>
+          <a:xfrm>
+            <a:off x="1097280" y="3611880"/>
+            <a:ext cx="2788920" cy="365760"/>
+          </a:xfrm>
+          <a:prstGeom prst="rect">
+            <a:avLst/>
+          </a:prstGeom>
+          <a:noFill/>
+          <a:ln/>
+        </p:spPr>
+        <p:txBody>
+          <a:bodyPr wrap="square" lIns="0" tIns="0" rIns="0" bIns="0" rtlCol="0" anchor="t"/>
+          <a:lstStyle/>
+          <a:p>
+            <a:pPr indent="0" marL="0">
+              <a:buNone/>
+            </a:pPr>
+            <a:r>
+              <a:rPr lang="en-US" sz="1600" b="1" dirty="0">
+                <a:solidFill>
+                  <a:srgbClr val="16181D"/>
+                </a:solidFill>
+                <a:latin typeface="Arial" pitchFamily="34" charset="0"/>
+                <a:ea typeface="Arial" pitchFamily="34" charset="-122"/>
+                <a:cs typeface="Arial" pitchFamily="34" charset="-120"/>
+              </a:rPr>
+              <a:t>Datahub und APIs</a:t>
+            </a:r>
+            <a:endParaRPr lang="en-US" sz="1600" dirty="0"/>
+          </a:p>
+        </p:txBody>
+      </p:sp>
+      <p:sp>
+        <p:nvSpPr>
+          <p:cNvPr id="21" name="Text 19"/>
+          <p:cNvSpPr txBox="1"/>
+          <p:nvPr/>
+        </p:nvSpPr>
+        <p:spPr>
+          <a:xfrm>
+            <a:off x="777240" y="4069080"/>
+            <a:ext cx="3063240" cy="868680"/>
+          </a:xfrm>
+          <a:prstGeom prst="rect">
+            <a:avLst/>
+          </a:prstGeom>
+          <a:noFill/>
+          <a:ln/>
+        </p:spPr>
+        <p:txBody>
+          <a:bodyPr wrap="square" lIns="0" tIns="0" rIns="0" bIns="0" rtlCol="0" anchor="t"/>
+          <a:lstStyle/>
+          <a:p>
+            <a:pPr indent="0" marL="0">
+              <a:lnSpc>
+                <a:spcPct val="110000"/>
+              </a:lnSpc>
+              <a:buNone/>
+            </a:pPr>
+            <a:r>
+              <a:rPr lang="en-US" sz="1250" dirty="0">
+                <a:solidFill>
+                  <a:srgbClr val="2C333B"/>
+                </a:solidFill>
+                <a:latin typeface="Arial" pitchFamily="34" charset="0"/>
+                <a:ea typeface="Arial" pitchFamily="34" charset="-122"/>
+                <a:cs typeface="Arial" pitchFamily="34" charset="-120"/>
+              </a:rPr>
+              <a:t>Datenausspielung über GraphQL- und REST-Schnittstellen sowie Import- und Export-Adapter.</a:t>
+            </a:r>
+            <a:endParaRPr lang="en-US" sz="1250" dirty="0"/>
+          </a:p>
+        </p:txBody>
+      </p:sp>
+      <p:sp>
+        <p:nvSpPr>
+          <p:cNvPr id="22" name="Shape 20"/>
+          <p:cNvSpPr/>
+          <p:nvPr/>
+        </p:nvSpPr>
+        <p:spPr>
+          <a:xfrm>
+            <a:off x="4335628" y="3429000"/>
+            <a:ext cx="3520440" cy="1600200"/>
+          </a:xfrm>
+          <a:prstGeom prst="rect">
+            <a:avLst/>
+          </a:prstGeom>
+          <a:solidFill>
+            <a:srgbClr val="FFFFFF"/>
+          </a:solidFill>
+          <a:ln w="12700">
+            <a:solidFill>
+              <a:srgbClr val="D6DDE3"/>
+            </a:solidFill>
+            <a:prstDash val="solid"/>
+          </a:ln>
+        </p:spPr>
+      </p:sp>
+      <p:sp>
+        <p:nvSpPr>
+          <p:cNvPr id="23" name="Shape 21"/>
+          <p:cNvSpPr/>
+          <p:nvPr/>
+        </p:nvSpPr>
+        <p:spPr>
+          <a:xfrm>
+            <a:off x="4564228" y="3685032"/>
+            <a:ext cx="182880" cy="182880"/>
+          </a:xfrm>
+          <a:prstGeom prst="rect">
+            <a:avLst/>
+          </a:prstGeom>
+          <a:solidFill>
+            <a:srgbClr val="2F4A9E"/>
+          </a:solidFill>
+          <a:ln w="12700">
+            <a:solidFill>
+              <a:srgbClr val="2F4A9E"/>
+            </a:solidFill>
+            <a:prstDash val="solid"/>
+          </a:ln>
+        </p:spPr>
+      </p:sp>
+      <p:sp>
+        <p:nvSpPr>
+          <p:cNvPr id="24" name="Text 22"/>
+          <p:cNvSpPr txBox="1"/>
+          <p:nvPr/>
+        </p:nvSpPr>
+        <p:spPr>
+          <a:xfrm>
+            <a:off x="4884268" y="3611880"/>
+            <a:ext cx="2788920" cy="365760"/>
+          </a:xfrm>
+          <a:prstGeom prst="rect">
+            <a:avLst/>
+          </a:prstGeom>
+          <a:noFill/>
+          <a:ln/>
+        </p:spPr>
+        <p:txBody>
+          <a:bodyPr wrap="square" lIns="0" tIns="0" rIns="0" bIns="0" rtlCol="0" anchor="t"/>
+          <a:lstStyle/>
+          <a:p>
+            <a:pPr indent="0" marL="0">
+              <a:buNone/>
+            </a:pPr>
+            <a:r>
+              <a:rPr lang="en-US" sz="1600" b="1" dirty="0">
+                <a:solidFill>
+                  <a:srgbClr val="16181D"/>
+                </a:solidFill>
+                <a:latin typeface="Arial" pitchFamily="34" charset="0"/>
+                <a:ea typeface="Arial" pitchFamily="34" charset="-122"/>
+                <a:cs typeface="Arial" pitchFamily="34" charset="-120"/>
+              </a:rPr>
+              <a:t>Web-CMS und DXP</a:t>
+            </a:r>
+            <a:endParaRPr lang="en-US" sz="1600" dirty="0"/>
+          </a:p>
+        </p:txBody>
+      </p:sp>
+      <p:sp>
+        <p:nvSpPr>
+          <p:cNvPr id="25" name="Text 23"/>
+          <p:cNvSpPr txBox="1"/>
+          <p:nvPr/>
+        </p:nvSpPr>
+        <p:spPr>
+          <a:xfrm>
+            <a:off x="4564228" y="4069080"/>
+            <a:ext cx="3063240" cy="868680"/>
+          </a:xfrm>
+          <a:prstGeom prst="rect">
+            <a:avLst/>
+          </a:prstGeom>
+          <a:noFill/>
+          <a:ln/>
+        </p:spPr>
+        <p:txBody>
+          <a:bodyPr wrap="square" lIns="0" tIns="0" rIns="0" bIns="0" rtlCol="0" anchor="t"/>
+          <a:lstStyle/>
+          <a:p>
+            <a:pPr indent="0" marL="0">
+              <a:lnSpc>
+                <a:spcPct val="110000"/>
+              </a:lnSpc>
+              <a:buNone/>
+            </a:pPr>
+            <a:r>
+              <a:rPr lang="en-US" sz="1250" dirty="0">
+                <a:solidFill>
+                  <a:srgbClr val="2C333B"/>
+                </a:solidFill>
+                <a:latin typeface="Arial" pitchFamily="34" charset="0"/>
+                <a:ea typeface="Arial" pitchFamily="34" charset="-122"/>
+                <a:cs typeface="Arial" pitchFamily="34" charset="-120"/>
+              </a:rPr>
+              <a:t>Web-Inhalte, Produktdaten und Assets auf einer Plattform – auch headless nutzbar.</a:t>
+            </a:r>
+            <a:endParaRPr lang="en-US" sz="1250" dirty="0"/>
+          </a:p>
+        </p:txBody>
+      </p:sp>
+      <p:sp>
+        <p:nvSpPr>
+          <p:cNvPr id="26" name="Shape 24"/>
+          <p:cNvSpPr/>
+          <p:nvPr/>
+        </p:nvSpPr>
+        <p:spPr>
+          <a:xfrm>
+            <a:off x="8122615" y="3429000"/>
+            <a:ext cx="3520440" cy="1600200"/>
+          </a:xfrm>
+          <a:prstGeom prst="rect">
+            <a:avLst/>
+          </a:prstGeom>
+          <a:solidFill>
+            <a:srgbClr val="FFFFFF"/>
+          </a:solidFill>
+          <a:ln w="12700">
+            <a:solidFill>
+              <a:srgbClr val="D6DDE3"/>
+            </a:solidFill>
+            <a:prstDash val="solid"/>
+          </a:ln>
+        </p:spPr>
+      </p:sp>
+      <p:sp>
+        <p:nvSpPr>
+          <p:cNvPr id="27" name="Shape 25"/>
+          <p:cNvSpPr/>
+          <p:nvPr/>
+        </p:nvSpPr>
+        <p:spPr>
+          <a:xfrm>
+            <a:off x="8351215" y="3685032"/>
+            <a:ext cx="182880" cy="182880"/>
+          </a:xfrm>
+          <a:prstGeom prst="rect">
+            <a:avLst/>
+          </a:prstGeom>
+          <a:solidFill>
+            <a:srgbClr val="2F4A9E"/>
+          </a:solidFill>
+          <a:ln w="12700">
+            <a:solidFill>
+              <a:srgbClr val="2F4A9E"/>
+            </a:solidFill>
+            <a:prstDash val="solid"/>
+          </a:ln>
+        </p:spPr>
+      </p:sp>
+      <p:sp>
+        <p:nvSpPr>
+          <p:cNvPr id="28" name="Text 26"/>
+          <p:cNvSpPr txBox="1"/>
+          <p:nvPr/>
+        </p:nvSpPr>
+        <p:spPr>
+          <a:xfrm>
+            <a:off x="8671255" y="3611880"/>
+            <a:ext cx="2788920" cy="365760"/>
+          </a:xfrm>
+          <a:prstGeom prst="rect">
+            <a:avLst/>
+          </a:prstGeom>
+          <a:noFill/>
+          <a:ln/>
+        </p:spPr>
+        <p:txBody>
+          <a:bodyPr wrap="square" lIns="0" tIns="0" rIns="0" bIns="0" rtlCol="0" anchor="t"/>
+          <a:lstStyle/>
+          <a:p>
+            <a:pPr indent="0" marL="0">
+              <a:buNone/>
+            </a:pPr>
+            <a:r>
+              <a:rPr lang="en-US" sz="1600" b="1" dirty="0">
+                <a:solidFill>
+                  <a:srgbClr val="16181D"/>
+                </a:solidFill>
+                <a:latin typeface="Arial" pitchFamily="34" charset="0"/>
+                <a:ea typeface="Arial" pitchFamily="34" charset="-122"/>
+                <a:cs typeface="Arial" pitchFamily="34" charset="-120"/>
+              </a:rPr>
+              <a:t>Großes Ökosystem</a:t>
+            </a:r>
+            <a:endParaRPr lang="en-US" sz="1600" dirty="0"/>
+          </a:p>
+        </p:txBody>
+      </p:sp>
+      <p:sp>
+        <p:nvSpPr>
+          <p:cNvPr id="29" name="Text 27"/>
+          <p:cNvSpPr txBox="1"/>
+          <p:nvPr/>
+        </p:nvSpPr>
+        <p:spPr>
+          <a:xfrm>
+            <a:off x="8351215" y="4069080"/>
+            <a:ext cx="3063240" cy="868680"/>
+          </a:xfrm>
+          <a:prstGeom prst="rect">
+            <a:avLst/>
+          </a:prstGeom>
+          <a:noFill/>
+          <a:ln/>
+        </p:spPr>
+        <p:txBody>
+          <a:bodyPr wrap="square" lIns="0" tIns="0" rIns="0" bIns="0" rtlCol="0" anchor="t"/>
+          <a:lstStyle/>
+          <a:p>
+            <a:pPr indent="0" marL="0">
+              <a:lnSpc>
+                <a:spcPct val="110000"/>
+              </a:lnSpc>
+              <a:buNone/>
+            </a:pPr>
+            <a:r>
+              <a:rPr lang="en-US" sz="1250" dirty="0">
+                <a:solidFill>
+                  <a:srgbClr val="2C333B"/>
+                </a:solidFill>
+                <a:latin typeface="Arial" pitchFamily="34" charset="0"/>
+                <a:ea typeface="Arial" pitchFamily="34" charset="-122"/>
+                <a:cs typeface="Arial" pitchFamily="34" charset="-120"/>
+              </a:rPr>
+              <a:t>Internationale Community, breites Partnernetz und zahlreiche Erweiterungen auf Symfony-Basis.</a:t>
+            </a:r>
+            <a:endParaRPr lang="en-US" sz="1250" dirty="0"/>
+          </a:p>
+        </p:txBody>
+      </p:sp>
+      <p:sp>
+        <p:nvSpPr>
+          <p:cNvPr id="30" name="Shape 28"/>
+          <p:cNvSpPr/>
+          <p:nvPr/>
+        </p:nvSpPr>
+        <p:spPr>
+          <a:xfrm>
+            <a:off x="548640" y="5303520"/>
+            <a:ext cx="11094415" cy="777240"/>
+          </a:xfrm>
+          <a:prstGeom prst="rect">
+            <a:avLst/>
+          </a:prstGeom>
+          <a:solidFill>
+            <a:srgbClr val="E4F3F1"/>
+          </a:solidFill>
+          <a:ln w="12700">
+            <a:solidFill>
+              <a:srgbClr val="E4F3F1"/>
+            </a:solidFill>
+            <a:prstDash val="solid"/>
+          </a:ln>
+        </p:spPr>
+      </p:sp>
+      <p:sp>
+        <p:nvSpPr>
+          <p:cNvPr id="31" name="Text 29"/>
+          <p:cNvSpPr txBox="1"/>
+          <p:nvPr/>
+        </p:nvSpPr>
+        <p:spPr>
+          <a:xfrm>
+            <a:off x="822960" y="5303520"/>
+            <a:ext cx="10545775" cy="777240"/>
+          </a:xfrm>
+          <a:prstGeom prst="rect">
+            <a:avLst/>
+          </a:prstGeom>
+          <a:noFill/>
+          <a:ln/>
+        </p:spPr>
+        <p:txBody>
+          <a:bodyPr wrap="square" lIns="0" tIns="0" rIns="0" bIns="0" rtlCol="0" anchor="ctr"/>
+          <a:lstStyle/>
+          <a:p>
+            <a:pPr indent="0" marL="0">
+              <a:buNone/>
+            </a:pPr>
+            <a:r>
+              <a:rPr lang="en-US" sz="1400" b="1" dirty="0">
+                <a:solidFill>
+                  <a:srgbClr val="000E2F"/>
+                </a:solidFill>
+                <a:latin typeface="Arial" pitchFamily="34" charset="0"/>
+                <a:ea typeface="Arial" pitchFamily="34" charset="-122"/>
+                <a:cs typeface="Arial" pitchFamily="34" charset="-120"/>
+              </a:rPr>
+              <a:t>Besonders stark, wenn </a:t>
+            </a:r>
+            <a:pPr indent="0" marL="0">
+              <a:buNone/>
+            </a:pPr>
+            <a:r>
+              <a:rPr lang="en-US" sz="1400" dirty="0">
+                <a:solidFill>
+                  <a:srgbClr val="000E2F"/>
+                </a:solidFill>
+                <a:latin typeface="Arial" pitchFamily="34" charset="0"/>
+                <a:ea typeface="Arial" pitchFamily="34" charset="-122"/>
+                <a:cs typeface="Arial" pitchFamily="34" charset="-120"/>
+              </a:rPr>
+              <a:t>mehrere Datendomänen, Assets und der Web-Auftritt auf einer gemeinsamen Plattform zusammengeführt werden sollen.</a:t>
+            </a:r>
+            <a:endParaRPr lang="en-US" sz="1400" dirty="0"/>
+          </a:p>
+        </p:txBody>
+      </p:sp>
+    </p:spTree>
+  </p:cSld>
+  <p:clrMapOvr>
+    <a:masterClrMapping/>
+  </p:clrMapOvr>
+</p:sld>
+</file>
+
+<file path=ppt/slides/slide4.xml><?xml version="1.0" encoding="utf-8"?>
+<p:sld xmlns:a="http://schemas.openxmlformats.org/drawingml/2006/main" xmlns:r="http://schemas.openxmlformats.org/officeDocument/2006/relationships" xmlns:p="http://schemas.openxmlformats.org/presentationml/2006/main">
+  <p:cSld name="Slide 4">
+    <p:bg>
+      <p:bgPr>
+        <a:solidFill>
+          <a:srgbClr val="FFFFFF"/>
+        </a:solidFill>
+      </p:bgPr>
+    </p:bg>
+    <p:spTree>
+      <p:nvGrpSpPr>
+        <p:cNvPr id="1" name=""/>
+        <p:cNvGrpSpPr/>
+        <p:nvPr/>
+      </p:nvGrpSpPr>
+      <p:grpSpPr>
+        <a:xfrm>
+          <a:off x="0" y="0"/>
+          <a:ext cx="0" cy="0"/>
+          <a:chOff x="0" y="0"/>
+          <a:chExt cx="0" cy="0"/>
+        </a:xfrm>
+      </p:grpSpPr>
+      <p:sp>
+        <p:nvSpPr>
+          <p:cNvPr id="2" name="Text 0"/>
+          <p:cNvSpPr txBox="1"/>
+          <p:nvPr/>
+        </p:nvSpPr>
+        <p:spPr>
+          <a:xfrm>
+            <a:off x="548640" y="411480"/>
+            <a:ext cx="11094415" cy="594360"/>
+          </a:xfrm>
+          <a:prstGeom prst="rect">
+            <a:avLst/>
+          </a:prstGeom>
+          <a:noFill/>
+          <a:ln/>
+        </p:spPr>
+        <p:txBody>
+          <a:bodyPr wrap="square" lIns="0" tIns="0" rIns="0" bIns="0" rtlCol="0" anchor="b"/>
+          <a:lstStyle/>
+          <a:p>
+            <a:pPr indent="0" marL="0">
+              <a:buNone/>
+            </a:pPr>
+            <a:r>
+              <a:rPr lang="en-US" sz="3000" dirty="0">
+                <a:solidFill>
+                  <a:srgbClr val="16181D"/>
+                </a:solidFill>
+                <a:latin typeface="Arial" pitchFamily="34" charset="0"/>
+                <a:ea typeface="Arial" pitchFamily="34" charset="-122"/>
+                <a:cs typeface="Arial" pitchFamily="34" charset="-120"/>
+              </a:rPr>
+              <a:t>OPTION B: ANYPIM – HIGHLIGHTS</a:t>
+            </a:r>
+            <a:endParaRPr lang="en-US" sz="3000" dirty="0"/>
+          </a:p>
+        </p:txBody>
+      </p:sp>
+      <p:sp>
+        <p:nvSpPr>
+          <p:cNvPr id="3" name="Text 1"/>
+          <p:cNvSpPr txBox="1"/>
+          <p:nvPr/>
+        </p:nvSpPr>
+        <p:spPr>
+          <a:xfrm>
+            <a:off x="548640" y="1033272"/>
+            <a:ext cx="11094415" cy="365760"/>
+          </a:xfrm>
+          <a:prstGeom prst="rect">
+            <a:avLst/>
+          </a:prstGeom>
+          <a:noFill/>
+          <a:ln/>
+        </p:spPr>
+        <p:txBody>
+          <a:bodyPr wrap="square" lIns="0" tIns="0" rIns="0" bIns="0" rtlCol="0" anchor="t"/>
+          <a:lstStyle/>
+          <a:p>
+            <a:pPr indent="0" marL="0">
+              <a:buNone/>
+            </a:pPr>
+            <a:r>
+              <a:rPr lang="en-US" sz="1400" dirty="0">
+                <a:solidFill>
+                  <a:srgbClr val="4B5563"/>
+                </a:solidFill>
+                <a:latin typeface="Arial" pitchFamily="34" charset="0"/>
+                <a:ea typeface="Arial" pitchFamily="34" charset="-122"/>
+                <a:cs typeface="Arial" pitchFamily="34" charset="-120"/>
+              </a:rPr>
+              <a:t>Ein fokussiertes Open-Source-PIM für Produktdaten und ihre Ausgabe in viele Kanäle.</a:t>
+            </a:r>
+            <a:endParaRPr lang="en-US" sz="1400" dirty="0"/>
+          </a:p>
+        </p:txBody>
+      </p:sp>
+      <p:sp>
+        <p:nvSpPr>
+          <p:cNvPr id="4" name="Text 2"/>
+          <p:cNvSpPr txBox="1"/>
+          <p:nvPr/>
+        </p:nvSpPr>
+        <p:spPr>
+          <a:xfrm>
+            <a:off x="548640" y="6400800"/>
+            <a:ext cx="7315200" cy="228600"/>
+          </a:xfrm>
+          <a:prstGeom prst="rect">
+            <a:avLst/>
+          </a:prstGeom>
+          <a:noFill/>
+          <a:ln/>
+        </p:spPr>
+        <p:txBody>
+          <a:bodyPr wrap="square" lIns="0" tIns="0" rIns="0" bIns="0" rtlCol="0" anchor="t"/>
+          <a:lstStyle/>
+          <a:p>
+            <a:pPr indent="0" marL="0">
+              <a:buNone/>
+            </a:pPr>
+            <a:r>
+              <a:rPr lang="en-US" sz="900" dirty="0">
+                <a:solidFill>
+                  <a:srgbClr val="4B5563"/>
+                </a:solidFill>
+                <a:latin typeface="Arial" pitchFamily="34" charset="0"/>
+                <a:ea typeface="Arial" pitchFamily="34" charset="-122"/>
+                <a:cs typeface="Arial" pitchFamily="34" charset="-120"/>
+              </a:rPr>
+              <a:t>PIM-Kostenbetrachtung Kohlhammer  ·  Entscheidungsgrundlage  ·  September 2026</a:t>
+            </a:r>
+            <a:endParaRPr lang="en-US" sz="900" dirty="0"/>
+          </a:p>
+        </p:txBody>
+      </p:sp>
+      <p:sp>
+        <p:nvSpPr>
+          <p:cNvPr id="5" name="Text 3"/>
+          <p:cNvSpPr txBox="1"/>
+          <p:nvPr/>
+        </p:nvSpPr>
+        <p:spPr>
+          <a:xfrm>
+            <a:off x="10728655" y="6400800"/>
+            <a:ext cx="914400" cy="228600"/>
+          </a:xfrm>
+          <a:prstGeom prst="rect">
+            <a:avLst/>
+          </a:prstGeom>
+          <a:noFill/>
+          <a:ln/>
+        </p:spPr>
+        <p:txBody>
+          <a:bodyPr wrap="square" lIns="0" tIns="0" rIns="0" bIns="0" rtlCol="0" anchor="t"/>
+          <a:lstStyle/>
+          <a:p>
+            <a:pPr algn="r" indent="0" marL="0">
+              <a:buNone/>
+            </a:pPr>
+            <a:r>
+              <a:rPr lang="en-US" sz="900" dirty="0">
+                <a:solidFill>
+                  <a:srgbClr val="4B5563"/>
+                </a:solidFill>
+                <a:latin typeface="Arial" pitchFamily="34" charset="0"/>
+                <a:ea typeface="Arial" pitchFamily="34" charset="-122"/>
+                <a:cs typeface="Arial" pitchFamily="34" charset="-120"/>
+              </a:rPr>
+              <a:t>4</a:t>
+            </a:r>
+            <a:endParaRPr lang="en-US" sz="900" dirty="0"/>
+          </a:p>
+        </p:txBody>
+      </p:sp>
+      <p:sp>
+        <p:nvSpPr>
+          <p:cNvPr id="6" name="Shape 4"/>
+          <p:cNvSpPr/>
+          <p:nvPr/>
+        </p:nvSpPr>
+        <p:spPr>
+          <a:xfrm>
+            <a:off x="548640" y="1645920"/>
+            <a:ext cx="3520440" cy="1600200"/>
+          </a:xfrm>
+          <a:prstGeom prst="rect">
+            <a:avLst/>
+          </a:prstGeom>
+          <a:solidFill>
+            <a:srgbClr val="FFFFFF"/>
+          </a:solidFill>
+          <a:ln w="12700">
+            <a:solidFill>
+              <a:srgbClr val="D6DDE3"/>
+            </a:solidFill>
+            <a:prstDash val="solid"/>
+          </a:ln>
+        </p:spPr>
+      </p:sp>
+      <p:sp>
+        <p:nvSpPr>
+          <p:cNvPr id="7" name="Shape 5"/>
+          <p:cNvSpPr/>
+          <p:nvPr/>
+        </p:nvSpPr>
+        <p:spPr>
+          <a:xfrm>
+            <a:off x="777240" y="1901952"/>
+            <a:ext cx="182880" cy="182880"/>
+          </a:xfrm>
+          <a:prstGeom prst="rect">
+            <a:avLst/>
+          </a:prstGeom>
+          <a:solidFill>
+            <a:srgbClr val="1F9A8F"/>
+          </a:solidFill>
+          <a:ln w="12700">
+            <a:solidFill>
+              <a:srgbClr val="1F9A8F"/>
+            </a:solidFill>
+            <a:prstDash val="solid"/>
+          </a:ln>
+        </p:spPr>
+      </p:sp>
+      <p:sp>
+        <p:nvSpPr>
+          <p:cNvPr id="8" name="Text 6"/>
+          <p:cNvSpPr txBox="1"/>
+          <p:nvPr/>
+        </p:nvSpPr>
+        <p:spPr>
+          <a:xfrm>
+            <a:off x="1097280" y="1828800"/>
+            <a:ext cx="2788920" cy="365760"/>
+          </a:xfrm>
+          <a:prstGeom prst="rect">
+            <a:avLst/>
+          </a:prstGeom>
+          <a:noFill/>
+          <a:ln/>
+        </p:spPr>
+        <p:txBody>
+          <a:bodyPr wrap="square" lIns="0" tIns="0" rIns="0" bIns="0" rtlCol="0" anchor="t"/>
+          <a:lstStyle/>
+          <a:p>
+            <a:pPr indent="0" marL="0">
+              <a:buNone/>
+            </a:pPr>
+            <a:r>
+              <a:rPr lang="en-US" sz="1600" b="1" dirty="0">
+                <a:solidFill>
+                  <a:srgbClr val="16181D"/>
+                </a:solidFill>
+                <a:latin typeface="Arial" pitchFamily="34" charset="0"/>
+                <a:ea typeface="Arial" pitchFamily="34" charset="-122"/>
+                <a:cs typeface="Arial" pitchFamily="34" charset="-120"/>
+              </a:rPr>
+              <a:t>Datenmodell ohne Code</a:t>
+            </a:r>
+            <a:endParaRPr lang="en-US" sz="1600" dirty="0"/>
+          </a:p>
+        </p:txBody>
+      </p:sp>
+      <p:sp>
+        <p:nvSpPr>
+          <p:cNvPr id="9" name="Text 7"/>
+          <p:cNvSpPr txBox="1"/>
+          <p:nvPr/>
+        </p:nvSpPr>
+        <p:spPr>
+          <a:xfrm>
+            <a:off x="777240" y="2286000"/>
+            <a:ext cx="3063240" cy="868680"/>
+          </a:xfrm>
+          <a:prstGeom prst="rect">
+            <a:avLst/>
+          </a:prstGeom>
+          <a:noFill/>
+          <a:ln/>
+        </p:spPr>
+        <p:txBody>
+          <a:bodyPr wrap="square" lIns="0" tIns="0" rIns="0" bIns="0" rtlCol="0" anchor="t"/>
+          <a:lstStyle/>
+          <a:p>
+            <a:pPr indent="0" marL="0">
+              <a:lnSpc>
+                <a:spcPct val="110000"/>
+              </a:lnSpc>
+              <a:buNone/>
+            </a:pPr>
+            <a:r>
+              <a:rPr lang="en-US" sz="1250" dirty="0">
+                <a:solidFill>
+                  <a:srgbClr val="2C333B"/>
+                </a:solidFill>
+                <a:latin typeface="Arial" pitchFamily="34" charset="0"/>
+                <a:ea typeface="Arial" pitchFamily="34" charset="-122"/>
+                <a:cs typeface="Arial" pitchFamily="34" charset="-120"/>
+              </a:rPr>
+              <a:t>21 Datentypen, neue Attribute über die Oberfläche; Vererbung von Hierarchie zu Produkt zu Variante – etwa Werk und Ausgabe.</a:t>
+            </a:r>
+            <a:endParaRPr lang="en-US" sz="1250" dirty="0"/>
+          </a:p>
+        </p:txBody>
+      </p:sp>
+      <p:sp>
+        <p:nvSpPr>
+          <p:cNvPr id="10" name="Shape 8"/>
+          <p:cNvSpPr/>
+          <p:nvPr/>
+        </p:nvSpPr>
+        <p:spPr>
+          <a:xfrm>
+            <a:off x="4335628" y="1645920"/>
+            <a:ext cx="3520440" cy="1600200"/>
+          </a:xfrm>
+          <a:prstGeom prst="rect">
+            <a:avLst/>
+          </a:prstGeom>
+          <a:solidFill>
+            <a:srgbClr val="FFFFFF"/>
+          </a:solidFill>
+          <a:ln w="12700">
+            <a:solidFill>
+              <a:srgbClr val="D6DDE3"/>
+            </a:solidFill>
+            <a:prstDash val="solid"/>
+          </a:ln>
+        </p:spPr>
+      </p:sp>
+      <p:sp>
+        <p:nvSpPr>
+          <p:cNvPr id="11" name="Shape 9"/>
+          <p:cNvSpPr/>
+          <p:nvPr/>
+        </p:nvSpPr>
+        <p:spPr>
+          <a:xfrm>
+            <a:off x="4564228" y="1901952"/>
+            <a:ext cx="182880" cy="182880"/>
+          </a:xfrm>
+          <a:prstGeom prst="rect">
+            <a:avLst/>
+          </a:prstGeom>
+          <a:solidFill>
+            <a:srgbClr val="1F9A8F"/>
+          </a:solidFill>
+          <a:ln w="12700">
+            <a:solidFill>
+              <a:srgbClr val="1F9A8F"/>
+            </a:solidFill>
+            <a:prstDash val="solid"/>
+          </a:ln>
+        </p:spPr>
+      </p:sp>
+      <p:sp>
+        <p:nvSpPr>
+          <p:cNvPr id="12" name="Text 10"/>
+          <p:cNvSpPr txBox="1"/>
+          <p:nvPr/>
+        </p:nvSpPr>
+        <p:spPr>
+          <a:xfrm>
+            <a:off x="4884268" y="1828800"/>
+            <a:ext cx="2788920" cy="365760"/>
+          </a:xfrm>
+          <a:prstGeom prst="rect">
+            <a:avLst/>
+          </a:prstGeom>
+          <a:noFill/>
+          <a:ln/>
+        </p:spPr>
+        <p:txBody>
+          <a:bodyPr wrap="square" lIns="0" tIns="0" rIns="0" bIns="0" rtlCol="0" anchor="t"/>
+          <a:lstStyle/>
+          <a:p>
+            <a:pPr indent="0" marL="0">
+              <a:buNone/>
+            </a:pPr>
+            <a:r>
+              <a:rPr lang="en-US" sz="1600" b="1" dirty="0">
+                <a:solidFill>
+                  <a:srgbClr val="16181D"/>
+                </a:solidFill>
+                <a:latin typeface="Arial" pitchFamily="34" charset="0"/>
+                <a:ea typeface="Arial" pitchFamily="34" charset="-122"/>
+                <a:cs typeface="Arial" pitchFamily="34" charset="-120"/>
+              </a:rPr>
+              <a:t>Mehrere Ordnungen</a:t>
+            </a:r>
+            <a:endParaRPr lang="en-US" sz="1600" dirty="0"/>
+          </a:p>
+        </p:txBody>
+      </p:sp>
+      <p:sp>
+        <p:nvSpPr>
+          <p:cNvPr id="13" name="Text 11"/>
+          <p:cNvSpPr txBox="1"/>
+          <p:nvPr/>
+        </p:nvSpPr>
+        <p:spPr>
+          <a:xfrm>
+            <a:off x="4564228" y="2286000"/>
+            <a:ext cx="3063240" cy="868680"/>
+          </a:xfrm>
+          <a:prstGeom prst="rect">
+            <a:avLst/>
+          </a:prstGeom>
+          <a:noFill/>
+          <a:ln/>
+        </p:spPr>
+        <p:txBody>
+          <a:bodyPr wrap="square" lIns="0" tIns="0" rIns="0" bIns="0" rtlCol="0" anchor="t"/>
+          <a:lstStyle/>
+          <a:p>
+            <a:pPr indent="0" marL="0">
+              <a:lnSpc>
+                <a:spcPct val="110000"/>
+              </a:lnSpc>
+              <a:buNone/>
+            </a:pPr>
+            <a:r>
+              <a:rPr lang="en-US" sz="1250" dirty="0">
+                <a:solidFill>
+                  <a:srgbClr val="2C333B"/>
+                </a:solidFill>
+                <a:latin typeface="Arial" pitchFamily="34" charset="0"/>
+                <a:ea typeface="Arial" pitchFamily="34" charset="-122"/>
+                <a:cs typeface="Arial" pitchFamily="34" charset="-120"/>
+              </a:rPr>
+              <a:t>Eine Master-Hierarchie und beliebig viele Ausgabe-Hierarchien, verbunden über Attribut-Mappings mit Umrechnung.</a:t>
+            </a:r>
+            <a:endParaRPr lang="en-US" sz="1250" dirty="0"/>
+          </a:p>
+        </p:txBody>
+      </p:sp>
+      <p:sp>
+        <p:nvSpPr>
+          <p:cNvPr id="14" name="Shape 12"/>
+          <p:cNvSpPr/>
+          <p:nvPr/>
+        </p:nvSpPr>
+        <p:spPr>
+          <a:xfrm>
+            <a:off x="8122615" y="1645920"/>
+            <a:ext cx="3520440" cy="1600200"/>
+          </a:xfrm>
+          <a:prstGeom prst="rect">
+            <a:avLst/>
+          </a:prstGeom>
+          <a:solidFill>
+            <a:srgbClr val="FFFFFF"/>
+          </a:solidFill>
+          <a:ln w="12700">
+            <a:solidFill>
+              <a:srgbClr val="D6DDE3"/>
+            </a:solidFill>
+            <a:prstDash val="solid"/>
+          </a:ln>
+        </p:spPr>
+      </p:sp>
+      <p:sp>
+        <p:nvSpPr>
+          <p:cNvPr id="15" name="Shape 13"/>
+          <p:cNvSpPr/>
+          <p:nvPr/>
+        </p:nvSpPr>
+        <p:spPr>
+          <a:xfrm>
+            <a:off x="8351215" y="1901952"/>
+            <a:ext cx="182880" cy="182880"/>
+          </a:xfrm>
+          <a:prstGeom prst="rect">
+            <a:avLst/>
+          </a:prstGeom>
+          <a:solidFill>
+            <a:srgbClr val="1F9A8F"/>
+          </a:solidFill>
+          <a:ln w="12700">
+            <a:solidFill>
+              <a:srgbClr val="1F9A8F"/>
+            </a:solidFill>
+            <a:prstDash val="solid"/>
+          </a:ln>
+        </p:spPr>
+      </p:sp>
+      <p:sp>
+        <p:nvSpPr>
+          <p:cNvPr id="16" name="Text 14"/>
+          <p:cNvSpPr txBox="1"/>
+          <p:nvPr/>
+        </p:nvSpPr>
+        <p:spPr>
+          <a:xfrm>
+            <a:off x="8671255" y="1828800"/>
+            <a:ext cx="2788920" cy="365760"/>
+          </a:xfrm>
+          <a:prstGeom prst="rect">
+            <a:avLst/>
+          </a:prstGeom>
+          <a:noFill/>
+          <a:ln/>
+        </p:spPr>
+        <p:txBody>
+          <a:bodyPr wrap="square" lIns="0" tIns="0" rIns="0" bIns="0" rtlCol="0" anchor="t"/>
+          <a:lstStyle/>
+          <a:p>
+            <a:pPr indent="0" marL="0">
+              <a:buNone/>
+            </a:pPr>
+            <a:r>
+              <a:rPr lang="en-US" sz="1600" b="1" dirty="0">
+                <a:solidFill>
+                  <a:srgbClr val="16181D"/>
+                </a:solidFill>
+                <a:latin typeface="Arial" pitchFamily="34" charset="0"/>
+                <a:ea typeface="Arial" pitchFamily="34" charset="-122"/>
+                <a:cs typeface="Arial" pitchFamily="34" charset="-120"/>
+              </a:rPr>
+              <a:t>Print und Publishing</a:t>
+            </a:r>
+            <a:endParaRPr lang="en-US" sz="1600" dirty="0"/>
+          </a:p>
+        </p:txBody>
+      </p:sp>
+      <p:sp>
+        <p:nvSpPr>
+          <p:cNvPr id="17" name="Text 15"/>
+          <p:cNvSpPr txBox="1"/>
+          <p:nvPr/>
+        </p:nvSpPr>
+        <p:spPr>
+          <a:xfrm>
+            <a:off x="8351215" y="2286000"/>
+            <a:ext cx="3063240" cy="868680"/>
+          </a:xfrm>
+          <a:prstGeom prst="rect">
+            <a:avLst/>
+          </a:prstGeom>
+          <a:noFill/>
+          <a:ln/>
+        </p:spPr>
+        <p:txBody>
+          <a:bodyPr wrap="square" lIns="0" tIns="0" rIns="0" bIns="0" rtlCol="0" anchor="t"/>
+          <a:lstStyle/>
+          <a:p>
+            <a:pPr indent="0" marL="0">
+              <a:lnSpc>
+                <a:spcPct val="110000"/>
+              </a:lnSpc>
+              <a:buNone/>
+            </a:pPr>
+            <a:r>
+              <a:rPr lang="en-US" sz="1250" dirty="0">
+                <a:solidFill>
+                  <a:srgbClr val="2C333B"/>
+                </a:solidFill>
+                <a:latin typeface="Arial" pitchFamily="34" charset="0"/>
+                <a:ea typeface="Arial" pitchFamily="34" charset="-122"/>
+                <a:cs typeface="Arial" pitchFamily="34" charset="-120"/>
+              </a:rPr>
+              <a:t>PDF-Vorlagen, InDesign-Skript-Export und Publixx-Anbindung für Kataloge, Prospekte und Datenblätter.</a:t>
+            </a:r>
+            <a:endParaRPr lang="en-US" sz="1250" dirty="0"/>
+          </a:p>
+        </p:txBody>
+      </p:sp>
+      <p:sp>
+        <p:nvSpPr>
+          <p:cNvPr id="18" name="Shape 16"/>
+          <p:cNvSpPr/>
+          <p:nvPr/>
+        </p:nvSpPr>
+        <p:spPr>
+          <a:xfrm>
+            <a:off x="548640" y="3429000"/>
+            <a:ext cx="3520440" cy="1600200"/>
+          </a:xfrm>
+          <a:prstGeom prst="rect">
+            <a:avLst/>
+          </a:prstGeom>
+          <a:solidFill>
+            <a:srgbClr val="FFFFFF"/>
+          </a:solidFill>
+          <a:ln w="12700">
+            <a:solidFill>
+              <a:srgbClr val="D6DDE3"/>
+            </a:solidFill>
+            <a:prstDash val="solid"/>
+          </a:ln>
+        </p:spPr>
+      </p:sp>
+      <p:sp>
+        <p:nvSpPr>
+          <p:cNvPr id="19" name="Shape 17"/>
+          <p:cNvSpPr/>
+          <p:nvPr/>
+        </p:nvSpPr>
+        <p:spPr>
+          <a:xfrm>
+            <a:off x="777240" y="3685032"/>
+            <a:ext cx="182880" cy="182880"/>
+          </a:xfrm>
+          <a:prstGeom prst="rect">
+            <a:avLst/>
+          </a:prstGeom>
+          <a:solidFill>
+            <a:srgbClr val="1F9A8F"/>
+          </a:solidFill>
+          <a:ln w="12700">
+            <a:solidFill>
+              <a:srgbClr val="1F9A8F"/>
+            </a:solidFill>
+            <a:prstDash val="solid"/>
+          </a:ln>
+        </p:spPr>
+      </p:sp>
+      <p:sp>
+        <p:nvSpPr>
+          <p:cNvPr id="20" name="Text 18"/>
+          <p:cNvSpPr txBox="1"/>
+          <p:nvPr/>
+        </p:nvSpPr>
+        <p:spPr>
+          <a:xfrm>
+            <a:off x="1097280" y="3611880"/>
+            <a:ext cx="2788920" cy="365760"/>
+          </a:xfrm>
+          <a:prstGeom prst="rect">
+            <a:avLst/>
+          </a:prstGeom>
+          <a:noFill/>
+          <a:ln/>
+        </p:spPr>
+        <p:txBody>
+          <a:bodyPr wrap="square" lIns="0" tIns="0" rIns="0" bIns="0" rtlCol="0" anchor="t"/>
+          <a:lstStyle/>
+          <a:p>
+            <a:pPr indent="0" marL="0">
+              <a:buNone/>
+            </a:pPr>
+            <a:r>
+              <a:rPr lang="en-US" sz="1600" b="1" dirty="0">
+                <a:solidFill>
+                  <a:srgbClr val="16181D"/>
+                </a:solidFill>
+                <a:latin typeface="Arial" pitchFamily="34" charset="0"/>
+                <a:ea typeface="Arial" pitchFamily="34" charset="-122"/>
+                <a:cs typeface="Arial" pitchFamily="34" charset="-120"/>
+              </a:rPr>
+              <a:t>Kanäle und Schnittstellen</a:t>
+            </a:r>
+            <a:endParaRPr lang="en-US" sz="1600" dirty="0"/>
+          </a:p>
+        </p:txBody>
+      </p:sp>
+      <p:sp>
+        <p:nvSpPr>
+          <p:cNvPr id="21" name="Text 19"/>
+          <p:cNvSpPr txBox="1"/>
+          <p:nvPr/>
+        </p:nvSpPr>
+        <p:spPr>
+          <a:xfrm>
+            <a:off x="777240" y="4069080"/>
+            <a:ext cx="3063240" cy="868680"/>
+          </a:xfrm>
+          <a:prstGeom prst="rect">
+            <a:avLst/>
+          </a:prstGeom>
+          <a:noFill/>
+          <a:ln/>
+        </p:spPr>
+        <p:txBody>
+          <a:bodyPr wrap="square" lIns="0" tIns="0" rIns="0" bIns="0" rtlCol="0" anchor="t"/>
+          <a:lstStyle/>
+          <a:p>
+            <a:pPr indent="0" marL="0">
+              <a:lnSpc>
+                <a:spcPct val="110000"/>
+              </a:lnSpc>
+              <a:buNone/>
+            </a:pPr>
+            <a:r>
+              <a:rPr lang="en-US" sz="1250" dirty="0">
+                <a:solidFill>
+                  <a:srgbClr val="2C333B"/>
+                </a:solidFill>
+                <a:latin typeface="Arial" pitchFamily="34" charset="0"/>
+                <a:ea typeface="Arial" pitchFamily="34" charset="-122"/>
+                <a:cs typeface="Arial" pitchFamily="34" charset="-120"/>
+              </a:rPr>
+              <a:t>Geplante Exporte per SFTP oder Webhook, Shopware- und Shopify-Connectoren, Katalog-Widget, Offline-Katalog, REST-API.</a:t>
+            </a:r>
+            <a:endParaRPr lang="en-US" sz="1250" dirty="0"/>
+          </a:p>
+        </p:txBody>
+      </p:sp>
+      <p:sp>
+        <p:nvSpPr>
+          <p:cNvPr id="22" name="Shape 20"/>
+          <p:cNvSpPr/>
+          <p:nvPr/>
+        </p:nvSpPr>
+        <p:spPr>
+          <a:xfrm>
+            <a:off x="4335628" y="3429000"/>
+            <a:ext cx="3520440" cy="1600200"/>
+          </a:xfrm>
+          <a:prstGeom prst="rect">
+            <a:avLst/>
+          </a:prstGeom>
+          <a:solidFill>
+            <a:srgbClr val="FFFFFF"/>
+          </a:solidFill>
+          <a:ln w="12700">
+            <a:solidFill>
+              <a:srgbClr val="D6DDE3"/>
+            </a:solidFill>
+            <a:prstDash val="solid"/>
+          </a:ln>
+        </p:spPr>
+      </p:sp>
+      <p:sp>
+        <p:nvSpPr>
+          <p:cNvPr id="23" name="Shape 21"/>
+          <p:cNvSpPr/>
+          <p:nvPr/>
+        </p:nvSpPr>
+        <p:spPr>
+          <a:xfrm>
+            <a:off x="4564228" y="3685032"/>
+            <a:ext cx="182880" cy="182880"/>
+          </a:xfrm>
+          <a:prstGeom prst="rect">
+            <a:avLst/>
+          </a:prstGeom>
+          <a:solidFill>
+            <a:srgbClr val="1F9A8F"/>
+          </a:solidFill>
+          <a:ln w="12700">
+            <a:solidFill>
+              <a:srgbClr val="1F9A8F"/>
+            </a:solidFill>
+            <a:prstDash val="solid"/>
+          </a:ln>
+        </p:spPr>
+      </p:sp>
+      <p:sp>
+        <p:nvSpPr>
+          <p:cNvPr id="24" name="Text 22"/>
+          <p:cNvSpPr txBox="1"/>
+          <p:nvPr/>
+        </p:nvSpPr>
+        <p:spPr>
+          <a:xfrm>
+            <a:off x="4884268" y="3611880"/>
+            <a:ext cx="2788920" cy="365760"/>
+          </a:xfrm>
+          <a:prstGeom prst="rect">
+            <a:avLst/>
+          </a:prstGeom>
+          <a:noFill/>
+          <a:ln/>
+        </p:spPr>
+        <p:txBody>
+          <a:bodyPr wrap="square" lIns="0" tIns="0" rIns="0" bIns="0" rtlCol="0" anchor="t"/>
+          <a:lstStyle/>
+          <a:p>
+            <a:pPr indent="0" marL="0">
+              <a:buNone/>
+            </a:pPr>
+            <a:r>
+              <a:rPr lang="en-US" sz="1600" b="1" dirty="0">
+                <a:solidFill>
+                  <a:srgbClr val="16181D"/>
+                </a:solidFill>
+                <a:latin typeface="Arial" pitchFamily="34" charset="0"/>
+                <a:ea typeface="Arial" pitchFamily="34" charset="-122"/>
+                <a:cs typeface="Arial" pitchFamily="34" charset="-120"/>
+              </a:rPr>
+              <a:t>Suche und Datenqualität</a:t>
+            </a:r>
+            <a:endParaRPr lang="en-US" sz="1600" dirty="0"/>
+          </a:p>
+        </p:txBody>
+      </p:sp>
+      <p:sp>
+        <p:nvSpPr>
+          <p:cNvPr id="25" name="Text 23"/>
+          <p:cNvSpPr txBox="1"/>
+          <p:nvPr/>
+        </p:nvSpPr>
+        <p:spPr>
+          <a:xfrm>
+            <a:off x="4564228" y="4069080"/>
+            <a:ext cx="3063240" cy="868680"/>
+          </a:xfrm>
+          <a:prstGeom prst="rect">
+            <a:avLst/>
+          </a:prstGeom>
+          <a:noFill/>
+          <a:ln/>
+        </p:spPr>
+        <p:txBody>
+          <a:bodyPr wrap="square" lIns="0" tIns="0" rIns="0" bIns="0" rtlCol="0" anchor="t"/>
+          <a:lstStyle/>
+          <a:p>
+            <a:pPr indent="0" marL="0">
+              <a:lnSpc>
+                <a:spcPct val="110000"/>
+              </a:lnSpc>
+              <a:buNone/>
+            </a:pPr>
+            <a:r>
+              <a:rPr lang="en-US" sz="1250" dirty="0">
+                <a:solidFill>
+                  <a:srgbClr val="2C333B"/>
+                </a:solidFill>
+                <a:latin typeface="Arial" pitchFamily="34" charset="0"/>
+                <a:ea typeface="Arial" pitchFamily="34" charset="-122"/>
+                <a:cs typeface="Arial" pitchFamily="34" charset="-120"/>
+              </a:rPr>
+              <a:t>Fuzzy-Suche mit Kölner Phonetik, semantische Suche, Prüfprofile je Kanal, Workflow und zeitgesteuerte Versionen.</a:t>
+            </a:r>
+            <a:endParaRPr lang="en-US" sz="1250" dirty="0"/>
+          </a:p>
+        </p:txBody>
+      </p:sp>
+      <p:sp>
+        <p:nvSpPr>
+          <p:cNvPr id="26" name="Shape 24"/>
+          <p:cNvSpPr/>
+          <p:nvPr/>
+        </p:nvSpPr>
+        <p:spPr>
+          <a:xfrm>
+            <a:off x="8122615" y="3429000"/>
+            <a:ext cx="3520440" cy="1600200"/>
+          </a:xfrm>
+          <a:prstGeom prst="rect">
+            <a:avLst/>
+          </a:prstGeom>
+          <a:solidFill>
+            <a:srgbClr val="FFFFFF"/>
+          </a:solidFill>
+          <a:ln w="12700">
+            <a:solidFill>
+              <a:srgbClr val="D6DDE3"/>
+            </a:solidFill>
+            <a:prstDash val="solid"/>
+          </a:ln>
+        </p:spPr>
+      </p:sp>
+      <p:sp>
+        <p:nvSpPr>
+          <p:cNvPr id="27" name="Shape 25"/>
+          <p:cNvSpPr/>
+          <p:nvPr/>
+        </p:nvSpPr>
+        <p:spPr>
+          <a:xfrm>
+            <a:off x="8351215" y="3685032"/>
+            <a:ext cx="182880" cy="182880"/>
+          </a:xfrm>
+          <a:prstGeom prst="rect">
+            <a:avLst/>
+          </a:prstGeom>
+          <a:solidFill>
+            <a:srgbClr val="1F9A8F"/>
+          </a:solidFill>
+          <a:ln w="12700">
+            <a:solidFill>
+              <a:srgbClr val="1F9A8F"/>
+            </a:solidFill>
+            <a:prstDash val="solid"/>
+          </a:ln>
+        </p:spPr>
+      </p:sp>
+      <p:sp>
+        <p:nvSpPr>
+          <p:cNvPr id="28" name="Text 26"/>
+          <p:cNvSpPr txBox="1"/>
+          <p:nvPr/>
+        </p:nvSpPr>
+        <p:spPr>
+          <a:xfrm>
+            <a:off x="8671255" y="3611880"/>
+            <a:ext cx="2788920" cy="365760"/>
+          </a:xfrm>
+          <a:prstGeom prst="rect">
+            <a:avLst/>
+          </a:prstGeom>
+          <a:noFill/>
+          <a:ln/>
+        </p:spPr>
+        <p:txBody>
+          <a:bodyPr wrap="square" lIns="0" tIns="0" rIns="0" bIns="0" rtlCol="0" anchor="t"/>
+          <a:lstStyle/>
+          <a:p>
+            <a:pPr indent="0" marL="0">
+              <a:buNone/>
+            </a:pPr>
+            <a:r>
+              <a:rPr lang="en-US" sz="1600" b="1" dirty="0">
+                <a:solidFill>
+                  <a:srgbClr val="16181D"/>
+                </a:solidFill>
+                <a:latin typeface="Arial" pitchFamily="34" charset="0"/>
+                <a:ea typeface="Arial" pitchFamily="34" charset="-122"/>
+                <a:cs typeface="Arial" pitchFamily="34" charset="-120"/>
+              </a:rPr>
+              <a:t>Offen und KI-ready</a:t>
+            </a:r>
+            <a:endParaRPr lang="en-US" sz="1600" dirty="0"/>
+          </a:p>
+        </p:txBody>
+      </p:sp>
+      <p:sp>
+        <p:nvSpPr>
+          <p:cNvPr id="29" name="Text 27"/>
+          <p:cNvSpPr txBox="1"/>
+          <p:nvPr/>
+        </p:nvSpPr>
+        <p:spPr>
+          <a:xfrm>
+            <a:off x="8351215" y="4069080"/>
+            <a:ext cx="3063240" cy="868680"/>
+          </a:xfrm>
+          <a:prstGeom prst="rect">
+            <a:avLst/>
+          </a:prstGeom>
+          <a:noFill/>
+          <a:ln/>
+        </p:spPr>
+        <p:txBody>
+          <a:bodyPr wrap="square" lIns="0" tIns="0" rIns="0" bIns="0" rtlCol="0" anchor="t"/>
+          <a:lstStyle/>
+          <a:p>
+            <a:pPr indent="0" marL="0">
+              <a:lnSpc>
+                <a:spcPct val="110000"/>
+              </a:lnSpc>
+              <a:buNone/>
+            </a:pPr>
+            <a:r>
+              <a:rPr lang="en-US" sz="1250" dirty="0">
+                <a:solidFill>
+                  <a:srgbClr val="2C333B"/>
+                </a:solidFill>
+                <a:latin typeface="Arial" pitchFamily="34" charset="0"/>
+                <a:ea typeface="Arial" pitchFamily="34" charset="-122"/>
+                <a:cs typeface="Arial" pitchFamily="34" charset="-120"/>
+              </a:rPr>
+              <a:t>GPL-Kern, MCP-Schnittstelle für KI-Agenten, KI-Texte, DeepL und XLIFF; Dokumentation auf Deutsch und Englisch.</a:t>
+            </a:r>
+            <a:endParaRPr lang="en-US" sz="1250" dirty="0"/>
+          </a:p>
+        </p:txBody>
+      </p:sp>
+      <p:sp>
+        <p:nvSpPr>
+          <p:cNvPr id="30" name="Shape 28"/>
+          <p:cNvSpPr/>
+          <p:nvPr/>
+        </p:nvSpPr>
+        <p:spPr>
+          <a:xfrm>
+            <a:off x="548640" y="5303520"/>
+            <a:ext cx="11094415" cy="777240"/>
+          </a:xfrm>
+          <a:prstGeom prst="rect">
+            <a:avLst/>
+          </a:prstGeom>
+          <a:solidFill>
+            <a:srgbClr val="E4F3F1"/>
+          </a:solidFill>
+          <a:ln w="12700">
+            <a:solidFill>
+              <a:srgbClr val="E4F3F1"/>
+            </a:solidFill>
+            <a:prstDash val="solid"/>
+          </a:ln>
+        </p:spPr>
+      </p:sp>
+      <p:sp>
+        <p:nvSpPr>
+          <p:cNvPr id="31" name="Text 29"/>
+          <p:cNvSpPr txBox="1"/>
+          <p:nvPr/>
+        </p:nvSpPr>
+        <p:spPr>
+          <a:xfrm>
+            <a:off x="822960" y="5303520"/>
+            <a:ext cx="10545775" cy="777240"/>
+          </a:xfrm>
+          <a:prstGeom prst="rect">
+            <a:avLst/>
+          </a:prstGeom>
+          <a:noFill/>
+          <a:ln/>
+        </p:spPr>
+        <p:txBody>
+          <a:bodyPr wrap="square" lIns="0" tIns="0" rIns="0" bIns="0" rtlCol="0" anchor="ctr"/>
+          <a:lstStyle/>
+          <a:p>
+            <a:pPr indent="0" marL="0">
+              <a:buNone/>
+            </a:pPr>
+            <a:r>
+              <a:rPr lang="en-US" sz="1400" b="1" dirty="0">
+                <a:solidFill>
+                  <a:srgbClr val="000E2F"/>
+                </a:solidFill>
+                <a:latin typeface="Arial" pitchFamily="34" charset="0"/>
+                <a:ea typeface="Arial" pitchFamily="34" charset="-122"/>
+                <a:cs typeface="Arial" pitchFamily="34" charset="-120"/>
+              </a:rPr>
+              <a:t>Besonders stark, wenn </a:t>
+            </a:r>
+            <a:pPr indent="0" marL="0">
+              <a:buNone/>
+            </a:pPr>
+            <a:r>
+              <a:rPr lang="en-US" sz="1400" dirty="0">
+                <a:solidFill>
+                  <a:srgbClr val="000E2F"/>
+                </a:solidFill>
+                <a:latin typeface="Arial" pitchFamily="34" charset="0"/>
+                <a:ea typeface="Arial" pitchFamily="34" charset="-122"/>
+                <a:cs typeface="Arial" pitchFamily="34" charset="-120"/>
+              </a:rPr>
+              <a:t>Produkt- und Titeldaten schlank gepflegt und in viele Kanäle – einschließlich Print – ausgespielt werden sollen.</a:t>
+            </a:r>
+            <a:endParaRPr lang="en-US" sz="1400" dirty="0"/>
+          </a:p>
+        </p:txBody>
+      </p:sp>
+    </p:spTree>
+  </p:cSld>
+  <p:clrMapOvr>
+    <a:masterClrMapping/>
+  </p:clrMapOvr>
+</p:sld>
+</file>
+
+<file path=ppt/slides/slide5.xml><?xml version="1.0" encoding="utf-8"?>
+<p:sld xmlns:a="http://schemas.openxmlformats.org/drawingml/2006/main" xmlns:r="http://schemas.openxmlformats.org/officeDocument/2006/relationships" xmlns:p="http://schemas.openxmlformats.org/presentationml/2006/main">
+  <p:cSld name="Slide 5">
+    <p:bg>
+      <p:bgPr>
+        <a:solidFill>
+          <a:srgbClr val="FFFFFF"/>
+        </a:solidFill>
+      </p:bgPr>
+    </p:bg>
+    <p:spTree>
+      <p:nvGrpSpPr>
+        <p:cNvPr id="1" name=""/>
+        <p:cNvGrpSpPr/>
+        <p:nvPr/>
+      </p:nvGrpSpPr>
+      <p:grpSpPr>
+        <a:xfrm>
+          <a:off x="0" y="0"/>
+          <a:ext cx="0" cy="0"/>
+          <a:chOff x="0" y="0"/>
+          <a:chExt cx="0" cy="0"/>
+        </a:xfrm>
+      </p:grpSpPr>
+      <p:sp>
+        <p:nvSpPr>
+          <p:cNvPr id="2" name="Text 0"/>
+          <p:cNvSpPr txBox="1"/>
+          <p:nvPr/>
+        </p:nvSpPr>
+        <p:spPr>
+          <a:xfrm>
+            <a:off x="548640" y="411480"/>
+            <a:ext cx="11094415" cy="594360"/>
+          </a:xfrm>
+          <a:prstGeom prst="rect">
+            <a:avLst/>
+          </a:prstGeom>
+          <a:noFill/>
+          <a:ln/>
+        </p:spPr>
+        <p:txBody>
+          <a:bodyPr wrap="square" lIns="0" tIns="0" rIns="0" bIns="0" rtlCol="0" anchor="b"/>
+          <a:lstStyle/>
+          <a:p>
+            <a:pPr indent="0" marL="0">
+              <a:buNone/>
+            </a:pPr>
+            <a:r>
+              <a:rPr lang="en-US" sz="3000" dirty="0">
+                <a:solidFill>
+                  <a:srgbClr val="16181D"/>
+                </a:solidFill>
+                <a:latin typeface="Arial" pitchFamily="34" charset="0"/>
+                <a:ea typeface="Arial" pitchFamily="34" charset="-122"/>
+                <a:cs typeface="Arial" pitchFamily="34" charset="-120"/>
+              </a:rPr>
               <a:t>BEWERTUNGSRAHMEN</a:t>
             </a:r>
             <a:endParaRPr lang="en-US" sz="3000" dirty="0"/>
@@ -8388,7 +13072,7 @@
                 <a:ea typeface="Arial" pitchFamily="34" charset="-122"/>
                 <a:cs typeface="Arial" pitchFamily="34" charset="-120"/>
               </a:rPr>
-              <a:t>3</a:t>
+              <a:t>5</a:t>
             </a:r>
             <a:endParaRPr lang="en-US" sz="900" dirty="0"/>
           </a:p>
@@ -9149,9 +13833,9 @@
 </p:sld>
 </file>
 
-<file path=ppt/slides/slide4.xml><?xml version="1.0" encoding="utf-8"?>
+<file path=ppt/slides/slide6.xml><?xml version="1.0" encoding="utf-8"?>
 <p:sld xmlns:a="http://schemas.openxmlformats.org/drawingml/2006/main" xmlns:r="http://schemas.openxmlformats.org/officeDocument/2006/relationships" xmlns:p="http://schemas.openxmlformats.org/presentationml/2006/main">
-  <p:cSld name="Slide 4">
+  <p:cSld name="Slide 6">
     <p:bg>
       <p:bgPr>
         <a:solidFill>
@@ -9323,7 +14007,7 @@
                 <a:ea typeface="Arial" pitchFamily="34" charset="-122"/>
                 <a:cs typeface="Arial" pitchFamily="34" charset="-120"/>
               </a:rPr>
-              <a:t>4</a:t>
+              <a:t>6</a:t>
             </a:r>
             <a:endParaRPr lang="en-US" sz="900" dirty="0"/>
           </a:p>
@@ -9331,7 +14015,7 @@
       </p:sp>
       <p:graphicFrame>
         <p:nvGraphicFramePr>
-          <p:cNvPr id="5" name="Table 0"/>
+          <p:cNvPr id="7" name="Table 0"/>
           <p:cNvGraphicFramePr>
             <a:graphicFrameLocks noGrp="1"/>
           </p:cNvGraphicFramePr>
@@ -11091,9 +15775,9 @@
 </p:sld>
 </file>
 
-<file path=ppt/slides/slide5.xml><?xml version="1.0" encoding="utf-8"?>
+<file path=ppt/slides/slide7.xml><?xml version="1.0" encoding="utf-8"?>
 <p:sld xmlns:a="http://schemas.openxmlformats.org/drawingml/2006/main" xmlns:r="http://schemas.openxmlformats.org/officeDocument/2006/relationships" xmlns:p="http://schemas.openxmlformats.org/presentationml/2006/main">
-  <p:cSld name="Slide 5">
+  <p:cSld name="Slide 7">
     <p:bg>
       <p:bgPr>
         <a:solidFill>
@@ -11265,7 +15949,7 @@
                 <a:ea typeface="Arial" pitchFamily="34" charset="-122"/>
                 <a:cs typeface="Arial" pitchFamily="34" charset="-120"/>
               </a:rPr>
-              <a:t>5</a:t>
+              <a:t>7</a:t>
             </a:r>
             <a:endParaRPr lang="en-US" sz="900" dirty="0"/>
           </a:p>
@@ -11273,7 +15957,7 @@
       </p:sp>
       <p:graphicFrame>
         <p:nvGraphicFramePr>
-          <p:cNvPr id="6" name="Table 0"/>
+          <p:cNvPr id="8" name="Table 0"/>
           <p:cNvGraphicFramePr>
             <a:graphicFrameLocks noGrp="1"/>
           </p:cNvGraphicFramePr>
@@ -13033,9 +17717,9 @@
 </p:sld>
 </file>
 
-<file path=ppt/slides/slide6.xml><?xml version="1.0" encoding="utf-8"?>
+<file path=ppt/slides/slide8.xml><?xml version="1.0" encoding="utf-8"?>
 <p:sld xmlns:a="http://schemas.openxmlformats.org/drawingml/2006/main" xmlns:r="http://schemas.openxmlformats.org/officeDocument/2006/relationships" xmlns:p="http://schemas.openxmlformats.org/presentationml/2006/main">
-  <p:cSld name="Slide 6">
+  <p:cSld name="Slide 8">
     <p:bg>
       <p:bgPr>
         <a:solidFill>
@@ -13207,7 +17891,7 @@
                 <a:ea typeface="Arial" pitchFamily="34" charset="-122"/>
                 <a:cs typeface="Arial" pitchFamily="34" charset="-120"/>
               </a:rPr>
-              <a:t>6</a:t>
+              <a:t>8</a:t>
             </a:r>
             <a:endParaRPr lang="en-US" sz="900" dirty="0"/>
           </a:p>
@@ -13558,9 +18242,9 @@
 </p:sld>
 </file>
 
-<file path=ppt/slides/slide7.xml><?xml version="1.0" encoding="utf-8"?>
+<file path=ppt/slides/slide9.xml><?xml version="1.0" encoding="utf-8"?>
 <p:sld xmlns:a="http://schemas.openxmlformats.org/drawingml/2006/main" xmlns:r="http://schemas.openxmlformats.org/officeDocument/2006/relationships" xmlns:p="http://schemas.openxmlformats.org/presentationml/2006/main">
-  <p:cSld name="Slide 7">
+  <p:cSld name="Slide 9">
     <p:bg>
       <p:bgPr>
         <a:solidFill>
@@ -13732,7 +18416,7 @@
                 <a:ea typeface="Arial" pitchFamily="34" charset="-122"/>
                 <a:cs typeface="Arial" pitchFamily="34" charset="-120"/>
               </a:rPr>
-              <a:t>7</a:t>
+              <a:t>9</a:t>
             </a:r>
             <a:endParaRPr lang="en-US" sz="900" dirty="0"/>
           </a:p>
@@ -14364,2408 +19048,6 @@
               <a:t>Wunsch nach einem schlanken, gut beherrschbaren Betrieb</a:t>
             </a:r>
             <a:endParaRPr lang="en-US" sz="1300" dirty="0"/>
-          </a:p>
-        </p:txBody>
-      </p:sp>
-    </p:spTree>
-  </p:cSld>
-  <p:clrMapOvr>
-    <a:masterClrMapping/>
-  </p:clrMapOvr>
-</p:sld>
-</file>
-
-<file path=ppt/slides/slide8.xml><?xml version="1.0" encoding="utf-8"?>
-<p:sld xmlns:a="http://schemas.openxmlformats.org/drawingml/2006/main" xmlns:r="http://schemas.openxmlformats.org/officeDocument/2006/relationships" xmlns:p="http://schemas.openxmlformats.org/presentationml/2006/main">
-  <p:cSld name="Slide 8">
-    <p:bg>
-      <p:bgPr>
-        <a:solidFill>
-          <a:srgbClr val="FFFFFF"/>
-        </a:solidFill>
-      </p:bgPr>
-    </p:bg>
-    <p:spTree>
-      <p:nvGrpSpPr>
-        <p:cNvPr id="1" name=""/>
-        <p:cNvGrpSpPr/>
-        <p:nvPr/>
-      </p:nvGrpSpPr>
-      <p:grpSpPr>
-        <a:xfrm>
-          <a:off x="0" y="0"/>
-          <a:ext cx="0" cy="0"/>
-          <a:chOff x="0" y="0"/>
-          <a:chExt cx="0" cy="0"/>
-        </a:xfrm>
-      </p:grpSpPr>
-      <p:sp>
-        <p:nvSpPr>
-          <p:cNvPr id="2" name="Text 0"/>
-          <p:cNvSpPr txBox="1"/>
-          <p:nvPr/>
-        </p:nvSpPr>
-        <p:spPr>
-          <a:xfrm>
-            <a:off x="548640" y="411480"/>
-            <a:ext cx="11094415" cy="594360"/>
-          </a:xfrm>
-          <a:prstGeom prst="rect">
-            <a:avLst/>
-          </a:prstGeom>
-          <a:noFill/>
-          <a:ln/>
-        </p:spPr>
-        <p:txBody>
-          <a:bodyPr wrap="square" lIns="0" tIns="0" rIns="0" bIns="0" rtlCol="0" anchor="b"/>
-          <a:lstStyle/>
-          <a:p>
-            <a:pPr indent="0" marL="0">
-              <a:buNone/>
-            </a:pPr>
-            <a:r>
-              <a:rPr lang="en-US" sz="3000" dirty="0">
-                <a:solidFill>
-                  <a:srgbClr val="16181D"/>
-                </a:solidFill>
-                <a:latin typeface="Arial" pitchFamily="34" charset="0"/>
-                <a:ea typeface="Arial" pitchFamily="34" charset="-122"/>
-                <a:cs typeface="Arial" pitchFamily="34" charset="-120"/>
-              </a:rPr>
-              <a:t>RISIKEN MIT KOSTENWIRKUNG</a:t>
-            </a:r>
-            <a:endParaRPr lang="en-US" sz="3000" dirty="0"/>
-          </a:p>
-        </p:txBody>
-      </p:sp>
-      <p:sp>
-        <p:nvSpPr>
-          <p:cNvPr id="3" name="Text 1"/>
-          <p:cNvSpPr txBox="1"/>
-          <p:nvPr/>
-        </p:nvSpPr>
-        <p:spPr>
-          <a:xfrm>
-            <a:off x="548640" y="1033272"/>
-            <a:ext cx="11094415" cy="365760"/>
-          </a:xfrm>
-          <a:prstGeom prst="rect">
-            <a:avLst/>
-          </a:prstGeom>
-          <a:noFill/>
-          <a:ln/>
-        </p:spPr>
-        <p:txBody>
-          <a:bodyPr wrap="square" lIns="0" tIns="0" rIns="0" bIns="0" rtlCol="0" anchor="t"/>
-          <a:lstStyle/>
-          <a:p>
-            <a:pPr indent="0" marL="0">
-              <a:buNone/>
-            </a:pPr>
-            <a:r>
-              <a:rPr lang="en-US" sz="1400" dirty="0">
-                <a:solidFill>
-                  <a:srgbClr val="4B5563"/>
-                </a:solidFill>
-                <a:latin typeface="Arial" pitchFamily="34" charset="0"/>
-                <a:ea typeface="Arial" pitchFamily="34" charset="-122"/>
-                <a:cs typeface="Arial" pitchFamily="34" charset="-120"/>
-              </a:rPr>
-              <a:t>Beide Optionen haben Risiken – entscheidend ist, wie gut sie sich begrenzen lassen.</a:t>
-            </a:r>
-            <a:endParaRPr lang="en-US" sz="1400" dirty="0"/>
-          </a:p>
-        </p:txBody>
-      </p:sp>
-      <p:sp>
-        <p:nvSpPr>
-          <p:cNvPr id="4" name="Text 2"/>
-          <p:cNvSpPr txBox="1"/>
-          <p:nvPr/>
-        </p:nvSpPr>
-        <p:spPr>
-          <a:xfrm>
-            <a:off x="548640" y="6400800"/>
-            <a:ext cx="7315200" cy="228600"/>
-          </a:xfrm>
-          <a:prstGeom prst="rect">
-            <a:avLst/>
-          </a:prstGeom>
-          <a:noFill/>
-          <a:ln/>
-        </p:spPr>
-        <p:txBody>
-          <a:bodyPr wrap="square" lIns="0" tIns="0" rIns="0" bIns="0" rtlCol="0" anchor="t"/>
-          <a:lstStyle/>
-          <a:p>
-            <a:pPr indent="0" marL="0">
-              <a:buNone/>
-            </a:pPr>
-            <a:r>
-              <a:rPr lang="en-US" sz="900" dirty="0">
-                <a:solidFill>
-                  <a:srgbClr val="4B5563"/>
-                </a:solidFill>
-                <a:latin typeface="Arial" pitchFamily="34" charset="0"/>
-                <a:ea typeface="Arial" pitchFamily="34" charset="-122"/>
-                <a:cs typeface="Arial" pitchFamily="34" charset="-120"/>
-              </a:rPr>
-              <a:t>PIM-Kostenbetrachtung Kohlhammer  ·  Entscheidungsgrundlage  ·  September 2026</a:t>
-            </a:r>
-            <a:endParaRPr lang="en-US" sz="900" dirty="0"/>
-          </a:p>
-        </p:txBody>
-      </p:sp>
-      <p:sp>
-        <p:nvSpPr>
-          <p:cNvPr id="5" name="Text 3"/>
-          <p:cNvSpPr txBox="1"/>
-          <p:nvPr/>
-        </p:nvSpPr>
-        <p:spPr>
-          <a:xfrm>
-            <a:off x="10728655" y="6400800"/>
-            <a:ext cx="914400" cy="228600"/>
-          </a:xfrm>
-          <a:prstGeom prst="rect">
-            <a:avLst/>
-          </a:prstGeom>
-          <a:noFill/>
-          <a:ln/>
-        </p:spPr>
-        <p:txBody>
-          <a:bodyPr wrap="square" lIns="0" tIns="0" rIns="0" bIns="0" rtlCol="0" anchor="t"/>
-          <a:lstStyle/>
-          <a:p>
-            <a:pPr algn="r" indent="0" marL="0">
-              <a:buNone/>
-            </a:pPr>
-            <a:r>
-              <a:rPr lang="en-US" sz="900" dirty="0">
-                <a:solidFill>
-                  <a:srgbClr val="4B5563"/>
-                </a:solidFill>
-                <a:latin typeface="Arial" pitchFamily="34" charset="0"/>
-                <a:ea typeface="Arial" pitchFamily="34" charset="-122"/>
-                <a:cs typeface="Arial" pitchFamily="34" charset="-120"/>
-              </a:rPr>
-              <a:t>8</a:t>
-            </a:r>
-            <a:endParaRPr lang="en-US" sz="900" dirty="0"/>
-          </a:p>
-        </p:txBody>
-      </p:sp>
-      <p:graphicFrame>
-        <p:nvGraphicFramePr>
-          <p:cNvPr id="9" name="Table 0"/>
-          <p:cNvGraphicFramePr>
-            <a:graphicFrameLocks noGrp="1"/>
-          </p:cNvGraphicFramePr>
-          <p:nvPr>
-            <p:extLst>
-              <p:ext uri="{D42A27DB-BD31-4B8C-83A1-F6EECF244321}">
-                <p14:modId xmlns:p14="http://schemas.microsoft.com/office/powerpoint/2010/main" val="1579011935"/>
-              </p:ext>
-            </p:extLst>
-          </p:nvPr>
-        </p:nvGraphicFramePr>
-        <p:xfrm>
-          <a:off x="548640" y="1600200"/>
-          <a:ext cx="11094415" cy="914400"/>
-        </p:xfrm>
-        <a:graphic>
-          <a:graphicData uri="http://schemas.openxmlformats.org/drawingml/2006/table">
-            <a:tbl>
-              <a:tblPr/>
-              <a:tblGrid>
-                <a:gridCol w="2286000"/>
-                <a:gridCol w="4389120"/>
-                <a:gridCol w="4416552"/>
-              </a:tblGrid>
-              <a:tr h="384048">
-                <a:tc>
-                  <a:txBody>
-                    <a:bodyPr/>
-                    <a:lstStyle/>
-                    <a:p>
-                      <a:pPr indent="0" marL="0">
-                        <a:buNone/>
-                      </a:pPr>
-                      <a:r>
-                        <a:rPr lang="en-US" sz="1250" dirty="0">
-                          <a:solidFill>
-                            <a:srgbClr val="FFFFFF"/>
-                          </a:solidFill>
-                          <a:latin typeface="Arial" pitchFamily="34" charset="0"/>
-                          <a:ea typeface="Arial" pitchFamily="34" charset="-122"/>
-                          <a:cs typeface="Arial" pitchFamily="34" charset="-120"/>
-                        </a:rPr>
-                        <a:t>Risiko</a:t>
-                      </a:r>
-                      <a:endParaRPr lang="en-US" sz="1250" dirty="0">
-                        <a:latin typeface="Arial" charset="0"/>
-                        <a:ea typeface="Arial" charset="0"/>
-                        <a:cs typeface="Arial" charset="0"/>
-                      </a:endParaRPr>
-                    </a:p>
-                  </a:txBody>
-                  <a:tcPr marL="109728" marR="109728" marT="64008" marB="64008" anchor="ctr">
-                    <a:lnL w="9525" cap="flat" cmpd="sng" algn="ctr">
-                      <a:solidFill>
-                        <a:srgbClr val="D6DDE3"/>
-                      </a:solidFill>
-                      <a:prstDash val="solid"/>
-                      <a:round/>
-                      <a:headEnd type="none" w="med" len="med"/>
-                      <a:tailEnd type="none" w="med" len="med"/>
-                    </a:lnL>
-                    <a:lnR w="9525" cap="flat" cmpd="sng" algn="ctr">
-                      <a:solidFill>
-                        <a:srgbClr val="D6DDE3"/>
-                      </a:solidFill>
-                      <a:prstDash val="solid"/>
-                      <a:round/>
-                      <a:headEnd type="none" w="med" len="med"/>
-                      <a:tailEnd type="none" w="med" len="med"/>
-                    </a:lnR>
-                    <a:lnT w="9525" cap="flat" cmpd="sng" algn="ctr">
-                      <a:solidFill>
-                        <a:srgbClr val="D6DDE3"/>
-                      </a:solidFill>
-                      <a:prstDash val="solid"/>
-                      <a:round/>
-                      <a:headEnd type="none" w="med" len="med"/>
-                      <a:tailEnd type="none" w="med" len="med"/>
-                    </a:lnT>
-                    <a:lnB w="9525" cap="flat" cmpd="sng" algn="ctr">
-                      <a:solidFill>
-                        <a:srgbClr val="D6DDE3"/>
-                      </a:solidFill>
-                      <a:prstDash val="solid"/>
-                      <a:round/>
-                      <a:headEnd type="none" w="med" len="med"/>
-                      <a:tailEnd type="none" w="med" len="med"/>
-                    </a:lnB>
-                    <a:solidFill>
-                      <a:srgbClr val="000E2F"/>
-                    </a:solidFill>
-                  </a:tcPr>
-                </a:tc>
-                <a:tc>
-                  <a:txBody>
-                    <a:bodyPr/>
-                    <a:lstStyle/>
-                    <a:p>
-                      <a:pPr indent="0" marL="0">
-                        <a:buNone/>
-                      </a:pPr>
-                      <a:r>
-                        <a:rPr lang="en-US" sz="1250" dirty="0">
-                          <a:solidFill>
-                            <a:srgbClr val="FFFFFF"/>
-                          </a:solidFill>
-                          <a:latin typeface="Arial" pitchFamily="34" charset="0"/>
-                          <a:ea typeface="Arial" pitchFamily="34" charset="-122"/>
-                          <a:cs typeface="Arial" pitchFamily="34" charset="-120"/>
-                        </a:rPr>
-                        <a:t>Pimcore-Upgrade</a:t>
-                      </a:r>
-                      <a:endParaRPr lang="en-US" sz="1250" dirty="0">
-                        <a:latin typeface="Arial" charset="0"/>
-                        <a:ea typeface="Arial" charset="0"/>
-                        <a:cs typeface="Arial" charset="0"/>
-                      </a:endParaRPr>
-                    </a:p>
-                  </a:txBody>
-                  <a:tcPr marL="109728" marR="109728" marT="64008" marB="64008" anchor="ctr">
-                    <a:lnL w="9525" cap="flat" cmpd="sng" algn="ctr">
-                      <a:solidFill>
-                        <a:srgbClr val="D6DDE3"/>
-                      </a:solidFill>
-                      <a:prstDash val="solid"/>
-                      <a:round/>
-                      <a:headEnd type="none" w="med" len="med"/>
-                      <a:tailEnd type="none" w="med" len="med"/>
-                    </a:lnL>
-                    <a:lnR w="9525" cap="flat" cmpd="sng" algn="ctr">
-                      <a:solidFill>
-                        <a:srgbClr val="D6DDE3"/>
-                      </a:solidFill>
-                      <a:prstDash val="solid"/>
-                      <a:round/>
-                      <a:headEnd type="none" w="med" len="med"/>
-                      <a:tailEnd type="none" w="med" len="med"/>
-                    </a:lnR>
-                    <a:lnT w="9525" cap="flat" cmpd="sng" algn="ctr">
-                      <a:solidFill>
-                        <a:srgbClr val="D6DDE3"/>
-                      </a:solidFill>
-                      <a:prstDash val="solid"/>
-                      <a:round/>
-                      <a:headEnd type="none" w="med" len="med"/>
-                      <a:tailEnd type="none" w="med" len="med"/>
-                    </a:lnT>
-                    <a:lnB w="9525" cap="flat" cmpd="sng" algn="ctr">
-                      <a:solidFill>
-                        <a:srgbClr val="D6DDE3"/>
-                      </a:solidFill>
-                      <a:prstDash val="solid"/>
-                      <a:round/>
-                      <a:headEnd type="none" w="med" len="med"/>
-                      <a:tailEnd type="none" w="med" len="med"/>
-                    </a:lnB>
-                    <a:solidFill>
-                      <a:srgbClr val="000E2F"/>
-                    </a:solidFill>
-                  </a:tcPr>
-                </a:tc>
-                <a:tc>
-                  <a:txBody>
-                    <a:bodyPr/>
-                    <a:lstStyle/>
-                    <a:p>
-                      <a:pPr indent="0" marL="0">
-                        <a:buNone/>
-                      </a:pPr>
-                      <a:r>
-                        <a:rPr lang="en-US" sz="1250" dirty="0">
-                          <a:solidFill>
-                            <a:srgbClr val="FFFFFF"/>
-                          </a:solidFill>
-                          <a:latin typeface="Arial" pitchFamily="34" charset="0"/>
-                          <a:ea typeface="Arial" pitchFamily="34" charset="-122"/>
-                          <a:cs typeface="Arial" pitchFamily="34" charset="-120"/>
-                        </a:rPr>
-                        <a:t>anyPIM</a:t>
-                      </a:r>
-                      <a:endParaRPr lang="en-US" sz="1250" dirty="0">
-                        <a:latin typeface="Arial" charset="0"/>
-                        <a:ea typeface="Arial" charset="0"/>
-                        <a:cs typeface="Arial" charset="0"/>
-                      </a:endParaRPr>
-                    </a:p>
-                  </a:txBody>
-                  <a:tcPr marL="109728" marR="109728" marT="64008" marB="64008" anchor="ctr">
-                    <a:lnL w="9525" cap="flat" cmpd="sng" algn="ctr">
-                      <a:solidFill>
-                        <a:srgbClr val="D6DDE3"/>
-                      </a:solidFill>
-                      <a:prstDash val="solid"/>
-                      <a:round/>
-                      <a:headEnd type="none" w="med" len="med"/>
-                      <a:tailEnd type="none" w="med" len="med"/>
-                    </a:lnL>
-                    <a:lnR w="9525" cap="flat" cmpd="sng" algn="ctr">
-                      <a:solidFill>
-                        <a:srgbClr val="D6DDE3"/>
-                      </a:solidFill>
-                      <a:prstDash val="solid"/>
-                      <a:round/>
-                      <a:headEnd type="none" w="med" len="med"/>
-                      <a:tailEnd type="none" w="med" len="med"/>
-                    </a:lnR>
-                    <a:lnT w="9525" cap="flat" cmpd="sng" algn="ctr">
-                      <a:solidFill>
-                        <a:srgbClr val="D6DDE3"/>
-                      </a:solidFill>
-                      <a:prstDash val="solid"/>
-                      <a:round/>
-                      <a:headEnd type="none" w="med" len="med"/>
-                      <a:tailEnd type="none" w="med" len="med"/>
-                    </a:lnT>
-                    <a:lnB w="9525" cap="flat" cmpd="sng" algn="ctr">
-                      <a:solidFill>
-                        <a:srgbClr val="D6DDE3"/>
-                      </a:solidFill>
-                      <a:prstDash val="solid"/>
-                      <a:round/>
-                      <a:headEnd type="none" w="med" len="med"/>
-                      <a:tailEnd type="none" w="med" len="med"/>
-                    </a:lnB>
-                    <a:solidFill>
-                      <a:srgbClr val="000E2F"/>
-                    </a:solidFill>
-                  </a:tcPr>
-                </a:tc>
-              </a:tr>
-              <a:tr h="658368">
-                <a:tc>
-                  <a:txBody>
-                    <a:bodyPr/>
-                    <a:lstStyle/>
-                    <a:p>
-                      <a:pPr indent="0" marL="0">
-                        <a:buNone/>
-                      </a:pPr>
-                      <a:r>
-                        <a:rPr lang="en-US" sz="1250" b="1" dirty="0">
-                          <a:solidFill>
-                            <a:srgbClr val="16181D"/>
-                          </a:solidFill>
-                          <a:latin typeface="Arial" pitchFamily="34" charset="0"/>
-                          <a:ea typeface="Arial" pitchFamily="34" charset="-122"/>
-                          <a:cs typeface="Arial" pitchFamily="34" charset="-120"/>
-                        </a:rPr>
-                        <a:t>Lizenzmodell</a:t>
-                      </a:r>
-                      <a:endParaRPr lang="en-US" sz="1250" dirty="0">
-                        <a:latin typeface="Arial" charset="0"/>
-                        <a:ea typeface="Arial" charset="0"/>
-                        <a:cs typeface="Arial" charset="0"/>
-                      </a:endParaRPr>
-                    </a:p>
-                  </a:txBody>
-                  <a:tcPr marL="109728" marR="109728" marT="64008" marB="64008" anchor="ctr">
-                    <a:lnL w="9525" cap="flat" cmpd="sng" algn="ctr">
-                      <a:solidFill>
-                        <a:srgbClr val="D6DDE3"/>
-                      </a:solidFill>
-                      <a:prstDash val="solid"/>
-                      <a:round/>
-                      <a:headEnd type="none" w="med" len="med"/>
-                      <a:tailEnd type="none" w="med" len="med"/>
-                    </a:lnL>
-                    <a:lnR w="9525" cap="flat" cmpd="sng" algn="ctr">
-                      <a:solidFill>
-                        <a:srgbClr val="D6DDE3"/>
-                      </a:solidFill>
-                      <a:prstDash val="solid"/>
-                      <a:round/>
-                      <a:headEnd type="none" w="med" len="med"/>
-                      <a:tailEnd type="none" w="med" len="med"/>
-                    </a:lnR>
-                    <a:lnT w="9525" cap="flat" cmpd="sng" algn="ctr">
-                      <a:solidFill>
-                        <a:srgbClr val="D6DDE3"/>
-                      </a:solidFill>
-                      <a:prstDash val="solid"/>
-                      <a:round/>
-                      <a:headEnd type="none" w="med" len="med"/>
-                      <a:tailEnd type="none" w="med" len="med"/>
-                    </a:lnT>
-                    <a:lnB w="9525" cap="flat" cmpd="sng" algn="ctr">
-                      <a:solidFill>
-                        <a:srgbClr val="D6DDE3"/>
-                      </a:solidFill>
-                      <a:prstDash val="solid"/>
-                      <a:round/>
-                      <a:headEnd type="none" w="med" len="med"/>
-                      <a:tailEnd type="none" w="med" len="med"/>
-                    </a:lnB>
-                    <a:solidFill>
-                      <a:srgbClr val="FFFFFF"/>
-                    </a:solidFill>
-                  </a:tcPr>
-                </a:tc>
-                <a:tc>
-                  <a:txBody>
-                    <a:bodyPr/>
-                    <a:lstStyle/>
-                    <a:p>
-                      <a:pPr indent="0" marL="0">
-                        <a:buNone/>
-                      </a:pPr>
-                      <a:r>
-                        <a:rPr lang="en-US" sz="1250" dirty="0">
-                          <a:solidFill>
-                            <a:srgbClr val="16181D"/>
-                          </a:solidFill>
-                          <a:latin typeface="Arial" pitchFamily="34" charset="0"/>
-                          <a:ea typeface="Arial" pitchFamily="34" charset="-122"/>
-                          <a:cs typeface="Arial" pitchFamily="34" charset="-120"/>
-                        </a:rPr>
-                        <a:t>Lizenzbedingungen liegen beim Hersteller; 2025 bereits einmal grundlegend geändert</a:t>
-                      </a:r>
-                      <a:endParaRPr lang="en-US" sz="1250" dirty="0">
-                        <a:latin typeface="Arial" charset="0"/>
-                        <a:ea typeface="Arial" charset="0"/>
-                        <a:cs typeface="Arial" charset="0"/>
-                      </a:endParaRPr>
-                    </a:p>
-                  </a:txBody>
-                  <a:tcPr marL="109728" marR="109728" marT="64008" marB="64008" anchor="ctr">
-                    <a:lnL w="9525" cap="flat" cmpd="sng" algn="ctr">
-                      <a:solidFill>
-                        <a:srgbClr val="D6DDE3"/>
-                      </a:solidFill>
-                      <a:prstDash val="solid"/>
-                      <a:round/>
-                      <a:headEnd type="none" w="med" len="med"/>
-                      <a:tailEnd type="none" w="med" len="med"/>
-                    </a:lnL>
-                    <a:lnR w="9525" cap="flat" cmpd="sng" algn="ctr">
-                      <a:solidFill>
-                        <a:srgbClr val="D6DDE3"/>
-                      </a:solidFill>
-                      <a:prstDash val="solid"/>
-                      <a:round/>
-                      <a:headEnd type="none" w="med" len="med"/>
-                      <a:tailEnd type="none" w="med" len="med"/>
-                    </a:lnR>
-                    <a:lnT w="9525" cap="flat" cmpd="sng" algn="ctr">
-                      <a:solidFill>
-                        <a:srgbClr val="D6DDE3"/>
-                      </a:solidFill>
-                      <a:prstDash val="solid"/>
-                      <a:round/>
-                      <a:headEnd type="none" w="med" len="med"/>
-                      <a:tailEnd type="none" w="med" len="med"/>
-                    </a:lnT>
-                    <a:lnB w="9525" cap="flat" cmpd="sng" algn="ctr">
-                      <a:solidFill>
-                        <a:srgbClr val="D6DDE3"/>
-                      </a:solidFill>
-                      <a:prstDash val="solid"/>
-                      <a:round/>
-                      <a:headEnd type="none" w="med" len="med"/>
-                      <a:tailEnd type="none" w="med" len="med"/>
-                    </a:lnB>
-                    <a:solidFill>
-                      <a:srgbClr val="FFFFFF"/>
-                    </a:solidFill>
-                  </a:tcPr>
-                </a:tc>
-                <a:tc>
-                  <a:txBody>
-                    <a:bodyPr/>
-                    <a:lstStyle/>
-                    <a:p>
-                      <a:pPr indent="0" marL="0">
-                        <a:buNone/>
-                      </a:pPr>
-                      <a:r>
-                        <a:rPr lang="en-US" sz="1250" dirty="0">
-                          <a:solidFill>
-                            <a:srgbClr val="16181D"/>
-                          </a:solidFill>
-                          <a:latin typeface="Arial" pitchFamily="34" charset="0"/>
-                          <a:ea typeface="Arial" pitchFamily="34" charset="-122"/>
-                          <a:cs typeface="Arial" pitchFamily="34" charset="-120"/>
-                        </a:rPr>
-                        <a:t>GPL-Kern; nur genutzte Module lizenziert</a:t>
-                      </a:r>
-                      <a:endParaRPr lang="en-US" sz="1250" dirty="0">
-                        <a:latin typeface="Arial" charset="0"/>
-                        <a:ea typeface="Arial" charset="0"/>
-                        <a:cs typeface="Arial" charset="0"/>
-                      </a:endParaRPr>
-                    </a:p>
-                  </a:txBody>
-                  <a:tcPr marL="109728" marR="109728" marT="64008" marB="64008" anchor="ctr">
-                    <a:lnL w="9525" cap="flat" cmpd="sng" algn="ctr">
-                      <a:solidFill>
-                        <a:srgbClr val="D6DDE3"/>
-                      </a:solidFill>
-                      <a:prstDash val="solid"/>
-                      <a:round/>
-                      <a:headEnd type="none" w="med" len="med"/>
-                      <a:tailEnd type="none" w="med" len="med"/>
-                    </a:lnL>
-                    <a:lnR w="9525" cap="flat" cmpd="sng" algn="ctr">
-                      <a:solidFill>
-                        <a:srgbClr val="D6DDE3"/>
-                      </a:solidFill>
-                      <a:prstDash val="solid"/>
-                      <a:round/>
-                      <a:headEnd type="none" w="med" len="med"/>
-                      <a:tailEnd type="none" w="med" len="med"/>
-                    </a:lnR>
-                    <a:lnT w="9525" cap="flat" cmpd="sng" algn="ctr">
-                      <a:solidFill>
-                        <a:srgbClr val="D6DDE3"/>
-                      </a:solidFill>
-                      <a:prstDash val="solid"/>
-                      <a:round/>
-                      <a:headEnd type="none" w="med" len="med"/>
-                      <a:tailEnd type="none" w="med" len="med"/>
-                    </a:lnT>
-                    <a:lnB w="9525" cap="flat" cmpd="sng" algn="ctr">
-                      <a:solidFill>
-                        <a:srgbClr val="D6DDE3"/>
-                      </a:solidFill>
-                      <a:prstDash val="solid"/>
-                      <a:round/>
-                      <a:headEnd type="none" w="med" len="med"/>
-                      <a:tailEnd type="none" w="med" len="med"/>
-                    </a:lnB>
-                    <a:solidFill>
-                      <a:srgbClr val="FFFFFF"/>
-                    </a:solidFill>
-                  </a:tcPr>
-                </a:tc>
-              </a:tr>
-              <a:tr h="658368">
-                <a:tc>
-                  <a:txBody>
-                    <a:bodyPr/>
-                    <a:lstStyle/>
-                    <a:p>
-                      <a:pPr indent="0" marL="0">
-                        <a:buNone/>
-                      </a:pPr>
-                      <a:r>
-                        <a:rPr lang="en-US" sz="1250" b="1" dirty="0">
-                          <a:solidFill>
-                            <a:srgbClr val="16181D"/>
-                          </a:solidFill>
-                          <a:latin typeface="Arial" pitchFamily="34" charset="0"/>
-                          <a:ea typeface="Arial" pitchFamily="34" charset="-122"/>
-                          <a:cs typeface="Arial" pitchFamily="34" charset="-120"/>
-                        </a:rPr>
-                        <a:t>Release-Takt</a:t>
-                      </a:r>
-                      <a:endParaRPr lang="en-US" sz="1250" dirty="0">
-                        <a:latin typeface="Arial" charset="0"/>
-                        <a:ea typeface="Arial" charset="0"/>
-                        <a:cs typeface="Arial" charset="0"/>
-                      </a:endParaRPr>
-                    </a:p>
-                  </a:txBody>
-                  <a:tcPr marL="109728" marR="109728" marT="64008" marB="64008" anchor="ctr">
-                    <a:lnL w="9525" cap="flat" cmpd="sng" algn="ctr">
-                      <a:solidFill>
-                        <a:srgbClr val="D6DDE3"/>
-                      </a:solidFill>
-                      <a:prstDash val="solid"/>
-                      <a:round/>
-                      <a:headEnd type="none" w="med" len="med"/>
-                      <a:tailEnd type="none" w="med" len="med"/>
-                    </a:lnL>
-                    <a:lnR w="9525" cap="flat" cmpd="sng" algn="ctr">
-                      <a:solidFill>
-                        <a:srgbClr val="D6DDE3"/>
-                      </a:solidFill>
-                      <a:prstDash val="solid"/>
-                      <a:round/>
-                      <a:headEnd type="none" w="med" len="med"/>
-                      <a:tailEnd type="none" w="med" len="med"/>
-                    </a:lnR>
-                    <a:lnT w="9525" cap="flat" cmpd="sng" algn="ctr">
-                      <a:solidFill>
-                        <a:srgbClr val="D6DDE3"/>
-                      </a:solidFill>
-                      <a:prstDash val="solid"/>
-                      <a:round/>
-                      <a:headEnd type="none" w="med" len="med"/>
-                      <a:tailEnd type="none" w="med" len="med"/>
-                    </a:lnT>
-                    <a:lnB w="9525" cap="flat" cmpd="sng" algn="ctr">
-                      <a:solidFill>
-                        <a:srgbClr val="D6DDE3"/>
-                      </a:solidFill>
-                      <a:prstDash val="solid"/>
-                      <a:round/>
-                      <a:headEnd type="none" w="med" len="med"/>
-                      <a:tailEnd type="none" w="med" len="med"/>
-                    </a:lnB>
-                    <a:solidFill>
-                      <a:srgbClr val="F7F9FA"/>
-                    </a:solidFill>
-                  </a:tcPr>
-                </a:tc>
-                <a:tc>
-                  <a:txBody>
-                    <a:bodyPr/>
-                    <a:lstStyle/>
-                    <a:p>
-                      <a:pPr indent="0" marL="0">
-                        <a:buNone/>
-                      </a:pPr>
-                      <a:r>
-                        <a:rPr lang="en-US" sz="1250" dirty="0">
-                          <a:solidFill>
-                            <a:srgbClr val="16181D"/>
-                          </a:solidFill>
-                          <a:latin typeface="Arial" pitchFamily="34" charset="0"/>
-                          <a:ea typeface="Arial" pitchFamily="34" charset="-122"/>
-                          <a:cs typeface="Arial" pitchFamily="34" charset="-120"/>
-                        </a:rPr>
-                        <a:t>Vom Hersteller vorgegeben; größere Umbauten erfordern Anpassungen</a:t>
-                      </a:r>
-                      <a:endParaRPr lang="en-US" sz="1250" dirty="0">
-                        <a:latin typeface="Arial" charset="0"/>
-                        <a:ea typeface="Arial" charset="0"/>
-                        <a:cs typeface="Arial" charset="0"/>
-                      </a:endParaRPr>
-                    </a:p>
-                  </a:txBody>
-                  <a:tcPr marL="109728" marR="109728" marT="64008" marB="64008" anchor="ctr">
-                    <a:lnL w="9525" cap="flat" cmpd="sng" algn="ctr">
-                      <a:solidFill>
-                        <a:srgbClr val="D6DDE3"/>
-                      </a:solidFill>
-                      <a:prstDash val="solid"/>
-                      <a:round/>
-                      <a:headEnd type="none" w="med" len="med"/>
-                      <a:tailEnd type="none" w="med" len="med"/>
-                    </a:lnL>
-                    <a:lnR w="9525" cap="flat" cmpd="sng" algn="ctr">
-                      <a:solidFill>
-                        <a:srgbClr val="D6DDE3"/>
-                      </a:solidFill>
-                      <a:prstDash val="solid"/>
-                      <a:round/>
-                      <a:headEnd type="none" w="med" len="med"/>
-                      <a:tailEnd type="none" w="med" len="med"/>
-                    </a:lnR>
-                    <a:lnT w="9525" cap="flat" cmpd="sng" algn="ctr">
-                      <a:solidFill>
-                        <a:srgbClr val="D6DDE3"/>
-                      </a:solidFill>
-                      <a:prstDash val="solid"/>
-                      <a:round/>
-                      <a:headEnd type="none" w="med" len="med"/>
-                      <a:tailEnd type="none" w="med" len="med"/>
-                    </a:lnT>
-                    <a:lnB w="9525" cap="flat" cmpd="sng" algn="ctr">
-                      <a:solidFill>
-                        <a:srgbClr val="D6DDE3"/>
-                      </a:solidFill>
-                      <a:prstDash val="solid"/>
-                      <a:round/>
-                      <a:headEnd type="none" w="med" len="med"/>
-                      <a:tailEnd type="none" w="med" len="med"/>
-                    </a:lnB>
-                    <a:solidFill>
-                      <a:srgbClr val="F7F9FA"/>
-                    </a:solidFill>
-                  </a:tcPr>
-                </a:tc>
-                <a:tc>
-                  <a:txBody>
-                    <a:bodyPr/>
-                    <a:lstStyle/>
-                    <a:p>
-                      <a:pPr indent="0" marL="0">
-                        <a:buNone/>
-                      </a:pPr>
-                      <a:r>
-                        <a:rPr lang="en-US" sz="1250" dirty="0">
-                          <a:solidFill>
-                            <a:srgbClr val="16181D"/>
-                          </a:solidFill>
-                          <a:latin typeface="Arial" pitchFamily="34" charset="0"/>
-                          <a:ea typeface="Arial" pitchFamily="34" charset="-122"/>
-                          <a:cs typeface="Arial" pitchFamily="34" charset="-120"/>
-                        </a:rPr>
-                        <a:t>Updates im eigenen Takt</a:t>
-                      </a:r>
-                      <a:endParaRPr lang="en-US" sz="1250" dirty="0">
-                        <a:latin typeface="Arial" charset="0"/>
-                        <a:ea typeface="Arial" charset="0"/>
-                        <a:cs typeface="Arial" charset="0"/>
-                      </a:endParaRPr>
-                    </a:p>
-                  </a:txBody>
-                  <a:tcPr marL="109728" marR="109728" marT="64008" marB="64008" anchor="ctr">
-                    <a:lnL w="9525" cap="flat" cmpd="sng" algn="ctr">
-                      <a:solidFill>
-                        <a:srgbClr val="D6DDE3"/>
-                      </a:solidFill>
-                      <a:prstDash val="solid"/>
-                      <a:round/>
-                      <a:headEnd type="none" w="med" len="med"/>
-                      <a:tailEnd type="none" w="med" len="med"/>
-                    </a:lnL>
-                    <a:lnR w="9525" cap="flat" cmpd="sng" algn="ctr">
-                      <a:solidFill>
-                        <a:srgbClr val="D6DDE3"/>
-                      </a:solidFill>
-                      <a:prstDash val="solid"/>
-                      <a:round/>
-                      <a:headEnd type="none" w="med" len="med"/>
-                      <a:tailEnd type="none" w="med" len="med"/>
-                    </a:lnR>
-                    <a:lnT w="9525" cap="flat" cmpd="sng" algn="ctr">
-                      <a:solidFill>
-                        <a:srgbClr val="D6DDE3"/>
-                      </a:solidFill>
-                      <a:prstDash val="solid"/>
-                      <a:round/>
-                      <a:headEnd type="none" w="med" len="med"/>
-                      <a:tailEnd type="none" w="med" len="med"/>
-                    </a:lnT>
-                    <a:lnB w="9525" cap="flat" cmpd="sng" algn="ctr">
-                      <a:solidFill>
-                        <a:srgbClr val="D6DDE3"/>
-                      </a:solidFill>
-                      <a:prstDash val="solid"/>
-                      <a:round/>
-                      <a:headEnd type="none" w="med" len="med"/>
-                      <a:tailEnd type="none" w="med" len="med"/>
-                    </a:lnB>
-                    <a:solidFill>
-                      <a:srgbClr val="F7F9FA"/>
-                    </a:solidFill>
-                  </a:tcPr>
-                </a:tc>
-              </a:tr>
-              <a:tr h="658368">
-                <a:tc>
-                  <a:txBody>
-                    <a:bodyPr/>
-                    <a:lstStyle/>
-                    <a:p>
-                      <a:pPr indent="0" marL="0">
-                        <a:buNone/>
-                      </a:pPr>
-                      <a:r>
-                        <a:rPr lang="en-US" sz="1250" b="1" dirty="0">
-                          <a:solidFill>
-                            <a:srgbClr val="16181D"/>
-                          </a:solidFill>
-                          <a:latin typeface="Arial" pitchFamily="34" charset="0"/>
-                          <a:ea typeface="Arial" pitchFamily="34" charset="-122"/>
-                          <a:cs typeface="Arial" pitchFamily="34" charset="-120"/>
-                        </a:rPr>
-                        <a:t>Datenmigration</a:t>
-                      </a:r>
-                      <a:endParaRPr lang="en-US" sz="1250" dirty="0">
-                        <a:latin typeface="Arial" charset="0"/>
-                        <a:ea typeface="Arial" charset="0"/>
-                        <a:cs typeface="Arial" charset="0"/>
-                      </a:endParaRPr>
-                    </a:p>
-                  </a:txBody>
-                  <a:tcPr marL="109728" marR="109728" marT="64008" marB="64008" anchor="ctr">
-                    <a:lnL w="9525" cap="flat" cmpd="sng" algn="ctr">
-                      <a:solidFill>
-                        <a:srgbClr val="D6DDE3"/>
-                      </a:solidFill>
-                      <a:prstDash val="solid"/>
-                      <a:round/>
-                      <a:headEnd type="none" w="med" len="med"/>
-                      <a:tailEnd type="none" w="med" len="med"/>
-                    </a:lnL>
-                    <a:lnR w="9525" cap="flat" cmpd="sng" algn="ctr">
-                      <a:solidFill>
-                        <a:srgbClr val="D6DDE3"/>
-                      </a:solidFill>
-                      <a:prstDash val="solid"/>
-                      <a:round/>
-                      <a:headEnd type="none" w="med" len="med"/>
-                      <a:tailEnd type="none" w="med" len="med"/>
-                    </a:lnR>
-                    <a:lnT w="9525" cap="flat" cmpd="sng" algn="ctr">
-                      <a:solidFill>
-                        <a:srgbClr val="D6DDE3"/>
-                      </a:solidFill>
-                      <a:prstDash val="solid"/>
-                      <a:round/>
-                      <a:headEnd type="none" w="med" len="med"/>
-                      <a:tailEnd type="none" w="med" len="med"/>
-                    </a:lnT>
-                    <a:lnB w="9525" cap="flat" cmpd="sng" algn="ctr">
-                      <a:solidFill>
-                        <a:srgbClr val="D6DDE3"/>
-                      </a:solidFill>
-                      <a:prstDash val="solid"/>
-                      <a:round/>
-                      <a:headEnd type="none" w="med" len="med"/>
-                      <a:tailEnd type="none" w="med" len="med"/>
-                    </a:lnB>
-                    <a:solidFill>
-                      <a:srgbClr val="FFFFFF"/>
-                    </a:solidFill>
-                  </a:tcPr>
-                </a:tc>
-                <a:tc>
-                  <a:txBody>
-                    <a:bodyPr/>
-                    <a:lstStyle/>
-                    <a:p>
-                      <a:pPr indent="0" marL="0">
-                        <a:buNone/>
-                      </a:pPr>
-                      <a:r>
-                        <a:rPr lang="en-US" sz="1250" dirty="0">
-                          <a:solidFill>
-                            <a:srgbClr val="16181D"/>
-                          </a:solidFill>
-                          <a:latin typeface="Arial" pitchFamily="34" charset="0"/>
-                          <a:ea typeface="Arial" pitchFamily="34" charset="-122"/>
-                          <a:cs typeface="Arial" pitchFamily="34" charset="-120"/>
-                        </a:rPr>
-                        <a:t>Entfällt weitgehend</a:t>
-                      </a:r>
-                      <a:endParaRPr lang="en-US" sz="1250" dirty="0">
-                        <a:latin typeface="Arial" charset="0"/>
-                        <a:ea typeface="Arial" charset="0"/>
-                        <a:cs typeface="Arial" charset="0"/>
-                      </a:endParaRPr>
-                    </a:p>
-                  </a:txBody>
-                  <a:tcPr marL="109728" marR="109728" marT="64008" marB="64008" anchor="ctr">
-                    <a:lnL w="9525" cap="flat" cmpd="sng" algn="ctr">
-                      <a:solidFill>
-                        <a:srgbClr val="D6DDE3"/>
-                      </a:solidFill>
-                      <a:prstDash val="solid"/>
-                      <a:round/>
-                      <a:headEnd type="none" w="med" len="med"/>
-                      <a:tailEnd type="none" w="med" len="med"/>
-                    </a:lnL>
-                    <a:lnR w="9525" cap="flat" cmpd="sng" algn="ctr">
-                      <a:solidFill>
-                        <a:srgbClr val="D6DDE3"/>
-                      </a:solidFill>
-                      <a:prstDash val="solid"/>
-                      <a:round/>
-                      <a:headEnd type="none" w="med" len="med"/>
-                      <a:tailEnd type="none" w="med" len="med"/>
-                    </a:lnR>
-                    <a:lnT w="9525" cap="flat" cmpd="sng" algn="ctr">
-                      <a:solidFill>
-                        <a:srgbClr val="D6DDE3"/>
-                      </a:solidFill>
-                      <a:prstDash val="solid"/>
-                      <a:round/>
-                      <a:headEnd type="none" w="med" len="med"/>
-                      <a:tailEnd type="none" w="med" len="med"/>
-                    </a:lnT>
-                    <a:lnB w="9525" cap="flat" cmpd="sng" algn="ctr">
-                      <a:solidFill>
-                        <a:srgbClr val="D6DDE3"/>
-                      </a:solidFill>
-                      <a:prstDash val="solid"/>
-                      <a:round/>
-                      <a:headEnd type="none" w="med" len="med"/>
-                      <a:tailEnd type="none" w="med" len="med"/>
-                    </a:lnB>
-                    <a:solidFill>
-                      <a:srgbClr val="FFFFFF"/>
-                    </a:solidFill>
-                  </a:tcPr>
-                </a:tc>
-                <a:tc>
-                  <a:txBody>
-                    <a:bodyPr/>
-                    <a:lstStyle/>
-                    <a:p>
-                      <a:pPr indent="0" marL="0">
-                        <a:buNone/>
-                      </a:pPr>
-                      <a:r>
-                        <a:rPr lang="en-US" sz="1250" dirty="0">
-                          <a:solidFill>
-                            <a:srgbClr val="16181D"/>
-                          </a:solidFill>
-                          <a:latin typeface="Arial" pitchFamily="34" charset="0"/>
-                          <a:ea typeface="Arial" pitchFamily="34" charset="-122"/>
-                          <a:cs typeface="Arial" pitchFamily="34" charset="-120"/>
-                        </a:rPr>
-                        <a:t>Einmaliges Risiko – begrenzt durch Pilot und Parallelbetrieb</a:t>
-                      </a:r>
-                      <a:endParaRPr lang="en-US" sz="1250" dirty="0">
-                        <a:latin typeface="Arial" charset="0"/>
-                        <a:ea typeface="Arial" charset="0"/>
-                        <a:cs typeface="Arial" charset="0"/>
-                      </a:endParaRPr>
-                    </a:p>
-                  </a:txBody>
-                  <a:tcPr marL="109728" marR="109728" marT="64008" marB="64008" anchor="ctr">
-                    <a:lnL w="9525" cap="flat" cmpd="sng" algn="ctr">
-                      <a:solidFill>
-                        <a:srgbClr val="D6DDE3"/>
-                      </a:solidFill>
-                      <a:prstDash val="solid"/>
-                      <a:round/>
-                      <a:headEnd type="none" w="med" len="med"/>
-                      <a:tailEnd type="none" w="med" len="med"/>
-                    </a:lnL>
-                    <a:lnR w="9525" cap="flat" cmpd="sng" algn="ctr">
-                      <a:solidFill>
-                        <a:srgbClr val="D6DDE3"/>
-                      </a:solidFill>
-                      <a:prstDash val="solid"/>
-                      <a:round/>
-                      <a:headEnd type="none" w="med" len="med"/>
-                      <a:tailEnd type="none" w="med" len="med"/>
-                    </a:lnR>
-                    <a:lnT w="9525" cap="flat" cmpd="sng" algn="ctr">
-                      <a:solidFill>
-                        <a:srgbClr val="D6DDE3"/>
-                      </a:solidFill>
-                      <a:prstDash val="solid"/>
-                      <a:round/>
-                      <a:headEnd type="none" w="med" len="med"/>
-                      <a:tailEnd type="none" w="med" len="med"/>
-                    </a:lnT>
-                    <a:lnB w="9525" cap="flat" cmpd="sng" algn="ctr">
-                      <a:solidFill>
-                        <a:srgbClr val="D6DDE3"/>
-                      </a:solidFill>
-                      <a:prstDash val="solid"/>
-                      <a:round/>
-                      <a:headEnd type="none" w="med" len="med"/>
-                      <a:tailEnd type="none" w="med" len="med"/>
-                    </a:lnB>
-                    <a:solidFill>
-                      <a:srgbClr val="FFFFFF"/>
-                    </a:solidFill>
-                  </a:tcPr>
-                </a:tc>
-              </a:tr>
-              <a:tr h="658368">
-                <a:tc>
-                  <a:txBody>
-                    <a:bodyPr/>
-                    <a:lstStyle/>
-                    <a:p>
-                      <a:pPr indent="0" marL="0">
-                        <a:buNone/>
-                      </a:pPr>
-                      <a:r>
-                        <a:rPr lang="en-US" sz="1250" b="1" dirty="0">
-                          <a:solidFill>
-                            <a:srgbClr val="16181D"/>
-                          </a:solidFill>
-                          <a:latin typeface="Arial" pitchFamily="34" charset="0"/>
-                          <a:ea typeface="Arial" pitchFamily="34" charset="-122"/>
-                          <a:cs typeface="Arial" pitchFamily="34" charset="-120"/>
-                        </a:rPr>
-                        <a:t>Ökosystem</a:t>
-                      </a:r>
-                      <a:endParaRPr lang="en-US" sz="1250" dirty="0">
-                        <a:latin typeface="Arial" charset="0"/>
-                        <a:ea typeface="Arial" charset="0"/>
-                        <a:cs typeface="Arial" charset="0"/>
-                      </a:endParaRPr>
-                    </a:p>
-                  </a:txBody>
-                  <a:tcPr marL="109728" marR="109728" marT="64008" marB="64008" anchor="ctr">
-                    <a:lnL w="9525" cap="flat" cmpd="sng" algn="ctr">
-                      <a:solidFill>
-                        <a:srgbClr val="D6DDE3"/>
-                      </a:solidFill>
-                      <a:prstDash val="solid"/>
-                      <a:round/>
-                      <a:headEnd type="none" w="med" len="med"/>
-                      <a:tailEnd type="none" w="med" len="med"/>
-                    </a:lnL>
-                    <a:lnR w="9525" cap="flat" cmpd="sng" algn="ctr">
-                      <a:solidFill>
-                        <a:srgbClr val="D6DDE3"/>
-                      </a:solidFill>
-                      <a:prstDash val="solid"/>
-                      <a:round/>
-                      <a:headEnd type="none" w="med" len="med"/>
-                      <a:tailEnd type="none" w="med" len="med"/>
-                    </a:lnR>
-                    <a:lnT w="9525" cap="flat" cmpd="sng" algn="ctr">
-                      <a:solidFill>
-                        <a:srgbClr val="D6DDE3"/>
-                      </a:solidFill>
-                      <a:prstDash val="solid"/>
-                      <a:round/>
-                      <a:headEnd type="none" w="med" len="med"/>
-                      <a:tailEnd type="none" w="med" len="med"/>
-                    </a:lnT>
-                    <a:lnB w="9525" cap="flat" cmpd="sng" algn="ctr">
-                      <a:solidFill>
-                        <a:srgbClr val="D6DDE3"/>
-                      </a:solidFill>
-                      <a:prstDash val="solid"/>
-                      <a:round/>
-                      <a:headEnd type="none" w="med" len="med"/>
-                      <a:tailEnd type="none" w="med" len="med"/>
-                    </a:lnB>
-                    <a:solidFill>
-                      <a:srgbClr val="F7F9FA"/>
-                    </a:solidFill>
-                  </a:tcPr>
-                </a:tc>
-                <a:tc>
-                  <a:txBody>
-                    <a:bodyPr/>
-                    <a:lstStyle/>
-                    <a:p>
-                      <a:pPr indent="0" marL="0">
-                        <a:buNone/>
-                      </a:pPr>
-                      <a:r>
-                        <a:rPr lang="en-US" sz="1250" dirty="0">
-                          <a:solidFill>
-                            <a:srgbClr val="16181D"/>
-                          </a:solidFill>
-                          <a:latin typeface="Arial" pitchFamily="34" charset="0"/>
-                          <a:ea typeface="Arial" pitchFamily="34" charset="-122"/>
-                          <a:cs typeface="Arial" pitchFamily="34" charset="-120"/>
-                        </a:rPr>
-                        <a:t>Groß: viele Partner und Erweiterungen</a:t>
-                      </a:r>
-                      <a:endParaRPr lang="en-US" sz="1250" dirty="0">
-                        <a:latin typeface="Arial" charset="0"/>
-                        <a:ea typeface="Arial" charset="0"/>
-                        <a:cs typeface="Arial" charset="0"/>
-                      </a:endParaRPr>
-                    </a:p>
-                  </a:txBody>
-                  <a:tcPr marL="109728" marR="109728" marT="64008" marB="64008" anchor="ctr">
-                    <a:lnL w="9525" cap="flat" cmpd="sng" algn="ctr">
-                      <a:solidFill>
-                        <a:srgbClr val="D6DDE3"/>
-                      </a:solidFill>
-                      <a:prstDash val="solid"/>
-                      <a:round/>
-                      <a:headEnd type="none" w="med" len="med"/>
-                      <a:tailEnd type="none" w="med" len="med"/>
-                    </a:lnL>
-                    <a:lnR w="9525" cap="flat" cmpd="sng" algn="ctr">
-                      <a:solidFill>
-                        <a:srgbClr val="D6DDE3"/>
-                      </a:solidFill>
-                      <a:prstDash val="solid"/>
-                      <a:round/>
-                      <a:headEnd type="none" w="med" len="med"/>
-                      <a:tailEnd type="none" w="med" len="med"/>
-                    </a:lnR>
-                    <a:lnT w="9525" cap="flat" cmpd="sng" algn="ctr">
-                      <a:solidFill>
-                        <a:srgbClr val="D6DDE3"/>
-                      </a:solidFill>
-                      <a:prstDash val="solid"/>
-                      <a:round/>
-                      <a:headEnd type="none" w="med" len="med"/>
-                      <a:tailEnd type="none" w="med" len="med"/>
-                    </a:lnT>
-                    <a:lnB w="9525" cap="flat" cmpd="sng" algn="ctr">
-                      <a:solidFill>
-                        <a:srgbClr val="D6DDE3"/>
-                      </a:solidFill>
-                      <a:prstDash val="solid"/>
-                      <a:round/>
-                      <a:headEnd type="none" w="med" len="med"/>
-                      <a:tailEnd type="none" w="med" len="med"/>
-                    </a:lnB>
-                    <a:solidFill>
-                      <a:srgbClr val="F7F9FA"/>
-                    </a:solidFill>
-                  </a:tcPr>
-                </a:tc>
-                <a:tc>
-                  <a:txBody>
-                    <a:bodyPr/>
-                    <a:lstStyle/>
-                    <a:p>
-                      <a:pPr indent="0" marL="0">
-                        <a:buNone/>
-                      </a:pPr>
-                      <a:r>
-                        <a:rPr lang="en-US" sz="1250" dirty="0">
-                          <a:solidFill>
-                            <a:srgbClr val="16181D"/>
-                          </a:solidFill>
-                          <a:latin typeface="Arial" pitchFamily="34" charset="0"/>
-                          <a:ea typeface="Arial" pitchFamily="34" charset="-122"/>
-                          <a:cs typeface="Arial" pitchFamily="34" charset="-120"/>
-                        </a:rPr>
-                        <a:t>Kleiner – begrenzt durch offenen Code, Dokumentation und KI-gestützte Entwicklung</a:t>
-                      </a:r>
-                      <a:endParaRPr lang="en-US" sz="1250" dirty="0">
-                        <a:latin typeface="Arial" charset="0"/>
-                        <a:ea typeface="Arial" charset="0"/>
-                        <a:cs typeface="Arial" charset="0"/>
-                      </a:endParaRPr>
-                    </a:p>
-                  </a:txBody>
-                  <a:tcPr marL="109728" marR="109728" marT="64008" marB="64008" anchor="ctr">
-                    <a:lnL w="9525" cap="flat" cmpd="sng" algn="ctr">
-                      <a:solidFill>
-                        <a:srgbClr val="D6DDE3"/>
-                      </a:solidFill>
-                      <a:prstDash val="solid"/>
-                      <a:round/>
-                      <a:headEnd type="none" w="med" len="med"/>
-                      <a:tailEnd type="none" w="med" len="med"/>
-                    </a:lnL>
-                    <a:lnR w="9525" cap="flat" cmpd="sng" algn="ctr">
-                      <a:solidFill>
-                        <a:srgbClr val="D6DDE3"/>
-                      </a:solidFill>
-                      <a:prstDash val="solid"/>
-                      <a:round/>
-                      <a:headEnd type="none" w="med" len="med"/>
-                      <a:tailEnd type="none" w="med" len="med"/>
-                    </a:lnR>
-                    <a:lnT w="9525" cap="flat" cmpd="sng" algn="ctr">
-                      <a:solidFill>
-                        <a:srgbClr val="D6DDE3"/>
-                      </a:solidFill>
-                      <a:prstDash val="solid"/>
-                      <a:round/>
-                      <a:headEnd type="none" w="med" len="med"/>
-                      <a:tailEnd type="none" w="med" len="med"/>
-                    </a:lnT>
-                    <a:lnB w="9525" cap="flat" cmpd="sng" algn="ctr">
-                      <a:solidFill>
-                        <a:srgbClr val="D6DDE3"/>
-                      </a:solidFill>
-                      <a:prstDash val="solid"/>
-                      <a:round/>
-                      <a:headEnd type="none" w="med" len="med"/>
-                      <a:tailEnd type="none" w="med" len="med"/>
-                    </a:lnB>
-                    <a:solidFill>
-                      <a:srgbClr val="F7F9FA"/>
-                    </a:solidFill>
-                  </a:tcPr>
-                </a:tc>
-              </a:tr>
-              <a:tr h="658368">
-                <a:tc>
-                  <a:txBody>
-                    <a:bodyPr/>
-                    <a:lstStyle/>
-                    <a:p>
-                      <a:pPr indent="0" marL="0">
-                        <a:buNone/>
-                      </a:pPr>
-                      <a:r>
-                        <a:rPr lang="en-US" sz="1250" b="1" dirty="0">
-                          <a:solidFill>
-                            <a:srgbClr val="16181D"/>
-                          </a:solidFill>
-                          <a:latin typeface="Arial" pitchFamily="34" charset="0"/>
-                          <a:ea typeface="Arial" pitchFamily="34" charset="-122"/>
-                          <a:cs typeface="Arial" pitchFamily="34" charset="-120"/>
-                        </a:rPr>
-                        <a:t>Know-how-Abhängigkeit</a:t>
-                      </a:r>
-                      <a:endParaRPr lang="en-US" sz="1250" dirty="0">
-                        <a:latin typeface="Arial" charset="0"/>
-                        <a:ea typeface="Arial" charset="0"/>
-                        <a:cs typeface="Arial" charset="0"/>
-                      </a:endParaRPr>
-                    </a:p>
-                  </a:txBody>
-                  <a:tcPr marL="109728" marR="109728" marT="64008" marB="64008" anchor="ctr">
-                    <a:lnL w="9525" cap="flat" cmpd="sng" algn="ctr">
-                      <a:solidFill>
-                        <a:srgbClr val="D6DDE3"/>
-                      </a:solidFill>
-                      <a:prstDash val="solid"/>
-                      <a:round/>
-                      <a:headEnd type="none" w="med" len="med"/>
-                      <a:tailEnd type="none" w="med" len="med"/>
-                    </a:lnL>
-                    <a:lnR w="9525" cap="flat" cmpd="sng" algn="ctr">
-                      <a:solidFill>
-                        <a:srgbClr val="D6DDE3"/>
-                      </a:solidFill>
-                      <a:prstDash val="solid"/>
-                      <a:round/>
-                      <a:headEnd type="none" w="med" len="med"/>
-                      <a:tailEnd type="none" w="med" len="med"/>
-                    </a:lnR>
-                    <a:lnT w="9525" cap="flat" cmpd="sng" algn="ctr">
-                      <a:solidFill>
-                        <a:srgbClr val="D6DDE3"/>
-                      </a:solidFill>
-                      <a:prstDash val="solid"/>
-                      <a:round/>
-                      <a:headEnd type="none" w="med" len="med"/>
-                      <a:tailEnd type="none" w="med" len="med"/>
-                    </a:lnT>
-                    <a:lnB w="9525" cap="flat" cmpd="sng" algn="ctr">
-                      <a:solidFill>
-                        <a:srgbClr val="D6DDE3"/>
-                      </a:solidFill>
-                      <a:prstDash val="solid"/>
-                      <a:round/>
-                      <a:headEnd type="none" w="med" len="med"/>
-                      <a:tailEnd type="none" w="med" len="med"/>
-                    </a:lnB>
-                    <a:solidFill>
-                      <a:srgbClr val="FFFFFF"/>
-                    </a:solidFill>
-                  </a:tcPr>
-                </a:tc>
-                <a:tc>
-                  <a:txBody>
-                    <a:bodyPr/>
-                    <a:lstStyle/>
-                    <a:p>
-                      <a:pPr indent="0" marL="0">
-                        <a:buNone/>
-                      </a:pPr>
-                      <a:r>
-                        <a:rPr lang="en-US" sz="1250" dirty="0">
-                          <a:solidFill>
-                            <a:srgbClr val="16181D"/>
-                          </a:solidFill>
-                          <a:latin typeface="Arial" pitchFamily="34" charset="0"/>
-                          <a:ea typeface="Arial" pitchFamily="34" charset="-122"/>
-                          <a:cs typeface="Arial" pitchFamily="34" charset="-120"/>
-                        </a:rPr>
-                        <a:t>Eigenentwicklungen erfordern Spezialwissen</a:t>
-                      </a:r>
-                      <a:endParaRPr lang="en-US" sz="1250" dirty="0">
-                        <a:latin typeface="Arial" charset="0"/>
-                        <a:ea typeface="Arial" charset="0"/>
-                        <a:cs typeface="Arial" charset="0"/>
-                      </a:endParaRPr>
-                    </a:p>
-                  </a:txBody>
-                  <a:tcPr marL="109728" marR="109728" marT="64008" marB="64008" anchor="ctr">
-                    <a:lnL w="9525" cap="flat" cmpd="sng" algn="ctr">
-                      <a:solidFill>
-                        <a:srgbClr val="D6DDE3"/>
-                      </a:solidFill>
-                      <a:prstDash val="solid"/>
-                      <a:round/>
-                      <a:headEnd type="none" w="med" len="med"/>
-                      <a:tailEnd type="none" w="med" len="med"/>
-                    </a:lnL>
-                    <a:lnR w="9525" cap="flat" cmpd="sng" algn="ctr">
-                      <a:solidFill>
-                        <a:srgbClr val="D6DDE3"/>
-                      </a:solidFill>
-                      <a:prstDash val="solid"/>
-                      <a:round/>
-                      <a:headEnd type="none" w="med" len="med"/>
-                      <a:tailEnd type="none" w="med" len="med"/>
-                    </a:lnR>
-                    <a:lnT w="9525" cap="flat" cmpd="sng" algn="ctr">
-                      <a:solidFill>
-                        <a:srgbClr val="D6DDE3"/>
-                      </a:solidFill>
-                      <a:prstDash val="solid"/>
-                      <a:round/>
-                      <a:headEnd type="none" w="med" len="med"/>
-                      <a:tailEnd type="none" w="med" len="med"/>
-                    </a:lnT>
-                    <a:lnB w="9525" cap="flat" cmpd="sng" algn="ctr">
-                      <a:solidFill>
-                        <a:srgbClr val="D6DDE3"/>
-                      </a:solidFill>
-                      <a:prstDash val="solid"/>
-                      <a:round/>
-                      <a:headEnd type="none" w="med" len="med"/>
-                      <a:tailEnd type="none" w="med" len="med"/>
-                    </a:lnB>
-                    <a:solidFill>
-                      <a:srgbClr val="FFFFFF"/>
-                    </a:solidFill>
-                  </a:tcPr>
-                </a:tc>
-                <a:tc>
-                  <a:txBody>
-                    <a:bodyPr/>
-                    <a:lstStyle/>
-                    <a:p>
-                      <a:pPr indent="0" marL="0">
-                        <a:buNone/>
-                      </a:pPr>
-                      <a:r>
-                        <a:rPr lang="en-US" sz="1250" dirty="0">
-                          <a:solidFill>
-                            <a:srgbClr val="16181D"/>
-                          </a:solidFill>
-                          <a:latin typeface="Arial" pitchFamily="34" charset="0"/>
-                          <a:ea typeface="Arial" pitchFamily="34" charset="-122"/>
-                          <a:cs typeface="Arial" pitchFamily="34" charset="-120"/>
-                        </a:rPr>
-                        <a:t>Wissen im Repository dokumentiert, nicht an Personen gebunden</a:t>
-                      </a:r>
-                      <a:endParaRPr lang="en-US" sz="1250" dirty="0">
-                        <a:latin typeface="Arial" charset="0"/>
-                        <a:ea typeface="Arial" charset="0"/>
-                        <a:cs typeface="Arial" charset="0"/>
-                      </a:endParaRPr>
-                    </a:p>
-                  </a:txBody>
-                  <a:tcPr marL="109728" marR="109728" marT="64008" marB="64008" anchor="ctr">
-                    <a:lnL w="9525" cap="flat" cmpd="sng" algn="ctr">
-                      <a:solidFill>
-                        <a:srgbClr val="D6DDE3"/>
-                      </a:solidFill>
-                      <a:prstDash val="solid"/>
-                      <a:round/>
-                      <a:headEnd type="none" w="med" len="med"/>
-                      <a:tailEnd type="none" w="med" len="med"/>
-                    </a:lnL>
-                    <a:lnR w="9525" cap="flat" cmpd="sng" algn="ctr">
-                      <a:solidFill>
-                        <a:srgbClr val="D6DDE3"/>
-                      </a:solidFill>
-                      <a:prstDash val="solid"/>
-                      <a:round/>
-                      <a:headEnd type="none" w="med" len="med"/>
-                      <a:tailEnd type="none" w="med" len="med"/>
-                    </a:lnR>
-                    <a:lnT w="9525" cap="flat" cmpd="sng" algn="ctr">
-                      <a:solidFill>
-                        <a:srgbClr val="D6DDE3"/>
-                      </a:solidFill>
-                      <a:prstDash val="solid"/>
-                      <a:round/>
-                      <a:headEnd type="none" w="med" len="med"/>
-                      <a:tailEnd type="none" w="med" len="med"/>
-                    </a:lnT>
-                    <a:lnB w="9525" cap="flat" cmpd="sng" algn="ctr">
-                      <a:solidFill>
-                        <a:srgbClr val="D6DDE3"/>
-                      </a:solidFill>
-                      <a:prstDash val="solid"/>
-                      <a:round/>
-                      <a:headEnd type="none" w="med" len="med"/>
-                      <a:tailEnd type="none" w="med" len="med"/>
-                    </a:lnB>
-                    <a:solidFill>
-                      <a:srgbClr val="FFFFFF"/>
-                    </a:solidFill>
-                  </a:tcPr>
-                </a:tc>
-              </a:tr>
-            </a:tbl>
-          </a:graphicData>
-        </a:graphic>
-      </p:graphicFrame>
-      <p:sp>
-        <p:nvSpPr>
-          <p:cNvPr id="7" name="Shape 4"/>
-          <p:cNvSpPr/>
-          <p:nvPr/>
-        </p:nvSpPr>
-        <p:spPr>
-          <a:xfrm>
-            <a:off x="548640" y="5440680"/>
-            <a:ext cx="11094415" cy="685800"/>
-          </a:xfrm>
-          <a:prstGeom prst="rect">
-            <a:avLst/>
-          </a:prstGeom>
-          <a:solidFill>
-            <a:srgbClr val="E4F3F1"/>
-          </a:solidFill>
-          <a:ln w="12700">
-            <a:solidFill>
-              <a:srgbClr val="E4F3F1"/>
-            </a:solidFill>
-            <a:prstDash val="solid"/>
-          </a:ln>
-        </p:spPr>
-      </p:sp>
-      <p:sp>
-        <p:nvSpPr>
-          <p:cNvPr id="8" name="Text 5"/>
-          <p:cNvSpPr txBox="1"/>
-          <p:nvPr/>
-        </p:nvSpPr>
-        <p:spPr>
-          <a:xfrm>
-            <a:off x="822960" y="5440680"/>
-            <a:ext cx="10545775" cy="685800"/>
-          </a:xfrm>
-          <a:prstGeom prst="rect">
-            <a:avLst/>
-          </a:prstGeom>
-          <a:noFill/>
-          <a:ln/>
-        </p:spPr>
-        <p:txBody>
-          <a:bodyPr wrap="square" lIns="0" tIns="0" rIns="0" bIns="0" rtlCol="0" anchor="ctr"/>
-          <a:lstStyle/>
-          <a:p>
-            <a:pPr indent="0" marL="0">
-              <a:buNone/>
-            </a:pPr>
-            <a:r>
-              <a:rPr lang="en-US" sz="1400" b="1" dirty="0">
-                <a:solidFill>
-                  <a:srgbClr val="000E2F"/>
-                </a:solidFill>
-                <a:latin typeface="Arial" pitchFamily="34" charset="0"/>
-                <a:ea typeface="Arial" pitchFamily="34" charset="-122"/>
-                <a:cs typeface="Arial" pitchFamily="34" charset="-120"/>
-              </a:rPr>
-              <a:t>Einordnung: </a:t>
-            </a:r>
-            <a:pPr indent="0" marL="0">
-              <a:buNone/>
-            </a:pPr>
-            <a:r>
-              <a:rPr lang="en-US" sz="1400" dirty="0">
-                <a:solidFill>
-                  <a:srgbClr val="000E2F"/>
-                </a:solidFill>
-                <a:latin typeface="Arial" pitchFamily="34" charset="0"/>
-                <a:ea typeface="Arial" pitchFamily="34" charset="-122"/>
-                <a:cs typeface="Arial" pitchFamily="34" charset="-120"/>
-              </a:rPr>
-              <a:t>Pimcore trägt das geringere Umstiegsrisiko, anyPIM das geringere laufende Risiko. Beides lässt sich mit einem Pilot vorab prüfen.</a:t>
-            </a:r>
-            <a:endParaRPr lang="en-US" sz="1400" dirty="0"/>
-          </a:p>
-        </p:txBody>
-      </p:sp>
-    </p:spTree>
-  </p:cSld>
-  <p:clrMapOvr>
-    <a:masterClrMapping/>
-  </p:clrMapOvr>
-</p:sld>
-</file>
-
-<file path=ppt/slides/slide9.xml><?xml version="1.0" encoding="utf-8"?>
-<p:sld xmlns:a="http://schemas.openxmlformats.org/drawingml/2006/main" xmlns:r="http://schemas.openxmlformats.org/officeDocument/2006/relationships" xmlns:p="http://schemas.openxmlformats.org/presentationml/2006/main">
-  <p:cSld name="Slide 9">
-    <p:bg>
-      <p:bgPr>
-        <a:solidFill>
-          <a:srgbClr val="FFFFFF"/>
-        </a:solidFill>
-      </p:bgPr>
-    </p:bg>
-    <p:spTree>
-      <p:nvGrpSpPr>
-        <p:cNvPr id="1" name=""/>
-        <p:cNvGrpSpPr/>
-        <p:nvPr/>
-      </p:nvGrpSpPr>
-      <p:grpSpPr>
-        <a:xfrm>
-          <a:off x="0" y="0"/>
-          <a:ext cx="0" cy="0"/>
-          <a:chOff x="0" y="0"/>
-          <a:chExt cx="0" cy="0"/>
-        </a:xfrm>
-      </p:grpSpPr>
-      <p:sp>
-        <p:nvSpPr>
-          <p:cNvPr id="2" name="Text 0"/>
-          <p:cNvSpPr txBox="1"/>
-          <p:nvPr/>
-        </p:nvSpPr>
-        <p:spPr>
-          <a:xfrm>
-            <a:off x="548640" y="411480"/>
-            <a:ext cx="11094415" cy="594360"/>
-          </a:xfrm>
-          <a:prstGeom prst="rect">
-            <a:avLst/>
-          </a:prstGeom>
-          <a:noFill/>
-          <a:ln/>
-        </p:spPr>
-        <p:txBody>
-          <a:bodyPr wrap="square" lIns="0" tIns="0" rIns="0" bIns="0" rtlCol="0" anchor="b"/>
-          <a:lstStyle/>
-          <a:p>
-            <a:pPr indent="0" marL="0">
-              <a:buNone/>
-            </a:pPr>
-            <a:r>
-              <a:rPr lang="en-US" sz="3000" dirty="0">
-                <a:solidFill>
-                  <a:srgbClr val="16181D"/>
-                </a:solidFill>
-                <a:latin typeface="Arial" pitchFamily="34" charset="0"/>
-                <a:ea typeface="Arial" pitchFamily="34" charset="-122"/>
-                <a:cs typeface="Arial" pitchFamily="34" charset="-120"/>
-              </a:rPr>
-              <a:t>VORGEHEN ZUR ENTSCHEIDUNG</a:t>
-            </a:r>
-            <a:endParaRPr lang="en-US" sz="3000" dirty="0"/>
-          </a:p>
-        </p:txBody>
-      </p:sp>
-      <p:sp>
-        <p:nvSpPr>
-          <p:cNvPr id="3" name="Text 1"/>
-          <p:cNvSpPr txBox="1"/>
-          <p:nvPr/>
-        </p:nvSpPr>
-        <p:spPr>
-          <a:xfrm>
-            <a:off x="548640" y="1033272"/>
-            <a:ext cx="11094415" cy="365760"/>
-          </a:xfrm>
-          <a:prstGeom prst="rect">
-            <a:avLst/>
-          </a:prstGeom>
-          <a:noFill/>
-          <a:ln/>
-        </p:spPr>
-        <p:txBody>
-          <a:bodyPr wrap="square" lIns="0" tIns="0" rIns="0" bIns="0" rtlCol="0" anchor="t"/>
-          <a:lstStyle/>
-          <a:p>
-            <a:pPr indent="0" marL="0">
-              <a:buNone/>
-            </a:pPr>
-            <a:r>
-              <a:rPr lang="en-US" sz="1400" dirty="0">
-                <a:solidFill>
-                  <a:srgbClr val="4B5563"/>
-                </a:solidFill>
-                <a:latin typeface="Arial" pitchFamily="34" charset="0"/>
-                <a:ea typeface="Arial" pitchFamily="34" charset="-122"/>
-                <a:cs typeface="Arial" pitchFamily="34" charset="-120"/>
-              </a:rPr>
-              <a:t>In vier Schritten zu einer belastbaren Entscheidung – für beide Optionen auf derselben Grundlage.</a:t>
-            </a:r>
-            <a:endParaRPr lang="en-US" sz="1400" dirty="0"/>
-          </a:p>
-        </p:txBody>
-      </p:sp>
-      <p:sp>
-        <p:nvSpPr>
-          <p:cNvPr id="4" name="Text 2"/>
-          <p:cNvSpPr txBox="1"/>
-          <p:nvPr/>
-        </p:nvSpPr>
-        <p:spPr>
-          <a:xfrm>
-            <a:off x="548640" y="6400800"/>
-            <a:ext cx="7315200" cy="228600"/>
-          </a:xfrm>
-          <a:prstGeom prst="rect">
-            <a:avLst/>
-          </a:prstGeom>
-          <a:noFill/>
-          <a:ln/>
-        </p:spPr>
-        <p:txBody>
-          <a:bodyPr wrap="square" lIns="0" tIns="0" rIns="0" bIns="0" rtlCol="0" anchor="t"/>
-          <a:lstStyle/>
-          <a:p>
-            <a:pPr indent="0" marL="0">
-              <a:buNone/>
-            </a:pPr>
-            <a:r>
-              <a:rPr lang="en-US" sz="900" dirty="0">
-                <a:solidFill>
-                  <a:srgbClr val="4B5563"/>
-                </a:solidFill>
-                <a:latin typeface="Arial" pitchFamily="34" charset="0"/>
-                <a:ea typeface="Arial" pitchFamily="34" charset="-122"/>
-                <a:cs typeface="Arial" pitchFamily="34" charset="-120"/>
-              </a:rPr>
-              <a:t>PIM-Kostenbetrachtung Kohlhammer  ·  Entscheidungsgrundlage  ·  September 2026</a:t>
-            </a:r>
-            <a:endParaRPr lang="en-US" sz="900" dirty="0"/>
-          </a:p>
-        </p:txBody>
-      </p:sp>
-      <p:sp>
-        <p:nvSpPr>
-          <p:cNvPr id="5" name="Text 3"/>
-          <p:cNvSpPr txBox="1"/>
-          <p:nvPr/>
-        </p:nvSpPr>
-        <p:spPr>
-          <a:xfrm>
-            <a:off x="10728655" y="6400800"/>
-            <a:ext cx="914400" cy="228600"/>
-          </a:xfrm>
-          <a:prstGeom prst="rect">
-            <a:avLst/>
-          </a:prstGeom>
-          <a:noFill/>
-          <a:ln/>
-        </p:spPr>
-        <p:txBody>
-          <a:bodyPr wrap="square" lIns="0" tIns="0" rIns="0" bIns="0" rtlCol="0" anchor="t"/>
-          <a:lstStyle/>
-          <a:p>
-            <a:pPr algn="r" indent="0" marL="0">
-              <a:buNone/>
-            </a:pPr>
-            <a:r>
-              <a:rPr lang="en-US" sz="900" dirty="0">
-                <a:solidFill>
-                  <a:srgbClr val="4B5563"/>
-                </a:solidFill>
-                <a:latin typeface="Arial" pitchFamily="34" charset="0"/>
-                <a:ea typeface="Arial" pitchFamily="34" charset="-122"/>
-                <a:cs typeface="Arial" pitchFamily="34" charset="-120"/>
-              </a:rPr>
-              <a:t>9</a:t>
-            </a:r>
-            <a:endParaRPr lang="en-US" sz="900" dirty="0"/>
-          </a:p>
-        </p:txBody>
-      </p:sp>
-      <p:sp>
-        <p:nvSpPr>
-          <p:cNvPr id="6" name="Shape 4"/>
-          <p:cNvSpPr/>
-          <p:nvPr/>
-        </p:nvSpPr>
-        <p:spPr>
-          <a:xfrm>
-            <a:off x="640080" y="2011680"/>
-            <a:ext cx="10911535" cy="0"/>
-          </a:xfrm>
-          <a:prstGeom prst="line">
-            <a:avLst/>
-          </a:prstGeom>
-          <a:noFill/>
-          <a:ln w="19050">
-            <a:solidFill>
-              <a:srgbClr val="1B2D5C"/>
-            </a:solidFill>
-            <a:prstDash val="solid"/>
-          </a:ln>
-        </p:spPr>
-      </p:sp>
-      <p:sp>
-        <p:nvSpPr>
-          <p:cNvPr id="7" name="Shape 5"/>
-          <p:cNvSpPr/>
-          <p:nvPr/>
-        </p:nvSpPr>
-        <p:spPr>
-          <a:xfrm>
-            <a:off x="548640" y="1874520"/>
-            <a:ext cx="274320" cy="274320"/>
-          </a:xfrm>
-          <a:prstGeom prst="rect">
-            <a:avLst/>
-          </a:prstGeom>
-          <a:solidFill>
-            <a:srgbClr val="000E2F"/>
-          </a:solidFill>
-          <a:ln w="12700">
-            <a:solidFill>
-              <a:srgbClr val="000E2F"/>
-            </a:solidFill>
-            <a:prstDash val="solid"/>
-          </a:ln>
-        </p:spPr>
-      </p:sp>
-      <p:sp>
-        <p:nvSpPr>
-          <p:cNvPr id="8" name="Text 6"/>
-          <p:cNvSpPr txBox="1"/>
-          <p:nvPr/>
-        </p:nvSpPr>
-        <p:spPr>
-          <a:xfrm>
-            <a:off x="548640" y="2377440"/>
-            <a:ext cx="2567864" cy="731520"/>
-          </a:xfrm>
-          <a:prstGeom prst="rect">
-            <a:avLst/>
-          </a:prstGeom>
-          <a:noFill/>
-          <a:ln/>
-        </p:spPr>
-        <p:txBody>
-          <a:bodyPr wrap="square" lIns="0" tIns="0" rIns="0" bIns="0" rtlCol="0" anchor="t"/>
-          <a:lstStyle/>
-          <a:p>
-            <a:pPr indent="0" marL="0">
-              <a:buNone/>
-            </a:pPr>
-            <a:r>
-              <a:rPr lang="en-US" sz="4000" dirty="0">
-                <a:solidFill>
-                  <a:srgbClr val="1B2D5C"/>
-                </a:solidFill>
-                <a:latin typeface="Arial" pitchFamily="34" charset="0"/>
-                <a:ea typeface="Arial" pitchFamily="34" charset="-122"/>
-                <a:cs typeface="Arial" pitchFamily="34" charset="-120"/>
-              </a:rPr>
-              <a:t>01</a:t>
-            </a:r>
-            <a:endParaRPr lang="en-US" sz="4000" dirty="0"/>
-          </a:p>
-        </p:txBody>
-      </p:sp>
-      <p:sp>
-        <p:nvSpPr>
-          <p:cNvPr id="9" name="Text 7"/>
-          <p:cNvSpPr txBox="1"/>
-          <p:nvPr/>
-        </p:nvSpPr>
-        <p:spPr>
-          <a:xfrm>
-            <a:off x="548640" y="3200400"/>
-            <a:ext cx="2567864" cy="685800"/>
-          </a:xfrm>
-          <a:prstGeom prst="rect">
-            <a:avLst/>
-          </a:prstGeom>
-          <a:noFill/>
-          <a:ln/>
-        </p:spPr>
-        <p:txBody>
-          <a:bodyPr wrap="square" lIns="0" tIns="0" rIns="0" bIns="0" rtlCol="0" anchor="t"/>
-          <a:lstStyle/>
-          <a:p>
-            <a:pPr indent="0" marL="0">
-              <a:buNone/>
-            </a:pPr>
-            <a:r>
-              <a:rPr lang="en-US" sz="1700" b="1" dirty="0">
-                <a:solidFill>
-                  <a:srgbClr val="16181D"/>
-                </a:solidFill>
-                <a:latin typeface="Arial" pitchFamily="34" charset="0"/>
-                <a:ea typeface="Arial" pitchFamily="34" charset="-122"/>
-                <a:cs typeface="Arial" pitchFamily="34" charset="-120"/>
-              </a:rPr>
-              <a:t>Funktionsliste bewerten</a:t>
-            </a:r>
-            <a:endParaRPr lang="en-US" sz="1700" dirty="0"/>
-          </a:p>
-        </p:txBody>
-      </p:sp>
-      <p:sp>
-        <p:nvSpPr>
-          <p:cNvPr id="10" name="Text 8"/>
-          <p:cNvSpPr txBox="1"/>
-          <p:nvPr/>
-        </p:nvSpPr>
-        <p:spPr>
-          <a:xfrm>
-            <a:off x="548640" y="3931920"/>
-            <a:ext cx="2567864" cy="1463040"/>
-          </a:xfrm>
-          <a:prstGeom prst="rect">
-            <a:avLst/>
-          </a:prstGeom>
-          <a:noFill/>
-          <a:ln/>
-        </p:spPr>
-        <p:txBody>
-          <a:bodyPr wrap="square" lIns="0" tIns="0" rIns="0" bIns="0" rtlCol="0" anchor="t"/>
-          <a:lstStyle/>
-          <a:p>
-            <a:pPr indent="0" marL="0">
-              <a:lnSpc>
-                <a:spcPct val="112000"/>
-              </a:lnSpc>
-              <a:buNone/>
-            </a:pPr>
-            <a:r>
-              <a:rPr lang="en-US" sz="1400" dirty="0">
-                <a:solidFill>
-                  <a:srgbClr val="16181D"/>
-                </a:solidFill>
-                <a:latin typeface="Arial" pitchFamily="34" charset="0"/>
-                <a:ea typeface="Arial" pitchFamily="34" charset="-122"/>
-                <a:cs typeface="Arial" pitchFamily="34" charset="-120"/>
-              </a:rPr>
-              <a:t>Aufwand je Punkt der Kohlhammer-Liste – für beide Optionen.</a:t>
-            </a:r>
-            <a:endParaRPr lang="en-US" sz="1400" dirty="0"/>
-          </a:p>
-        </p:txBody>
-      </p:sp>
-      <p:sp>
-        <p:nvSpPr>
-          <p:cNvPr id="11" name="Shape 9"/>
-          <p:cNvSpPr/>
-          <p:nvPr/>
-        </p:nvSpPr>
-        <p:spPr>
-          <a:xfrm>
-            <a:off x="3390824" y="1874520"/>
-            <a:ext cx="274320" cy="274320"/>
-          </a:xfrm>
-          <a:prstGeom prst="rect">
-            <a:avLst/>
-          </a:prstGeom>
-          <a:solidFill>
-            <a:srgbClr val="000E2F"/>
-          </a:solidFill>
-          <a:ln w="12700">
-            <a:solidFill>
-              <a:srgbClr val="000E2F"/>
-            </a:solidFill>
-            <a:prstDash val="solid"/>
-          </a:ln>
-        </p:spPr>
-      </p:sp>
-      <p:sp>
-        <p:nvSpPr>
-          <p:cNvPr id="12" name="Text 10"/>
-          <p:cNvSpPr txBox="1"/>
-          <p:nvPr/>
-        </p:nvSpPr>
-        <p:spPr>
-          <a:xfrm>
-            <a:off x="3390824" y="2377440"/>
-            <a:ext cx="2567864" cy="731520"/>
-          </a:xfrm>
-          <a:prstGeom prst="rect">
-            <a:avLst/>
-          </a:prstGeom>
-          <a:noFill/>
-          <a:ln/>
-        </p:spPr>
-        <p:txBody>
-          <a:bodyPr wrap="square" lIns="0" tIns="0" rIns="0" bIns="0" rtlCol="0" anchor="t"/>
-          <a:lstStyle/>
-          <a:p>
-            <a:pPr indent="0" marL="0">
-              <a:buNone/>
-            </a:pPr>
-            <a:r>
-              <a:rPr lang="en-US" sz="4000" dirty="0">
-                <a:solidFill>
-                  <a:srgbClr val="1B2D5C"/>
-                </a:solidFill>
-                <a:latin typeface="Arial" pitchFamily="34" charset="0"/>
-                <a:ea typeface="Arial" pitchFamily="34" charset="-122"/>
-                <a:cs typeface="Arial" pitchFamily="34" charset="-120"/>
-              </a:rPr>
-              <a:t>02</a:t>
-            </a:r>
-            <a:endParaRPr lang="en-US" sz="4000" dirty="0"/>
-          </a:p>
-        </p:txBody>
-      </p:sp>
-      <p:sp>
-        <p:nvSpPr>
-          <p:cNvPr id="13" name="Text 11"/>
-          <p:cNvSpPr txBox="1"/>
-          <p:nvPr/>
-        </p:nvSpPr>
-        <p:spPr>
-          <a:xfrm>
-            <a:off x="3390824" y="3200400"/>
-            <a:ext cx="2567864" cy="685800"/>
-          </a:xfrm>
-          <a:prstGeom prst="rect">
-            <a:avLst/>
-          </a:prstGeom>
-          <a:noFill/>
-          <a:ln/>
-        </p:spPr>
-        <p:txBody>
-          <a:bodyPr wrap="square" lIns="0" tIns="0" rIns="0" bIns="0" rtlCol="0" anchor="t"/>
-          <a:lstStyle/>
-          <a:p>
-            <a:pPr indent="0" marL="0">
-              <a:buNone/>
-            </a:pPr>
-            <a:r>
-              <a:rPr lang="en-US" sz="1700" b="1" dirty="0">
-                <a:solidFill>
-                  <a:srgbClr val="16181D"/>
-                </a:solidFill>
-                <a:latin typeface="Arial" pitchFamily="34" charset="0"/>
-                <a:ea typeface="Arial" pitchFamily="34" charset="-122"/>
-                <a:cs typeface="Arial" pitchFamily="34" charset="-120"/>
-              </a:rPr>
-              <a:t>Angebote vergleichbar machen</a:t>
-            </a:r>
-            <a:endParaRPr lang="en-US" sz="1700" dirty="0"/>
-          </a:p>
-        </p:txBody>
-      </p:sp>
-      <p:sp>
-        <p:nvSpPr>
-          <p:cNvPr id="14" name="Text 12"/>
-          <p:cNvSpPr txBox="1"/>
-          <p:nvPr/>
-        </p:nvSpPr>
-        <p:spPr>
-          <a:xfrm>
-            <a:off x="3390824" y="3931920"/>
-            <a:ext cx="2567864" cy="1463040"/>
-          </a:xfrm>
-          <a:prstGeom prst="rect">
-            <a:avLst/>
-          </a:prstGeom>
-          <a:noFill/>
-          <a:ln/>
-        </p:spPr>
-        <p:txBody>
-          <a:bodyPr wrap="square" lIns="0" tIns="0" rIns="0" bIns="0" rtlCol="0" anchor="t"/>
-          <a:lstStyle/>
-          <a:p>
-            <a:pPr indent="0" marL="0">
-              <a:lnSpc>
-                <a:spcPct val="112000"/>
-              </a:lnSpc>
-              <a:buNone/>
-            </a:pPr>
-            <a:r>
-              <a:rPr lang="en-US" sz="1400" dirty="0">
-                <a:solidFill>
-                  <a:srgbClr val="16181D"/>
-                </a:solidFill>
-                <a:latin typeface="Arial" pitchFamily="34" charset="0"/>
-                <a:ea typeface="Arial" pitchFamily="34" charset="-122"/>
-                <a:cs typeface="Arial" pitchFamily="34" charset="-120"/>
-              </a:rPr>
-              <a:t>Fünf-Jahres-Kosten mit identischen Annahmen; Vorlage im Anhang.</a:t>
-            </a:r>
-            <a:endParaRPr lang="en-US" sz="1400" dirty="0"/>
-          </a:p>
-        </p:txBody>
-      </p:sp>
-      <p:sp>
-        <p:nvSpPr>
-          <p:cNvPr id="15" name="Shape 13"/>
-          <p:cNvSpPr/>
-          <p:nvPr/>
-        </p:nvSpPr>
-        <p:spPr>
-          <a:xfrm>
-            <a:off x="6233008" y="1874520"/>
-            <a:ext cx="274320" cy="274320"/>
-          </a:xfrm>
-          <a:prstGeom prst="rect">
-            <a:avLst/>
-          </a:prstGeom>
-          <a:solidFill>
-            <a:srgbClr val="000E2F"/>
-          </a:solidFill>
-          <a:ln w="12700">
-            <a:solidFill>
-              <a:srgbClr val="000E2F"/>
-            </a:solidFill>
-            <a:prstDash val="solid"/>
-          </a:ln>
-        </p:spPr>
-      </p:sp>
-      <p:sp>
-        <p:nvSpPr>
-          <p:cNvPr id="16" name="Text 14"/>
-          <p:cNvSpPr txBox="1"/>
-          <p:nvPr/>
-        </p:nvSpPr>
-        <p:spPr>
-          <a:xfrm>
-            <a:off x="6233008" y="2377440"/>
-            <a:ext cx="2567864" cy="731520"/>
-          </a:xfrm>
-          <a:prstGeom prst="rect">
-            <a:avLst/>
-          </a:prstGeom>
-          <a:noFill/>
-          <a:ln/>
-        </p:spPr>
-        <p:txBody>
-          <a:bodyPr wrap="square" lIns="0" tIns="0" rIns="0" bIns="0" rtlCol="0" anchor="t"/>
-          <a:lstStyle/>
-          <a:p>
-            <a:pPr indent="0" marL="0">
-              <a:buNone/>
-            </a:pPr>
-            <a:r>
-              <a:rPr lang="en-US" sz="4000" dirty="0">
-                <a:solidFill>
-                  <a:srgbClr val="1B2D5C"/>
-                </a:solidFill>
-                <a:latin typeface="Arial" pitchFamily="34" charset="0"/>
-                <a:ea typeface="Arial" pitchFamily="34" charset="-122"/>
-                <a:cs typeface="Arial" pitchFamily="34" charset="-120"/>
-              </a:rPr>
-              <a:t>03</a:t>
-            </a:r>
-            <a:endParaRPr lang="en-US" sz="4000" dirty="0"/>
-          </a:p>
-        </p:txBody>
-      </p:sp>
-      <p:sp>
-        <p:nvSpPr>
-          <p:cNvPr id="17" name="Text 15"/>
-          <p:cNvSpPr txBox="1"/>
-          <p:nvPr/>
-        </p:nvSpPr>
-        <p:spPr>
-          <a:xfrm>
-            <a:off x="6233008" y="3200400"/>
-            <a:ext cx="2567864" cy="685800"/>
-          </a:xfrm>
-          <a:prstGeom prst="rect">
-            <a:avLst/>
-          </a:prstGeom>
-          <a:noFill/>
-          <a:ln/>
-        </p:spPr>
-        <p:txBody>
-          <a:bodyPr wrap="square" lIns="0" tIns="0" rIns="0" bIns="0" rtlCol="0" anchor="t"/>
-          <a:lstStyle/>
-          <a:p>
-            <a:pPr indent="0" marL="0">
-              <a:buNone/>
-            </a:pPr>
-            <a:r>
-              <a:rPr lang="en-US" sz="1700" b="1" dirty="0">
-                <a:solidFill>
-                  <a:srgbClr val="16181D"/>
-                </a:solidFill>
-                <a:latin typeface="Arial" pitchFamily="34" charset="0"/>
-                <a:ea typeface="Arial" pitchFamily="34" charset="-122"/>
-                <a:cs typeface="Arial" pitchFamily="34" charset="-120"/>
-              </a:rPr>
-              <a:t>Kritische Punkte prüfen</a:t>
-            </a:r>
-            <a:endParaRPr lang="en-US" sz="1700" dirty="0"/>
-          </a:p>
-        </p:txBody>
-      </p:sp>
-      <p:sp>
-        <p:nvSpPr>
-          <p:cNvPr id="18" name="Text 16"/>
-          <p:cNvSpPr txBox="1"/>
-          <p:nvPr/>
-        </p:nvSpPr>
-        <p:spPr>
-          <a:xfrm>
-            <a:off x="6233008" y="3931920"/>
-            <a:ext cx="2567864" cy="1463040"/>
-          </a:xfrm>
-          <a:prstGeom prst="rect">
-            <a:avLst/>
-          </a:prstGeom>
-          <a:noFill/>
-          <a:ln/>
-        </p:spPr>
-        <p:txBody>
-          <a:bodyPr wrap="square" lIns="0" tIns="0" rIns="0" bIns="0" rtlCol="0" anchor="t"/>
-          <a:lstStyle/>
-          <a:p>
-            <a:pPr indent="0" marL="0">
-              <a:lnSpc>
-                <a:spcPct val="112000"/>
-              </a:lnSpc>
-              <a:buNone/>
-            </a:pPr>
-            <a:r>
-              <a:rPr lang="en-US" sz="1400" dirty="0">
-                <a:solidFill>
-                  <a:srgbClr val="16181D"/>
-                </a:solidFill>
-                <a:latin typeface="Arial" pitchFamily="34" charset="0"/>
-                <a:ea typeface="Arial" pitchFamily="34" charset="-122"/>
-                <a:cs typeface="Arial" pitchFamily="34" charset="-120"/>
-              </a:rPr>
-              <a:t>Proof of Concept, z. B. EasyCatalog-Export und Datenübernahme.</a:t>
-            </a:r>
-            <a:endParaRPr lang="en-US" sz="1400" dirty="0"/>
-          </a:p>
-        </p:txBody>
-      </p:sp>
-      <p:sp>
-        <p:nvSpPr>
-          <p:cNvPr id="19" name="Shape 17"/>
-          <p:cNvSpPr/>
-          <p:nvPr/>
-        </p:nvSpPr>
-        <p:spPr>
-          <a:xfrm>
-            <a:off x="9075191" y="1874520"/>
-            <a:ext cx="274320" cy="274320"/>
-          </a:xfrm>
-          <a:prstGeom prst="rect">
-            <a:avLst/>
-          </a:prstGeom>
-          <a:solidFill>
-            <a:srgbClr val="E2211C"/>
-          </a:solidFill>
-          <a:ln w="12700">
-            <a:solidFill>
-              <a:srgbClr val="E2211C"/>
-            </a:solidFill>
-            <a:prstDash val="solid"/>
-          </a:ln>
-        </p:spPr>
-      </p:sp>
-      <p:sp>
-        <p:nvSpPr>
-          <p:cNvPr id="20" name="Text 18"/>
-          <p:cNvSpPr txBox="1"/>
-          <p:nvPr/>
-        </p:nvSpPr>
-        <p:spPr>
-          <a:xfrm>
-            <a:off x="9075191" y="2377440"/>
-            <a:ext cx="2567864" cy="731520"/>
-          </a:xfrm>
-          <a:prstGeom prst="rect">
-            <a:avLst/>
-          </a:prstGeom>
-          <a:noFill/>
-          <a:ln/>
-        </p:spPr>
-        <p:txBody>
-          <a:bodyPr wrap="square" lIns="0" tIns="0" rIns="0" bIns="0" rtlCol="0" anchor="t"/>
-          <a:lstStyle/>
-          <a:p>
-            <a:pPr indent="0" marL="0">
-              <a:buNone/>
-            </a:pPr>
-            <a:r>
-              <a:rPr lang="en-US" sz="4000" dirty="0">
-                <a:solidFill>
-                  <a:srgbClr val="1B2D5C"/>
-                </a:solidFill>
-                <a:latin typeface="Arial" pitchFamily="34" charset="0"/>
-                <a:ea typeface="Arial" pitchFamily="34" charset="-122"/>
-                <a:cs typeface="Arial" pitchFamily="34" charset="-120"/>
-              </a:rPr>
-              <a:t>04</a:t>
-            </a:r>
-            <a:endParaRPr lang="en-US" sz="4000" dirty="0"/>
-          </a:p>
-        </p:txBody>
-      </p:sp>
-      <p:sp>
-        <p:nvSpPr>
-          <p:cNvPr id="21" name="Text 19"/>
-          <p:cNvSpPr txBox="1"/>
-          <p:nvPr/>
-        </p:nvSpPr>
-        <p:spPr>
-          <a:xfrm>
-            <a:off x="9075191" y="3200400"/>
-            <a:ext cx="2567864" cy="685800"/>
-          </a:xfrm>
-          <a:prstGeom prst="rect">
-            <a:avLst/>
-          </a:prstGeom>
-          <a:noFill/>
-          <a:ln/>
-        </p:spPr>
-        <p:txBody>
-          <a:bodyPr wrap="square" lIns="0" tIns="0" rIns="0" bIns="0" rtlCol="0" anchor="t"/>
-          <a:lstStyle/>
-          <a:p>
-            <a:pPr indent="0" marL="0">
-              <a:buNone/>
-            </a:pPr>
-            <a:r>
-              <a:rPr lang="en-US" sz="1700" b="1" dirty="0">
-                <a:solidFill>
-                  <a:srgbClr val="16181D"/>
-                </a:solidFill>
-                <a:latin typeface="Arial" pitchFamily="34" charset="0"/>
-                <a:ea typeface="Arial" pitchFamily="34" charset="-122"/>
-                <a:cs typeface="Arial" pitchFamily="34" charset="-120"/>
-              </a:rPr>
-              <a:t>Entscheiden</a:t>
-            </a:r>
-            <a:endParaRPr lang="en-US" sz="1700" dirty="0"/>
-          </a:p>
-        </p:txBody>
-      </p:sp>
-      <p:sp>
-        <p:nvSpPr>
-          <p:cNvPr id="22" name="Text 20"/>
-          <p:cNvSpPr txBox="1"/>
-          <p:nvPr/>
-        </p:nvSpPr>
-        <p:spPr>
-          <a:xfrm>
-            <a:off x="9075191" y="3931920"/>
-            <a:ext cx="2567864" cy="1463040"/>
-          </a:xfrm>
-          <a:prstGeom prst="rect">
-            <a:avLst/>
-          </a:prstGeom>
-          <a:noFill/>
-          <a:ln/>
-        </p:spPr>
-        <p:txBody>
-          <a:bodyPr wrap="square" lIns="0" tIns="0" rIns="0" bIns="0" rtlCol="0" anchor="t"/>
-          <a:lstStyle/>
-          <a:p>
-            <a:pPr indent="0" marL="0">
-              <a:lnSpc>
-                <a:spcPct val="112000"/>
-              </a:lnSpc>
-              <a:buNone/>
-            </a:pPr>
-            <a:r>
-              <a:rPr lang="en-US" sz="1400" dirty="0">
-                <a:solidFill>
-                  <a:srgbClr val="16181D"/>
-                </a:solidFill>
-                <a:latin typeface="Arial" pitchFamily="34" charset="0"/>
-                <a:ea typeface="Arial" pitchFamily="34" charset="-122"/>
-                <a:cs typeface="Arial" pitchFamily="34" charset="-120"/>
-              </a:rPr>
-              <a:t>Im Lenkungskreis, auf Basis von Zahlen und Pilot-Ergebnis.</a:t>
-            </a:r>
-            <a:endParaRPr lang="en-US" sz="1400" dirty="0"/>
-          </a:p>
-        </p:txBody>
-      </p:sp>
-      <p:sp>
-        <p:nvSpPr>
-          <p:cNvPr id="23" name="Shape 21"/>
-          <p:cNvSpPr/>
-          <p:nvPr/>
-        </p:nvSpPr>
-        <p:spPr>
-          <a:xfrm>
-            <a:off x="548640" y="5440680"/>
-            <a:ext cx="11094415" cy="685800"/>
-          </a:xfrm>
-          <a:prstGeom prst="rect">
-            <a:avLst/>
-          </a:prstGeom>
-          <a:solidFill>
-            <a:srgbClr val="E4F3F1"/>
-          </a:solidFill>
-          <a:ln w="12700">
-            <a:solidFill>
-              <a:srgbClr val="E4F3F1"/>
-            </a:solidFill>
-            <a:prstDash val="solid"/>
-          </a:ln>
-        </p:spPr>
-      </p:sp>
-      <p:sp>
-        <p:nvSpPr>
-          <p:cNvPr id="24" name="Text 22"/>
-          <p:cNvSpPr txBox="1"/>
-          <p:nvPr/>
-        </p:nvSpPr>
-        <p:spPr>
-          <a:xfrm>
-            <a:off x="822960" y="5440680"/>
-            <a:ext cx="10545775" cy="685800"/>
-          </a:xfrm>
-          <a:prstGeom prst="rect">
-            <a:avLst/>
-          </a:prstGeom>
-          <a:noFill/>
-          <a:ln/>
-        </p:spPr>
-        <p:txBody>
-          <a:bodyPr wrap="square" lIns="0" tIns="0" rIns="0" bIns="0" rtlCol="0" anchor="ctr"/>
-          <a:lstStyle/>
-          <a:p>
-            <a:pPr indent="0" marL="0">
-              <a:buNone/>
-            </a:pPr>
-            <a:r>
-              <a:rPr lang="en-US" sz="1400" b="1" dirty="0">
-                <a:solidFill>
-                  <a:srgbClr val="000E2F"/>
-                </a:solidFill>
-                <a:latin typeface="Arial" pitchFamily="34" charset="0"/>
-                <a:ea typeface="Arial" pitchFamily="34" charset="-122"/>
-                <a:cs typeface="Arial" pitchFamily="34" charset="-120"/>
-              </a:rPr>
-              <a:t>Einordnung: </a:t>
-            </a:r>
-            <a:pPr indent="0" marL="0">
-              <a:buNone/>
-            </a:pPr>
-            <a:r>
-              <a:rPr lang="en-US" sz="1400" dirty="0">
-                <a:solidFill>
-                  <a:srgbClr val="000E2F"/>
-                </a:solidFill>
-                <a:latin typeface="Arial" pitchFamily="34" charset="0"/>
-                <a:ea typeface="Arial" pitchFamily="34" charset="-122"/>
-                <a:cs typeface="Arial" pitchFamily="34" charset="-120"/>
-              </a:rPr>
-              <a:t>Am Ende steht eine Entscheidung auf Basis von Zahlen und Pilot-Ergebnissen – nicht von Einschätzungen.</a:t>
-            </a:r>
-            <a:endParaRPr lang="en-US" sz="1400" dirty="0"/>
           </a:p>
         </p:txBody>
       </p:sp>

--- a/docs/sales/kohlhammer-pim-kostenbetrachtung.pptx
+++ b/docs/sales/kohlhammer-pim-kostenbetrachtung.pptx
@@ -18,9 +18,10 @@
     <p:sldId id="266" r:id="rId12"/>
     <p:sldId id="267" r:id="rId13"/>
     <p:sldId id="268" r:id="rId14"/>
+    <p:sldId id="269" r:id="rId15"/>
   </p:sldIdLst>
   <p:notesMasterIdLst>
-    <p:notesMasterId r:id="rId15"/>
+    <p:notesMasterId r:id="rId16"/>
   </p:notesMasterIdLst>
   <p:sldSz cx="12192000" cy="6858000"/>
   <p:notesSz cx="6858000" cy="12192000"/>
@@ -1346,6 +1347,94 @@
             <a:fld id="{F7021451-1387-4CA6-816F-3879F97B5CBC}" type="slidenum">
               <a:rPr lang="en-US"/>
               <a:t>13</a:t>
+            </a:fld>
+            <a:endParaRPr lang="en-US"/>
+          </a:p>
+        </p:txBody>
+      </p:sp>
+    </p:spTree>
+    <p:extLst>
+      <p:ext uri="{BB962C8B-B14F-4D97-AF65-F5344CB8AC3E}">
+        <p14:creationId xmlns:p14="http://schemas.microsoft.com/office/powerpoint/2010/main" val="1024086991"/>
+      </p:ext>
+    </p:extLst>
+  </p:cSld>
+  <p:clrMapOvr>
+    <a:masterClrMapping/>
+  </p:clrMapOvr>
+</p:notes>
+</file>
+
+<file path=ppt/notesSlides/notesSlide14.xml><?xml version="1.0" encoding="utf-8"?>
+<p:notes xmlns:a="http://schemas.openxmlformats.org/drawingml/2006/main" xmlns:r="http://schemas.openxmlformats.org/officeDocument/2006/relationships" xmlns:p="http://schemas.openxmlformats.org/presentationml/2006/main">
+  <p:cSld>
+    <p:spTree>
+      <p:nvGrpSpPr>
+        <p:cNvPr id="1" name=""/>
+        <p:cNvGrpSpPr/>
+        <p:nvPr/>
+      </p:nvGrpSpPr>
+      <p:grpSpPr>
+        <a:xfrm>
+          <a:off x="0" y="0"/>
+          <a:ext cx="0" cy="0"/>
+          <a:chOff x="0" y="0"/>
+          <a:chExt cx="0" cy="0"/>
+        </a:xfrm>
+      </p:grpSpPr>
+      <p:sp>
+        <p:nvSpPr>
+          <p:cNvPr id="2" name="Slide Image Placeholder 1"/>
+          <p:cNvSpPr>
+            <a:spLocks noGrp="1" noRot="1" noChangeAspect="1"/>
+          </p:cNvSpPr>
+          <p:nvPr>
+            <p:ph type="sldImg"/>
+          </p:nvPr>
+        </p:nvSpPr>
+        <p:spPr/>
+      </p:sp>
+      <p:sp>
+        <p:nvSpPr>
+          <p:cNvPr id="3" name="Notes Placeholder 2"/>
+          <p:cNvSpPr>
+            <a:spLocks noGrp="1"/>
+          </p:cNvSpPr>
+          <p:nvPr>
+            <p:ph type="body" idx="1"/>
+          </p:nvPr>
+        </p:nvSpPr>
+        <p:spPr/>
+        <p:txBody>
+          <a:bodyPr/>
+          <a:lstStyle/>
+          <a:p>
+            <a:r>
+              <a:rPr lang="en-US" dirty="0"/>
+              <a:t>Marktüberblick für die Vollständigkeit. Alle drei sind etablierte Systeme mit eigenem Partnernetz; incoxx berät bei der Auswahl, implementiert sie aber nicht – das macht die Einordnung unabhängig. Für das Profil von Kohlhammer (Titeldaten, Print-Ausgaben, schlanker Betrieb) liegen Stibo und Centric PXM tendenziell über dem nötigen Umfang und Budget; Akeneo ist stark im E-Commerce, Print braucht Zusatzarbeit. Kostenangaben sind grobe Größenordnungen.</a:t>
+            </a:r>
+            <a:endParaRPr lang="en-US" dirty="0"/>
+          </a:p>
+        </p:txBody>
+      </p:sp>
+      <p:sp>
+        <p:nvSpPr>
+          <p:cNvPr id="4" name="Slide Number Placeholder 3"/>
+          <p:cNvSpPr>
+            <a:spLocks noGrp="1"/>
+          </p:cNvSpPr>
+          <p:nvPr>
+            <p:ph type="sldNum" sz="quarter" idx="10"/>
+          </p:nvPr>
+        </p:nvSpPr>
+        <p:spPr/>
+        <p:txBody>
+          <a:bodyPr/>
+          <a:lstStyle/>
+          <a:p>
+            <a:fld id="{F7021451-1387-4CA6-816F-3879F97B5CBC}" type="slidenum">
+              <a:rPr lang="en-US"/>
+              <a:t>14</a:t>
             </a:fld>
             <a:endParaRPr lang="en-US"/>
           </a:p>
@@ -10031,6 +10120,1401 @@
 </p:sld>
 </file>
 
+<file path=ppt/slides/slide14.xml><?xml version="1.0" encoding="utf-8"?>
+<p:sld xmlns:a="http://schemas.openxmlformats.org/drawingml/2006/main" xmlns:r="http://schemas.openxmlformats.org/officeDocument/2006/relationships" xmlns:p="http://schemas.openxmlformats.org/presentationml/2006/main">
+  <p:cSld name="Slide 14">
+    <p:bg>
+      <p:bgPr>
+        <a:solidFill>
+          <a:srgbClr val="FFFFFF"/>
+        </a:solidFill>
+      </p:bgPr>
+    </p:bg>
+    <p:spTree>
+      <p:nvGrpSpPr>
+        <p:cNvPr id="1" name=""/>
+        <p:cNvGrpSpPr/>
+        <p:nvPr/>
+      </p:nvGrpSpPr>
+      <p:grpSpPr>
+        <a:xfrm>
+          <a:off x="0" y="0"/>
+          <a:ext cx="0" cy="0"/>
+          <a:chOff x="0" y="0"/>
+          <a:chExt cx="0" cy="0"/>
+        </a:xfrm>
+      </p:grpSpPr>
+      <p:sp>
+        <p:nvSpPr>
+          <p:cNvPr id="2" name="Text 0"/>
+          <p:cNvSpPr txBox="1"/>
+          <p:nvPr/>
+        </p:nvSpPr>
+        <p:spPr>
+          <a:xfrm>
+            <a:off x="548640" y="411480"/>
+            <a:ext cx="11094415" cy="594360"/>
+          </a:xfrm>
+          <a:prstGeom prst="rect">
+            <a:avLst/>
+          </a:prstGeom>
+          <a:noFill/>
+          <a:ln/>
+        </p:spPr>
+        <p:txBody>
+          <a:bodyPr wrap="square" lIns="0" tIns="0" rIns="0" bIns="0" rtlCol="0" anchor="b"/>
+          <a:lstStyle/>
+          <a:p>
+            <a:pPr indent="0" marL="0">
+              <a:buNone/>
+            </a:pPr>
+            <a:r>
+              <a:rPr lang="en-US" sz="3000" dirty="0">
+                <a:solidFill>
+                  <a:srgbClr val="16181D"/>
+                </a:solidFill>
+                <a:latin typeface="Arial" pitchFamily="34" charset="0"/>
+                <a:ea typeface="Arial" pitchFamily="34" charset="-122"/>
+                <a:cs typeface="Arial" pitchFamily="34" charset="-120"/>
+              </a:rPr>
+              <a:t>WEITERE PIM-SYSTEME AM MARKT</a:t>
+            </a:r>
+            <a:endParaRPr lang="en-US" sz="3000" dirty="0"/>
+          </a:p>
+        </p:txBody>
+      </p:sp>
+      <p:sp>
+        <p:nvSpPr>
+          <p:cNvPr id="3" name="Text 1"/>
+          <p:cNvSpPr txBox="1"/>
+          <p:nvPr/>
+        </p:nvSpPr>
+        <p:spPr>
+          <a:xfrm>
+            <a:off x="548640" y="1033272"/>
+            <a:ext cx="11094415" cy="365760"/>
+          </a:xfrm>
+          <a:prstGeom prst="rect">
+            <a:avLst/>
+          </a:prstGeom>
+          <a:noFill/>
+          <a:ln/>
+        </p:spPr>
+        <p:txBody>
+          <a:bodyPr wrap="square" lIns="0" tIns="0" rIns="0" bIns="0" rtlCol="0" anchor="t"/>
+          <a:lstStyle/>
+          <a:p>
+            <a:pPr indent="0" marL="0">
+              <a:buNone/>
+            </a:pPr>
+            <a:r>
+              <a:rPr lang="en-US" sz="1400" dirty="0">
+                <a:solidFill>
+                  <a:srgbClr val="4B5563"/>
+                </a:solidFill>
+                <a:latin typeface="Arial" pitchFamily="34" charset="0"/>
+                <a:ea typeface="Arial" pitchFamily="34" charset="-122"/>
+                <a:cs typeface="Arial" pitchFamily="34" charset="-120"/>
+              </a:rPr>
+              <a:t>Kurze Einordnung. incoxx berät bei Auswahl und Anforderungen – implementiert diese Systeme aber nicht.</a:t>
+            </a:r>
+            <a:endParaRPr lang="en-US" sz="1400" dirty="0"/>
+          </a:p>
+        </p:txBody>
+      </p:sp>
+      <p:sp>
+        <p:nvSpPr>
+          <p:cNvPr id="4" name="Text 2"/>
+          <p:cNvSpPr txBox="1"/>
+          <p:nvPr/>
+        </p:nvSpPr>
+        <p:spPr>
+          <a:xfrm>
+            <a:off x="548640" y="6400800"/>
+            <a:ext cx="7315200" cy="228600"/>
+          </a:xfrm>
+          <a:prstGeom prst="rect">
+            <a:avLst/>
+          </a:prstGeom>
+          <a:noFill/>
+          <a:ln/>
+        </p:spPr>
+        <p:txBody>
+          <a:bodyPr wrap="square" lIns="0" tIns="0" rIns="0" bIns="0" rtlCol="0" anchor="t"/>
+          <a:lstStyle/>
+          <a:p>
+            <a:pPr indent="0" marL="0">
+              <a:buNone/>
+            </a:pPr>
+            <a:r>
+              <a:rPr lang="en-US" sz="900" dirty="0">
+                <a:solidFill>
+                  <a:srgbClr val="4B5563"/>
+                </a:solidFill>
+                <a:latin typeface="Arial" pitchFamily="34" charset="0"/>
+                <a:ea typeface="Arial" pitchFamily="34" charset="-122"/>
+                <a:cs typeface="Arial" pitchFamily="34" charset="-120"/>
+              </a:rPr>
+              <a:t>PIM-Kostenbetrachtung Kohlhammer  ·  Entscheidungsgrundlage  ·  September 2026</a:t>
+            </a:r>
+            <a:endParaRPr lang="en-US" sz="900" dirty="0"/>
+          </a:p>
+        </p:txBody>
+      </p:sp>
+      <p:sp>
+        <p:nvSpPr>
+          <p:cNvPr id="5" name="Text 3"/>
+          <p:cNvSpPr txBox="1"/>
+          <p:nvPr/>
+        </p:nvSpPr>
+        <p:spPr>
+          <a:xfrm>
+            <a:off x="10728655" y="6400800"/>
+            <a:ext cx="914400" cy="228600"/>
+          </a:xfrm>
+          <a:prstGeom prst="rect">
+            <a:avLst/>
+          </a:prstGeom>
+          <a:noFill/>
+          <a:ln/>
+        </p:spPr>
+        <p:txBody>
+          <a:bodyPr wrap="square" lIns="0" tIns="0" rIns="0" bIns="0" rtlCol="0" anchor="t"/>
+          <a:lstStyle/>
+          <a:p>
+            <a:pPr algn="r" indent="0" marL="0">
+              <a:buNone/>
+            </a:pPr>
+            <a:r>
+              <a:rPr lang="en-US" sz="900" dirty="0">
+                <a:solidFill>
+                  <a:srgbClr val="4B5563"/>
+                </a:solidFill>
+                <a:latin typeface="Arial" pitchFamily="34" charset="0"/>
+                <a:ea typeface="Arial" pitchFamily="34" charset="-122"/>
+                <a:cs typeface="Arial" pitchFamily="34" charset="-120"/>
+              </a:rPr>
+              <a:t>14</a:t>
+            </a:r>
+            <a:endParaRPr lang="en-US" sz="900" dirty="0"/>
+          </a:p>
+        </p:txBody>
+      </p:sp>
+      <p:sp>
+        <p:nvSpPr>
+          <p:cNvPr id="6" name="Shape 4"/>
+          <p:cNvSpPr/>
+          <p:nvPr/>
+        </p:nvSpPr>
+        <p:spPr>
+          <a:xfrm>
+            <a:off x="548640" y="1645920"/>
+            <a:ext cx="3520440" cy="868680"/>
+          </a:xfrm>
+          <a:prstGeom prst="rect">
+            <a:avLst/>
+          </a:prstGeom>
+          <a:solidFill>
+            <a:srgbClr val="1B2D5C"/>
+          </a:solidFill>
+          <a:ln w="12700">
+            <a:solidFill>
+              <a:srgbClr val="1B2D5C"/>
+            </a:solidFill>
+            <a:prstDash val="solid"/>
+          </a:ln>
+        </p:spPr>
+      </p:sp>
+      <p:sp>
+        <p:nvSpPr>
+          <p:cNvPr id="7" name="Text 5"/>
+          <p:cNvSpPr txBox="1"/>
+          <p:nvPr/>
+        </p:nvSpPr>
+        <p:spPr>
+          <a:xfrm>
+            <a:off x="777240" y="1737360"/>
+            <a:ext cx="3063240" cy="384048"/>
+          </a:xfrm>
+          <a:prstGeom prst="rect">
+            <a:avLst/>
+          </a:prstGeom>
+          <a:noFill/>
+          <a:ln/>
+        </p:spPr>
+        <p:txBody>
+          <a:bodyPr wrap="square" lIns="0" tIns="0" rIns="0" bIns="0" rtlCol="0" anchor="ctr"/>
+          <a:lstStyle/>
+          <a:p>
+            <a:pPr indent="0" marL="0">
+              <a:buNone/>
+            </a:pPr>
+            <a:r>
+              <a:rPr lang="en-US" sz="1600" b="1" dirty="0">
+                <a:solidFill>
+                  <a:srgbClr val="FFFFFF"/>
+                </a:solidFill>
+                <a:latin typeface="Arial" pitchFamily="34" charset="0"/>
+                <a:ea typeface="Arial" pitchFamily="34" charset="-122"/>
+                <a:cs typeface="Arial" pitchFamily="34" charset="-120"/>
+              </a:rPr>
+              <a:t>Stibo Systems STEP</a:t>
+            </a:r>
+            <a:endParaRPr lang="en-US" sz="1600" dirty="0"/>
+          </a:p>
+        </p:txBody>
+      </p:sp>
+      <p:sp>
+        <p:nvSpPr>
+          <p:cNvPr id="8" name="Text 6"/>
+          <p:cNvSpPr txBox="1"/>
+          <p:nvPr/>
+        </p:nvSpPr>
+        <p:spPr>
+          <a:xfrm>
+            <a:off x="777240" y="2103120"/>
+            <a:ext cx="3063240" cy="365760"/>
+          </a:xfrm>
+          <a:prstGeom prst="rect">
+            <a:avLst/>
+          </a:prstGeom>
+          <a:noFill/>
+          <a:ln/>
+        </p:spPr>
+        <p:txBody>
+          <a:bodyPr wrap="square" lIns="0" tIns="0" rIns="0" bIns="0" rtlCol="0" anchor="t"/>
+          <a:lstStyle/>
+          <a:p>
+            <a:pPr indent="0" marL="0">
+              <a:buNone/>
+            </a:pPr>
+            <a:r>
+              <a:rPr lang="en-US" sz="1100" dirty="0">
+                <a:solidFill>
+                  <a:srgbClr val="C6E6E3"/>
+                </a:solidFill>
+                <a:latin typeface="Arial" pitchFamily="34" charset="0"/>
+                <a:ea typeface="Arial" pitchFamily="34" charset="-122"/>
+                <a:cs typeface="Arial" pitchFamily="34" charset="-120"/>
+              </a:rPr>
+              <a:t>Multidomain-MDM für Großunternehmen</a:t>
+            </a:r>
+            <a:endParaRPr lang="en-US" sz="1100" dirty="0"/>
+          </a:p>
+        </p:txBody>
+      </p:sp>
+      <p:sp>
+        <p:nvSpPr>
+          <p:cNvPr id="9" name="Shape 7"/>
+          <p:cNvSpPr/>
+          <p:nvPr/>
+        </p:nvSpPr>
+        <p:spPr>
+          <a:xfrm>
+            <a:off x="548640" y="2514600"/>
+            <a:ext cx="3520440" cy="2880360"/>
+          </a:xfrm>
+          <a:prstGeom prst="rect">
+            <a:avLst/>
+          </a:prstGeom>
+          <a:solidFill>
+            <a:srgbClr val="FFFFFF"/>
+          </a:solidFill>
+          <a:ln w="12700">
+            <a:solidFill>
+              <a:srgbClr val="D6DDE3"/>
+            </a:solidFill>
+            <a:prstDash val="solid"/>
+          </a:ln>
+        </p:spPr>
+      </p:sp>
+      <p:sp>
+        <p:nvSpPr>
+          <p:cNvPr id="10" name="Text 8"/>
+          <p:cNvSpPr txBox="1"/>
+          <p:nvPr/>
+        </p:nvSpPr>
+        <p:spPr>
+          <a:xfrm>
+            <a:off x="777240" y="2651760"/>
+            <a:ext cx="3063240" cy="228600"/>
+          </a:xfrm>
+          <a:prstGeom prst="rect">
+            <a:avLst/>
+          </a:prstGeom>
+          <a:noFill/>
+          <a:ln/>
+        </p:spPr>
+        <p:txBody>
+          <a:bodyPr wrap="square" lIns="0" tIns="0" rIns="0" bIns="0" rtlCol="0" anchor="t"/>
+          <a:lstStyle/>
+          <a:p>
+            <a:pPr indent="0" marL="0">
+              <a:buNone/>
+            </a:pPr>
+            <a:r>
+              <a:rPr lang="en-US" sz="1000" b="1" spc="100" kern="0" dirty="0">
+                <a:solidFill>
+                  <a:srgbClr val="4B5563"/>
+                </a:solidFill>
+                <a:latin typeface="Arial" pitchFamily="34" charset="0"/>
+                <a:ea typeface="Arial" pitchFamily="34" charset="-122"/>
+                <a:cs typeface="Arial" pitchFamily="34" charset="-120"/>
+              </a:rPr>
+              <a:t>EINSCHÄTZUNG</a:t>
+            </a:r>
+            <a:endParaRPr lang="en-US" sz="1000" dirty="0"/>
+          </a:p>
+        </p:txBody>
+      </p:sp>
+      <p:sp>
+        <p:nvSpPr>
+          <p:cNvPr id="11" name="Text 9"/>
+          <p:cNvSpPr txBox="1"/>
+          <p:nvPr/>
+        </p:nvSpPr>
+        <p:spPr>
+          <a:xfrm>
+            <a:off x="777240" y="2907792"/>
+            <a:ext cx="3063240" cy="960120"/>
+          </a:xfrm>
+          <a:prstGeom prst="rect">
+            <a:avLst/>
+          </a:prstGeom>
+          <a:noFill/>
+          <a:ln/>
+        </p:spPr>
+        <p:txBody>
+          <a:bodyPr wrap="square" lIns="0" tIns="0" rIns="0" bIns="0" rtlCol="0" anchor="t"/>
+          <a:lstStyle/>
+          <a:p>
+            <a:pPr indent="0" marL="0">
+              <a:lnSpc>
+                <a:spcPct val="108000"/>
+              </a:lnSpc>
+              <a:buNone/>
+            </a:pPr>
+            <a:r>
+              <a:rPr lang="en-US" sz="1200" dirty="0">
+                <a:solidFill>
+                  <a:srgbClr val="16181D"/>
+                </a:solidFill>
+                <a:latin typeface="Arial" pitchFamily="34" charset="0"/>
+                <a:ea typeface="Arial" pitchFamily="34" charset="-122"/>
+                <a:cs typeface="Arial" pitchFamily="34" charset="-120"/>
+              </a:rPr>
+              <a:t>Sehr umfassendes Stammdatenmanagement über Produkte, Lieferanten, Kunden und Standorte hinweg; stark in Governance und Datenqualität.</a:t>
+            </a:r>
+            <a:endParaRPr lang="en-US" sz="1200" dirty="0"/>
+          </a:p>
+        </p:txBody>
+      </p:sp>
+      <p:sp>
+        <p:nvSpPr>
+          <p:cNvPr id="12" name="Text 10"/>
+          <p:cNvSpPr txBox="1"/>
+          <p:nvPr/>
+        </p:nvSpPr>
+        <p:spPr>
+          <a:xfrm>
+            <a:off x="777240" y="3913632"/>
+            <a:ext cx="3063240" cy="228600"/>
+          </a:xfrm>
+          <a:prstGeom prst="rect">
+            <a:avLst/>
+          </a:prstGeom>
+          <a:noFill/>
+          <a:ln/>
+        </p:spPr>
+        <p:txBody>
+          <a:bodyPr wrap="square" lIns="0" tIns="0" rIns="0" bIns="0" rtlCol="0" anchor="t"/>
+          <a:lstStyle/>
+          <a:p>
+            <a:pPr indent="0" marL="0">
+              <a:buNone/>
+            </a:pPr>
+            <a:r>
+              <a:rPr lang="en-US" sz="1000" b="1" spc="100" kern="0" dirty="0">
+                <a:solidFill>
+                  <a:srgbClr val="4B5563"/>
+                </a:solidFill>
+                <a:latin typeface="Arial" pitchFamily="34" charset="0"/>
+                <a:ea typeface="Arial" pitchFamily="34" charset="-122"/>
+                <a:cs typeface="Arial" pitchFamily="34" charset="-120"/>
+              </a:rPr>
+              <a:t>PASSUNG FÜR KOHLHAMMER</a:t>
+            </a:r>
+            <a:endParaRPr lang="en-US" sz="1000" dirty="0"/>
+          </a:p>
+        </p:txBody>
+      </p:sp>
+      <p:sp>
+        <p:nvSpPr>
+          <p:cNvPr id="13" name="Text 11"/>
+          <p:cNvSpPr txBox="1"/>
+          <p:nvPr/>
+        </p:nvSpPr>
+        <p:spPr>
+          <a:xfrm>
+            <a:off x="777240" y="4169664"/>
+            <a:ext cx="3063240" cy="685800"/>
+          </a:xfrm>
+          <a:prstGeom prst="rect">
+            <a:avLst/>
+          </a:prstGeom>
+          <a:noFill/>
+          <a:ln/>
+        </p:spPr>
+        <p:txBody>
+          <a:bodyPr wrap="square" lIns="0" tIns="0" rIns="0" bIns="0" rtlCol="0" anchor="t"/>
+          <a:lstStyle/>
+          <a:p>
+            <a:pPr indent="0" marL="0">
+              <a:lnSpc>
+                <a:spcPct val="108000"/>
+              </a:lnSpc>
+              <a:buNone/>
+            </a:pPr>
+            <a:r>
+              <a:rPr lang="en-US" sz="1200" dirty="0">
+                <a:solidFill>
+                  <a:srgbClr val="16181D"/>
+                </a:solidFill>
+                <a:latin typeface="Arial" pitchFamily="34" charset="0"/>
+                <a:ea typeface="Arial" pitchFamily="34" charset="-122"/>
+                <a:cs typeface="Arial" pitchFamily="34" charset="-120"/>
+              </a:rPr>
+              <a:t>Für die Datenmenge und Struktur eines Fachverlags meist überdimensioniert.</a:t>
+            </a:r>
+            <a:endParaRPr lang="en-US" sz="1200" dirty="0"/>
+          </a:p>
+        </p:txBody>
+      </p:sp>
+      <p:sp>
+        <p:nvSpPr>
+          <p:cNvPr id="14" name="Shape 12"/>
+          <p:cNvSpPr/>
+          <p:nvPr/>
+        </p:nvSpPr>
+        <p:spPr>
+          <a:xfrm>
+            <a:off x="777240" y="4892040"/>
+            <a:ext cx="3063240" cy="0"/>
+          </a:xfrm>
+          <a:prstGeom prst="line">
+            <a:avLst/>
+          </a:prstGeom>
+          <a:noFill/>
+          <a:ln w="12700">
+            <a:solidFill>
+              <a:srgbClr val="D6DDE3"/>
+            </a:solidFill>
+            <a:prstDash val="solid"/>
+          </a:ln>
+        </p:spPr>
+      </p:sp>
+      <p:sp>
+        <p:nvSpPr>
+          <p:cNvPr id="15" name="Text 13"/>
+          <p:cNvSpPr txBox="1"/>
+          <p:nvPr/>
+        </p:nvSpPr>
+        <p:spPr>
+          <a:xfrm>
+            <a:off x="777240" y="4937760"/>
+            <a:ext cx="3063240" cy="411480"/>
+          </a:xfrm>
+          <a:prstGeom prst="rect">
+            <a:avLst/>
+          </a:prstGeom>
+          <a:noFill/>
+          <a:ln/>
+        </p:spPr>
+        <p:txBody>
+          <a:bodyPr wrap="square" lIns="0" tIns="0" rIns="0" bIns="0" rtlCol="0" anchor="ctr"/>
+          <a:lstStyle/>
+          <a:p>
+            <a:pPr indent="0" marL="0">
+              <a:buNone/>
+            </a:pPr>
+            <a:r>
+              <a:rPr lang="en-US" sz="1100" b="1" dirty="0">
+                <a:solidFill>
+                  <a:srgbClr val="4B5563"/>
+                </a:solidFill>
+                <a:latin typeface="Arial" pitchFamily="34" charset="0"/>
+                <a:ea typeface="Arial" pitchFamily="34" charset="-122"/>
+                <a:cs typeface="Arial" pitchFamily="34" charset="-120"/>
+              </a:rPr>
+              <a:t>Kosten  </a:t>
+            </a:r>
+            <a:pPr indent="0" marL="0">
+              <a:buNone/>
+            </a:pPr>
+            <a:r>
+              <a:rPr lang="en-US" sz="1800" b="1" dirty="0">
+                <a:solidFill>
+                  <a:srgbClr val="000E2F"/>
+                </a:solidFill>
+                <a:latin typeface="Arial" pitchFamily="34" charset="0"/>
+                <a:ea typeface="Arial" pitchFamily="34" charset="-122"/>
+                <a:cs typeface="Arial" pitchFamily="34" charset="-120"/>
+              </a:rPr>
+              <a:t>€€€€</a:t>
+            </a:r>
+            <a:pPr indent="0" marL="0">
+              <a:buNone/>
+            </a:pPr>
+            <a:endParaRPr lang="en-US" sz="1100" dirty="0"/>
+          </a:p>
+        </p:txBody>
+      </p:sp>
+      <p:sp>
+        <p:nvSpPr>
+          <p:cNvPr id="16" name="Shape 14"/>
+          <p:cNvSpPr/>
+          <p:nvPr/>
+        </p:nvSpPr>
+        <p:spPr>
+          <a:xfrm>
+            <a:off x="4335628" y="1645920"/>
+            <a:ext cx="3520440" cy="868680"/>
+          </a:xfrm>
+          <a:prstGeom prst="rect">
+            <a:avLst/>
+          </a:prstGeom>
+          <a:solidFill>
+            <a:srgbClr val="1B2D5C"/>
+          </a:solidFill>
+          <a:ln w="12700">
+            <a:solidFill>
+              <a:srgbClr val="1B2D5C"/>
+            </a:solidFill>
+            <a:prstDash val="solid"/>
+          </a:ln>
+        </p:spPr>
+      </p:sp>
+      <p:sp>
+        <p:nvSpPr>
+          <p:cNvPr id="17" name="Text 15"/>
+          <p:cNvSpPr txBox="1"/>
+          <p:nvPr/>
+        </p:nvSpPr>
+        <p:spPr>
+          <a:xfrm>
+            <a:off x="4564228" y="1737360"/>
+            <a:ext cx="3063240" cy="384048"/>
+          </a:xfrm>
+          <a:prstGeom prst="rect">
+            <a:avLst/>
+          </a:prstGeom>
+          <a:noFill/>
+          <a:ln/>
+        </p:spPr>
+        <p:txBody>
+          <a:bodyPr wrap="square" lIns="0" tIns="0" rIns="0" bIns="0" rtlCol="0" anchor="ctr"/>
+          <a:lstStyle/>
+          <a:p>
+            <a:pPr indent="0" marL="0">
+              <a:buNone/>
+            </a:pPr>
+            <a:r>
+              <a:rPr lang="en-US" sz="1600" b="1" dirty="0">
+                <a:solidFill>
+                  <a:srgbClr val="FFFFFF"/>
+                </a:solidFill>
+                <a:latin typeface="Arial" pitchFamily="34" charset="0"/>
+                <a:ea typeface="Arial" pitchFamily="34" charset="-122"/>
+                <a:cs typeface="Arial" pitchFamily="34" charset="-120"/>
+              </a:rPr>
+              <a:t>Centric PXM</a:t>
+            </a:r>
+            <a:endParaRPr lang="en-US" sz="1600" dirty="0"/>
+          </a:p>
+        </p:txBody>
+      </p:sp>
+      <p:sp>
+        <p:nvSpPr>
+          <p:cNvPr id="18" name="Text 16"/>
+          <p:cNvSpPr txBox="1"/>
+          <p:nvPr/>
+        </p:nvSpPr>
+        <p:spPr>
+          <a:xfrm>
+            <a:off x="4564228" y="2103120"/>
+            <a:ext cx="3063240" cy="365760"/>
+          </a:xfrm>
+          <a:prstGeom prst="rect">
+            <a:avLst/>
+          </a:prstGeom>
+          <a:noFill/>
+          <a:ln/>
+        </p:spPr>
+        <p:txBody>
+          <a:bodyPr wrap="square" lIns="0" tIns="0" rIns="0" bIns="0" rtlCol="0" anchor="t"/>
+          <a:lstStyle/>
+          <a:p>
+            <a:pPr indent="0" marL="0">
+              <a:buNone/>
+            </a:pPr>
+            <a:r>
+              <a:rPr lang="en-US" sz="1100" dirty="0">
+                <a:solidFill>
+                  <a:srgbClr val="C6E6E3"/>
+                </a:solidFill>
+                <a:latin typeface="Arial" pitchFamily="34" charset="0"/>
+                <a:ea typeface="Arial" pitchFamily="34" charset="-122"/>
+                <a:cs typeface="Arial" pitchFamily="34" charset="-120"/>
+              </a:rPr>
+              <a:t>ehem. Contentserv · seit 2025 bei Centric Software</a:t>
+            </a:r>
+            <a:endParaRPr lang="en-US" sz="1100" dirty="0"/>
+          </a:p>
+        </p:txBody>
+      </p:sp>
+      <p:sp>
+        <p:nvSpPr>
+          <p:cNvPr id="19" name="Shape 17"/>
+          <p:cNvSpPr/>
+          <p:nvPr/>
+        </p:nvSpPr>
+        <p:spPr>
+          <a:xfrm>
+            <a:off x="4335628" y="2514600"/>
+            <a:ext cx="3520440" cy="2880360"/>
+          </a:xfrm>
+          <a:prstGeom prst="rect">
+            <a:avLst/>
+          </a:prstGeom>
+          <a:solidFill>
+            <a:srgbClr val="FFFFFF"/>
+          </a:solidFill>
+          <a:ln w="12700">
+            <a:solidFill>
+              <a:srgbClr val="D6DDE3"/>
+            </a:solidFill>
+            <a:prstDash val="solid"/>
+          </a:ln>
+        </p:spPr>
+      </p:sp>
+      <p:sp>
+        <p:nvSpPr>
+          <p:cNvPr id="20" name="Text 18"/>
+          <p:cNvSpPr txBox="1"/>
+          <p:nvPr/>
+        </p:nvSpPr>
+        <p:spPr>
+          <a:xfrm>
+            <a:off x="4564228" y="2651760"/>
+            <a:ext cx="3063240" cy="228600"/>
+          </a:xfrm>
+          <a:prstGeom prst="rect">
+            <a:avLst/>
+          </a:prstGeom>
+          <a:noFill/>
+          <a:ln/>
+        </p:spPr>
+        <p:txBody>
+          <a:bodyPr wrap="square" lIns="0" tIns="0" rIns="0" bIns="0" rtlCol="0" anchor="t"/>
+          <a:lstStyle/>
+          <a:p>
+            <a:pPr indent="0" marL="0">
+              <a:buNone/>
+            </a:pPr>
+            <a:r>
+              <a:rPr lang="en-US" sz="1000" b="1" spc="100" kern="0" dirty="0">
+                <a:solidFill>
+                  <a:srgbClr val="4B5563"/>
+                </a:solidFill>
+                <a:latin typeface="Arial" pitchFamily="34" charset="0"/>
+                <a:ea typeface="Arial" pitchFamily="34" charset="-122"/>
+                <a:cs typeface="Arial" pitchFamily="34" charset="-120"/>
+              </a:rPr>
+              <a:t>EINSCHÄTZUNG</a:t>
+            </a:r>
+            <a:endParaRPr lang="en-US" sz="1000" dirty="0"/>
+          </a:p>
+        </p:txBody>
+      </p:sp>
+      <p:sp>
+        <p:nvSpPr>
+          <p:cNvPr id="21" name="Text 19"/>
+          <p:cNvSpPr txBox="1"/>
+          <p:nvPr/>
+        </p:nvSpPr>
+        <p:spPr>
+          <a:xfrm>
+            <a:off x="4564228" y="2907792"/>
+            <a:ext cx="3063240" cy="960120"/>
+          </a:xfrm>
+          <a:prstGeom prst="rect">
+            <a:avLst/>
+          </a:prstGeom>
+          <a:noFill/>
+          <a:ln/>
+        </p:spPr>
+        <p:txBody>
+          <a:bodyPr wrap="square" lIns="0" tIns="0" rIns="0" bIns="0" rtlCol="0" anchor="t"/>
+          <a:lstStyle/>
+          <a:p>
+            <a:pPr indent="0" marL="0">
+              <a:lnSpc>
+                <a:spcPct val="108000"/>
+              </a:lnSpc>
+              <a:buNone/>
+            </a:pPr>
+            <a:r>
+              <a:rPr lang="en-US" sz="1200" dirty="0">
+                <a:solidFill>
+                  <a:srgbClr val="16181D"/>
+                </a:solidFill>
+                <a:latin typeface="Arial" pitchFamily="34" charset="0"/>
+                <a:ea typeface="Arial" pitchFamily="34" charset="-122"/>
+                <a:cs typeface="Arial" pitchFamily="34" charset="-120"/>
+              </a:rPr>
+              <a:t>Enterprise-PIM mit Schwerpunkt Marketing-Content, Medien und Publishing; eingebettet in die Centric-Produktfamilie (PLM, Planung).</a:t>
+            </a:r>
+            <a:endParaRPr lang="en-US" sz="1200" dirty="0"/>
+          </a:p>
+        </p:txBody>
+      </p:sp>
+      <p:sp>
+        <p:nvSpPr>
+          <p:cNvPr id="22" name="Text 20"/>
+          <p:cNvSpPr txBox="1"/>
+          <p:nvPr/>
+        </p:nvSpPr>
+        <p:spPr>
+          <a:xfrm>
+            <a:off x="4564228" y="3913632"/>
+            <a:ext cx="3063240" cy="228600"/>
+          </a:xfrm>
+          <a:prstGeom prst="rect">
+            <a:avLst/>
+          </a:prstGeom>
+          <a:noFill/>
+          <a:ln/>
+        </p:spPr>
+        <p:txBody>
+          <a:bodyPr wrap="square" lIns="0" tIns="0" rIns="0" bIns="0" rtlCol="0" anchor="t"/>
+          <a:lstStyle/>
+          <a:p>
+            <a:pPr indent="0" marL="0">
+              <a:buNone/>
+            </a:pPr>
+            <a:r>
+              <a:rPr lang="en-US" sz="1000" b="1" spc="100" kern="0" dirty="0">
+                <a:solidFill>
+                  <a:srgbClr val="4B5563"/>
+                </a:solidFill>
+                <a:latin typeface="Arial" pitchFamily="34" charset="0"/>
+                <a:ea typeface="Arial" pitchFamily="34" charset="-122"/>
+                <a:cs typeface="Arial" pitchFamily="34" charset="-120"/>
+              </a:rPr>
+              <a:t>PASSUNG FÜR KOHLHAMMER</a:t>
+            </a:r>
+            <a:endParaRPr lang="en-US" sz="1000" dirty="0"/>
+          </a:p>
+        </p:txBody>
+      </p:sp>
+      <p:sp>
+        <p:nvSpPr>
+          <p:cNvPr id="23" name="Text 21"/>
+          <p:cNvSpPr txBox="1"/>
+          <p:nvPr/>
+        </p:nvSpPr>
+        <p:spPr>
+          <a:xfrm>
+            <a:off x="4564228" y="4169664"/>
+            <a:ext cx="3063240" cy="685800"/>
+          </a:xfrm>
+          <a:prstGeom prst="rect">
+            <a:avLst/>
+          </a:prstGeom>
+          <a:noFill/>
+          <a:ln/>
+        </p:spPr>
+        <p:txBody>
+          <a:bodyPr wrap="square" lIns="0" tIns="0" rIns="0" bIns="0" rtlCol="0" anchor="t"/>
+          <a:lstStyle/>
+          <a:p>
+            <a:pPr indent="0" marL="0">
+              <a:lnSpc>
+                <a:spcPct val="108000"/>
+              </a:lnSpc>
+              <a:buNone/>
+            </a:pPr>
+            <a:r>
+              <a:rPr lang="en-US" sz="1200" dirty="0">
+                <a:solidFill>
+                  <a:srgbClr val="16181D"/>
+                </a:solidFill>
+                <a:latin typeface="Arial" pitchFamily="34" charset="0"/>
+                <a:ea typeface="Arial" pitchFamily="34" charset="-122"/>
+                <a:cs typeface="Arial" pitchFamily="34" charset="-120"/>
+              </a:rPr>
+              <a:t>Passend bei hohem Marketing- und Print-Anteil; Kosten und Einführung auf Enterprise-Niveau.</a:t>
+            </a:r>
+            <a:endParaRPr lang="en-US" sz="1200" dirty="0"/>
+          </a:p>
+        </p:txBody>
+      </p:sp>
+      <p:sp>
+        <p:nvSpPr>
+          <p:cNvPr id="24" name="Shape 22"/>
+          <p:cNvSpPr/>
+          <p:nvPr/>
+        </p:nvSpPr>
+        <p:spPr>
+          <a:xfrm>
+            <a:off x="4564228" y="4892040"/>
+            <a:ext cx="3063240" cy="0"/>
+          </a:xfrm>
+          <a:prstGeom prst="line">
+            <a:avLst/>
+          </a:prstGeom>
+          <a:noFill/>
+          <a:ln w="12700">
+            <a:solidFill>
+              <a:srgbClr val="D6DDE3"/>
+            </a:solidFill>
+            <a:prstDash val="solid"/>
+          </a:ln>
+        </p:spPr>
+      </p:sp>
+      <p:sp>
+        <p:nvSpPr>
+          <p:cNvPr id="25" name="Text 23"/>
+          <p:cNvSpPr txBox="1"/>
+          <p:nvPr/>
+        </p:nvSpPr>
+        <p:spPr>
+          <a:xfrm>
+            <a:off x="4564228" y="4937760"/>
+            <a:ext cx="3063240" cy="411480"/>
+          </a:xfrm>
+          <a:prstGeom prst="rect">
+            <a:avLst/>
+          </a:prstGeom>
+          <a:noFill/>
+          <a:ln/>
+        </p:spPr>
+        <p:txBody>
+          <a:bodyPr wrap="square" lIns="0" tIns="0" rIns="0" bIns="0" rtlCol="0" anchor="ctr"/>
+          <a:lstStyle/>
+          <a:p>
+            <a:pPr indent="0" marL="0">
+              <a:buNone/>
+            </a:pPr>
+            <a:r>
+              <a:rPr lang="en-US" sz="1100" b="1" dirty="0">
+                <a:solidFill>
+                  <a:srgbClr val="4B5563"/>
+                </a:solidFill>
+                <a:latin typeface="Arial" pitchFamily="34" charset="0"/>
+                <a:ea typeface="Arial" pitchFamily="34" charset="-122"/>
+                <a:cs typeface="Arial" pitchFamily="34" charset="-120"/>
+              </a:rPr>
+              <a:t>Kosten  </a:t>
+            </a:r>
+            <a:pPr indent="0" marL="0">
+              <a:buNone/>
+            </a:pPr>
+            <a:r>
+              <a:rPr lang="en-US" sz="1800" b="1" dirty="0">
+                <a:solidFill>
+                  <a:srgbClr val="000E2F"/>
+                </a:solidFill>
+                <a:latin typeface="Arial" pitchFamily="34" charset="0"/>
+                <a:ea typeface="Arial" pitchFamily="34" charset="-122"/>
+                <a:cs typeface="Arial" pitchFamily="34" charset="-120"/>
+              </a:rPr>
+              <a:t>€€€</a:t>
+            </a:r>
+            <a:pPr indent="0" marL="0">
+              <a:buNone/>
+            </a:pPr>
+            <a:r>
+              <a:rPr lang="en-US" sz="1800" b="1" dirty="0">
+                <a:solidFill>
+                  <a:srgbClr val="D0D5DB"/>
+                </a:solidFill>
+                <a:latin typeface="Arial" pitchFamily="34" charset="0"/>
+                <a:ea typeface="Arial" pitchFamily="34" charset="-122"/>
+                <a:cs typeface="Arial" pitchFamily="34" charset="-120"/>
+              </a:rPr>
+              <a:t>€</a:t>
+            </a:r>
+            <a:endParaRPr lang="en-US" sz="1100" dirty="0"/>
+          </a:p>
+        </p:txBody>
+      </p:sp>
+      <p:sp>
+        <p:nvSpPr>
+          <p:cNvPr id="26" name="Shape 24"/>
+          <p:cNvSpPr/>
+          <p:nvPr/>
+        </p:nvSpPr>
+        <p:spPr>
+          <a:xfrm>
+            <a:off x="8122615" y="1645920"/>
+            <a:ext cx="3520440" cy="868680"/>
+          </a:xfrm>
+          <a:prstGeom prst="rect">
+            <a:avLst/>
+          </a:prstGeom>
+          <a:solidFill>
+            <a:srgbClr val="1B2D5C"/>
+          </a:solidFill>
+          <a:ln w="12700">
+            <a:solidFill>
+              <a:srgbClr val="1B2D5C"/>
+            </a:solidFill>
+            <a:prstDash val="solid"/>
+          </a:ln>
+        </p:spPr>
+      </p:sp>
+      <p:sp>
+        <p:nvSpPr>
+          <p:cNvPr id="27" name="Text 25"/>
+          <p:cNvSpPr txBox="1"/>
+          <p:nvPr/>
+        </p:nvSpPr>
+        <p:spPr>
+          <a:xfrm>
+            <a:off x="8351215" y="1737360"/>
+            <a:ext cx="3063240" cy="384048"/>
+          </a:xfrm>
+          <a:prstGeom prst="rect">
+            <a:avLst/>
+          </a:prstGeom>
+          <a:noFill/>
+          <a:ln/>
+        </p:spPr>
+        <p:txBody>
+          <a:bodyPr wrap="square" lIns="0" tIns="0" rIns="0" bIns="0" rtlCol="0" anchor="ctr"/>
+          <a:lstStyle/>
+          <a:p>
+            <a:pPr indent="0" marL="0">
+              <a:buNone/>
+            </a:pPr>
+            <a:r>
+              <a:rPr lang="en-US" sz="1600" b="1" dirty="0">
+                <a:solidFill>
+                  <a:srgbClr val="FFFFFF"/>
+                </a:solidFill>
+                <a:latin typeface="Arial" pitchFamily="34" charset="0"/>
+                <a:ea typeface="Arial" pitchFamily="34" charset="-122"/>
+                <a:cs typeface="Arial" pitchFamily="34" charset="-120"/>
+              </a:rPr>
+              <a:t>Akeneo</a:t>
+            </a:r>
+            <a:endParaRPr lang="en-US" sz="1600" dirty="0"/>
+          </a:p>
+        </p:txBody>
+      </p:sp>
+      <p:sp>
+        <p:nvSpPr>
+          <p:cNvPr id="28" name="Text 26"/>
+          <p:cNvSpPr txBox="1"/>
+          <p:nvPr/>
+        </p:nvSpPr>
+        <p:spPr>
+          <a:xfrm>
+            <a:off x="8351215" y="2103120"/>
+            <a:ext cx="3063240" cy="365760"/>
+          </a:xfrm>
+          <a:prstGeom prst="rect">
+            <a:avLst/>
+          </a:prstGeom>
+          <a:noFill/>
+          <a:ln/>
+        </p:spPr>
+        <p:txBody>
+          <a:bodyPr wrap="square" lIns="0" tIns="0" rIns="0" bIns="0" rtlCol="0" anchor="t"/>
+          <a:lstStyle/>
+          <a:p>
+            <a:pPr indent="0" marL="0">
+              <a:buNone/>
+            </a:pPr>
+            <a:r>
+              <a:rPr lang="en-US" sz="1100" dirty="0">
+                <a:solidFill>
+                  <a:srgbClr val="C6E6E3"/>
+                </a:solidFill>
+                <a:latin typeface="Arial" pitchFamily="34" charset="0"/>
+                <a:ea typeface="Arial" pitchFamily="34" charset="-122"/>
+                <a:cs typeface="Arial" pitchFamily="34" charset="-120"/>
+              </a:rPr>
+              <a:t>SaaS-PIM mit freier Community Edition</a:t>
+            </a:r>
+            <a:endParaRPr lang="en-US" sz="1100" dirty="0"/>
+          </a:p>
+        </p:txBody>
+      </p:sp>
+      <p:sp>
+        <p:nvSpPr>
+          <p:cNvPr id="29" name="Shape 27"/>
+          <p:cNvSpPr/>
+          <p:nvPr/>
+        </p:nvSpPr>
+        <p:spPr>
+          <a:xfrm>
+            <a:off x="8122615" y="2514600"/>
+            <a:ext cx="3520440" cy="2880360"/>
+          </a:xfrm>
+          <a:prstGeom prst="rect">
+            <a:avLst/>
+          </a:prstGeom>
+          <a:solidFill>
+            <a:srgbClr val="FFFFFF"/>
+          </a:solidFill>
+          <a:ln w="12700">
+            <a:solidFill>
+              <a:srgbClr val="D6DDE3"/>
+            </a:solidFill>
+            <a:prstDash val="solid"/>
+          </a:ln>
+        </p:spPr>
+      </p:sp>
+      <p:sp>
+        <p:nvSpPr>
+          <p:cNvPr id="30" name="Text 28"/>
+          <p:cNvSpPr txBox="1"/>
+          <p:nvPr/>
+        </p:nvSpPr>
+        <p:spPr>
+          <a:xfrm>
+            <a:off x="8351215" y="2651760"/>
+            <a:ext cx="3063240" cy="228600"/>
+          </a:xfrm>
+          <a:prstGeom prst="rect">
+            <a:avLst/>
+          </a:prstGeom>
+          <a:noFill/>
+          <a:ln/>
+        </p:spPr>
+        <p:txBody>
+          <a:bodyPr wrap="square" lIns="0" tIns="0" rIns="0" bIns="0" rtlCol="0" anchor="t"/>
+          <a:lstStyle/>
+          <a:p>
+            <a:pPr indent="0" marL="0">
+              <a:buNone/>
+            </a:pPr>
+            <a:r>
+              <a:rPr lang="en-US" sz="1000" b="1" spc="100" kern="0" dirty="0">
+                <a:solidFill>
+                  <a:srgbClr val="4B5563"/>
+                </a:solidFill>
+                <a:latin typeface="Arial" pitchFamily="34" charset="0"/>
+                <a:ea typeface="Arial" pitchFamily="34" charset="-122"/>
+                <a:cs typeface="Arial" pitchFamily="34" charset="-120"/>
+              </a:rPr>
+              <a:t>EINSCHÄTZUNG</a:t>
+            </a:r>
+            <a:endParaRPr lang="en-US" sz="1000" dirty="0"/>
+          </a:p>
+        </p:txBody>
+      </p:sp>
+      <p:sp>
+        <p:nvSpPr>
+          <p:cNvPr id="31" name="Text 29"/>
+          <p:cNvSpPr txBox="1"/>
+          <p:nvPr/>
+        </p:nvSpPr>
+        <p:spPr>
+          <a:xfrm>
+            <a:off x="8351215" y="2907792"/>
+            <a:ext cx="3063240" cy="960120"/>
+          </a:xfrm>
+          <a:prstGeom prst="rect">
+            <a:avLst/>
+          </a:prstGeom>
+          <a:noFill/>
+          <a:ln/>
+        </p:spPr>
+        <p:txBody>
+          <a:bodyPr wrap="square" lIns="0" tIns="0" rIns="0" bIns="0" rtlCol="0" anchor="t"/>
+          <a:lstStyle/>
+          <a:p>
+            <a:pPr indent="0" marL="0">
+              <a:lnSpc>
+                <a:spcPct val="108000"/>
+              </a:lnSpc>
+              <a:buNone/>
+            </a:pPr>
+            <a:r>
+              <a:rPr lang="en-US" sz="1200" dirty="0">
+                <a:solidFill>
+                  <a:srgbClr val="16181D"/>
+                </a:solidFill>
+                <a:latin typeface="Arial" pitchFamily="34" charset="0"/>
+                <a:ea typeface="Arial" pitchFamily="34" charset="-122"/>
+                <a:cs typeface="Arial" pitchFamily="34" charset="-120"/>
+              </a:rPr>
+              <a:t>Stark in der Anreicherung für E-Commerce und Marktplätze; großes Partner- und App-Ökosystem, cloudbasiert.</a:t>
+            </a:r>
+            <a:endParaRPr lang="en-US" sz="1200" dirty="0"/>
+          </a:p>
+        </p:txBody>
+      </p:sp>
+      <p:sp>
+        <p:nvSpPr>
+          <p:cNvPr id="32" name="Text 30"/>
+          <p:cNvSpPr txBox="1"/>
+          <p:nvPr/>
+        </p:nvSpPr>
+        <p:spPr>
+          <a:xfrm>
+            <a:off x="8351215" y="3913632"/>
+            <a:ext cx="3063240" cy="228600"/>
+          </a:xfrm>
+          <a:prstGeom prst="rect">
+            <a:avLst/>
+          </a:prstGeom>
+          <a:noFill/>
+          <a:ln/>
+        </p:spPr>
+        <p:txBody>
+          <a:bodyPr wrap="square" lIns="0" tIns="0" rIns="0" bIns="0" rtlCol="0" anchor="t"/>
+          <a:lstStyle/>
+          <a:p>
+            <a:pPr indent="0" marL="0">
+              <a:buNone/>
+            </a:pPr>
+            <a:r>
+              <a:rPr lang="en-US" sz="1000" b="1" spc="100" kern="0" dirty="0">
+                <a:solidFill>
+                  <a:srgbClr val="4B5563"/>
+                </a:solidFill>
+                <a:latin typeface="Arial" pitchFamily="34" charset="0"/>
+                <a:ea typeface="Arial" pitchFamily="34" charset="-122"/>
+                <a:cs typeface="Arial" pitchFamily="34" charset="-120"/>
+              </a:rPr>
+              <a:t>PASSUNG FÜR KOHLHAMMER</a:t>
+            </a:r>
+            <a:endParaRPr lang="en-US" sz="1000" dirty="0"/>
+          </a:p>
+        </p:txBody>
+      </p:sp>
+      <p:sp>
+        <p:nvSpPr>
+          <p:cNvPr id="33" name="Text 31"/>
+          <p:cNvSpPr txBox="1"/>
+          <p:nvPr/>
+        </p:nvSpPr>
+        <p:spPr>
+          <a:xfrm>
+            <a:off x="8351215" y="4169664"/>
+            <a:ext cx="3063240" cy="685800"/>
+          </a:xfrm>
+          <a:prstGeom prst="rect">
+            <a:avLst/>
+          </a:prstGeom>
+          <a:noFill/>
+          <a:ln/>
+        </p:spPr>
+        <p:txBody>
+          <a:bodyPr wrap="square" lIns="0" tIns="0" rIns="0" bIns="0" rtlCol="0" anchor="t"/>
+          <a:lstStyle/>
+          <a:p>
+            <a:pPr indent="0" marL="0">
+              <a:lnSpc>
+                <a:spcPct val="108000"/>
+              </a:lnSpc>
+              <a:buNone/>
+            </a:pPr>
+            <a:r>
+              <a:rPr lang="en-US" sz="1200" dirty="0">
+                <a:solidFill>
+                  <a:srgbClr val="16181D"/>
+                </a:solidFill>
+                <a:latin typeface="Arial" pitchFamily="34" charset="0"/>
+                <a:ea typeface="Arial" pitchFamily="34" charset="-122"/>
+                <a:cs typeface="Arial" pitchFamily="34" charset="-120"/>
+              </a:rPr>
+              <a:t>Gut für digitale Kanäle; Print- und Verlagsanforderungen meist über Erweiterungen oder Projektarbeit.</a:t>
+            </a:r>
+            <a:endParaRPr lang="en-US" sz="1200" dirty="0"/>
+          </a:p>
+        </p:txBody>
+      </p:sp>
+      <p:sp>
+        <p:nvSpPr>
+          <p:cNvPr id="34" name="Shape 32"/>
+          <p:cNvSpPr/>
+          <p:nvPr/>
+        </p:nvSpPr>
+        <p:spPr>
+          <a:xfrm>
+            <a:off x="8351215" y="4892040"/>
+            <a:ext cx="3063240" cy="0"/>
+          </a:xfrm>
+          <a:prstGeom prst="line">
+            <a:avLst/>
+          </a:prstGeom>
+          <a:noFill/>
+          <a:ln w="12700">
+            <a:solidFill>
+              <a:srgbClr val="D6DDE3"/>
+            </a:solidFill>
+            <a:prstDash val="solid"/>
+          </a:ln>
+        </p:spPr>
+      </p:sp>
+      <p:sp>
+        <p:nvSpPr>
+          <p:cNvPr id="35" name="Text 33"/>
+          <p:cNvSpPr txBox="1"/>
+          <p:nvPr/>
+        </p:nvSpPr>
+        <p:spPr>
+          <a:xfrm>
+            <a:off x="8351215" y="4937760"/>
+            <a:ext cx="3063240" cy="411480"/>
+          </a:xfrm>
+          <a:prstGeom prst="rect">
+            <a:avLst/>
+          </a:prstGeom>
+          <a:noFill/>
+          <a:ln/>
+        </p:spPr>
+        <p:txBody>
+          <a:bodyPr wrap="square" lIns="0" tIns="0" rIns="0" bIns="0" rtlCol="0" anchor="ctr"/>
+          <a:lstStyle/>
+          <a:p>
+            <a:pPr indent="0" marL="0">
+              <a:buNone/>
+            </a:pPr>
+            <a:r>
+              <a:rPr lang="en-US" sz="1100" b="1" dirty="0">
+                <a:solidFill>
+                  <a:srgbClr val="4B5563"/>
+                </a:solidFill>
+                <a:latin typeface="Arial" pitchFamily="34" charset="0"/>
+                <a:ea typeface="Arial" pitchFamily="34" charset="-122"/>
+                <a:cs typeface="Arial" pitchFamily="34" charset="-120"/>
+              </a:rPr>
+              <a:t>Kosten  </a:t>
+            </a:r>
+            <a:pPr indent="0" marL="0">
+              <a:buNone/>
+            </a:pPr>
+            <a:r>
+              <a:rPr lang="en-US" sz="1800" b="1" dirty="0">
+                <a:solidFill>
+                  <a:srgbClr val="000E2F"/>
+                </a:solidFill>
+                <a:latin typeface="Arial" pitchFamily="34" charset="0"/>
+                <a:ea typeface="Arial" pitchFamily="34" charset="-122"/>
+                <a:cs typeface="Arial" pitchFamily="34" charset="-120"/>
+              </a:rPr>
+              <a:t>€€</a:t>
+            </a:r>
+            <a:pPr indent="0" marL="0">
+              <a:buNone/>
+            </a:pPr>
+            <a:r>
+              <a:rPr lang="en-US" sz="1800" b="1" dirty="0">
+                <a:solidFill>
+                  <a:srgbClr val="D0D5DB"/>
+                </a:solidFill>
+                <a:latin typeface="Arial" pitchFamily="34" charset="0"/>
+                <a:ea typeface="Arial" pitchFamily="34" charset="-122"/>
+                <a:cs typeface="Arial" pitchFamily="34" charset="-120"/>
+              </a:rPr>
+              <a:t>€€</a:t>
+            </a:r>
+            <a:endParaRPr lang="en-US" sz="1100" dirty="0"/>
+          </a:p>
+        </p:txBody>
+      </p:sp>
+      <p:sp>
+        <p:nvSpPr>
+          <p:cNvPr id="36" name="Text 34"/>
+          <p:cNvSpPr txBox="1"/>
+          <p:nvPr/>
+        </p:nvSpPr>
+        <p:spPr>
+          <a:xfrm>
+            <a:off x="548640" y="5532120"/>
+            <a:ext cx="11094415" cy="457200"/>
+          </a:xfrm>
+          <a:prstGeom prst="rect">
+            <a:avLst/>
+          </a:prstGeom>
+          <a:noFill/>
+          <a:ln/>
+        </p:spPr>
+        <p:txBody>
+          <a:bodyPr wrap="square" lIns="0" tIns="0" rIns="0" bIns="0" rtlCol="0" anchor="t"/>
+          <a:lstStyle/>
+          <a:p>
+            <a:pPr indent="0" marL="0">
+              <a:buNone/>
+            </a:pPr>
+            <a:r>
+              <a:rPr lang="en-US" sz="1000" i="1" dirty="0">
+                <a:solidFill>
+                  <a:srgbClr val="4B5563"/>
+                </a:solidFill>
+                <a:latin typeface="Arial" pitchFamily="34" charset="0"/>
+                <a:ea typeface="Arial" pitchFamily="34" charset="-122"/>
+                <a:cs typeface="Arial" pitchFamily="34" charset="-120"/>
+              </a:rPr>
+              <a:t>Kosten als grobe Größenordnung für Lizenz bzw. Abonnement plus Einführung (€ gering bis €€€€ sehr hoch) – ohne Gewähr, abhängig von Umfang und Angebot. Akeneo Growth laut Drittquellen ab ca. 25.000 € pro Jahr; Stibo und Centric PXM nur auf Anfrage.</a:t>
+            </a:r>
+            <a:endParaRPr lang="en-US" sz="1000" dirty="0"/>
+          </a:p>
+        </p:txBody>
+      </p:sp>
+      <p:sp>
+        <p:nvSpPr>
+          <p:cNvPr id="37" name="Text 35"/>
+          <p:cNvSpPr txBox="1"/>
+          <p:nvPr/>
+        </p:nvSpPr>
+        <p:spPr>
+          <a:xfrm>
+            <a:off x="548640" y="5989320"/>
+            <a:ext cx="11094415" cy="274320"/>
+          </a:xfrm>
+          <a:prstGeom prst="rect">
+            <a:avLst/>
+          </a:prstGeom>
+          <a:noFill/>
+          <a:ln/>
+        </p:spPr>
+        <p:txBody>
+          <a:bodyPr wrap="square" lIns="0" tIns="0" rIns="0" bIns="0" rtlCol="0" anchor="t"/>
+          <a:lstStyle/>
+          <a:p>
+            <a:pPr indent="0" marL="0">
+              <a:buNone/>
+            </a:pPr>
+            <a:r>
+              <a:rPr lang="en-US" sz="900" dirty="0">
+                <a:solidFill>
+                  <a:srgbClr val="4B5563"/>
+                </a:solidFill>
+                <a:latin typeface="Arial" pitchFamily="34" charset="0"/>
+                <a:ea typeface="Arial" pitchFamily="34" charset="-122"/>
+                <a:cs typeface="Arial" pitchFamily="34" charset="-120"/>
+              </a:rPr>
+              <a:t>Quellen: Centric Software / Dassault Systèmes, Pressemitteilung zur Übernahme von Contentserv (Februar 2025); akeneo.com; OMR Reviews (Akeneo-Preise).</a:t>
+            </a:r>
+            <a:endParaRPr lang="en-US" sz="900" dirty="0"/>
+          </a:p>
+        </p:txBody>
+      </p:sp>
+    </p:spTree>
+  </p:cSld>
+  <p:clrMapOvr>
+    <a:masterClrMapping/>
+  </p:clrMapOvr>
+</p:sld>
+</file>
+
 <file path=ppt/slides/slide2.xml><?xml version="1.0" encoding="utf-8"?>
 <p:sld xmlns:a="http://schemas.openxmlformats.org/drawingml/2006/main" xmlns:r="http://schemas.openxmlformats.org/officeDocument/2006/relationships" xmlns:p="http://schemas.openxmlformats.org/presentationml/2006/main">
   <p:cSld name="Slide 2">
